--- a/반도체_투자_세미나_20260721.pptx
+++ b/반도체_투자_세미나_20260721.pptx
@@ -20,9 +20,11 @@
     <p:sldId id="268" r:id="rId14"/>
     <p:sldId id="269" r:id="rId15"/>
     <p:sldId id="270" r:id="rId16"/>
+    <p:sldId id="271" r:id="rId17"/>
+    <p:sldId id="272" r:id="rId18"/>
   </p:sldIdLst>
   <p:notesMasterIdLst>
-    <p:notesMasterId r:id="rId17"/>
+    <p:notesMasterId r:id="rId19"/>
   </p:notesMasterIdLst>
   <p:sldSz cx="12192000" cy="6858000"/>
   <p:notesSz cx="6858000" cy="12192000"/>
@@ -1307,6 +1309,389 @@
               <c:strCache>
                 <c:ptCount val="1"/>
                 <c:pt idx="0">
+                  <c:v>SK하이닉스</c:v>
+                </c:pt>
+              </c:strCache>
+            </c:strRef>
+          </c:tx>
+          <c:spPr>
+            <a:solidFill>
+              <a:srgbClr val="F58220"/>
+            </a:solidFill>
+            <a:ln w="38100" cap="flat">
+              <a:solidFill>
+                <a:srgbClr val="F58220"/>
+              </a:solidFill>
+              <a:prstDash val="solid"/>
+              <a:round/>
+            </a:ln>
+            <a:effectLst/>
+          </c:spPr>
+          <c:invertIfNegative val="0"/>
+          <c:dLbls>
+            <c:numFmt formatCode="#,##0&quot;%&quot;" sourceLinked="0"/>
+            <c:txPr>
+              <a:bodyPr/>
+              <a:lstStyle/>
+              <a:p>
+                <a:pPr>
+                  <a:defRPr b="0" i="0" strike="noStrike" sz="1100" u="none">
+                    <a:solidFill>
+                      <a:srgbClr val="1A1A1A"/>
+                    </a:solidFill>
+                    <a:latin typeface="Spoqa Han Sans Neo"/>
+                  </a:defRPr>
+                </a:pPr>
+              </a:p>
+            </c:txPr>
+            <c:dLblPos val="t"/>
+            <c:showLegendKey val="0"/>
+            <c:showVal val="1"/>
+            <c:showCatName val="0"/>
+            <c:showSerName val="0"/>
+            <c:showPercent val="0"/>
+            <c:showBubbleSize val="0"/>
+            <c:showLeaderLines val="0"/>
+          </c:dLbls>
+          <c:marker>
+            <c:symbol val="circle"/>
+            <c:size val="6"/>
+            <c:spPr>
+              <a:solidFill>
+                <a:srgbClr val="F58220"/>
+              </a:solidFill>
+              <a:ln w="9525" cap="flat">
+                <a:solidFill>
+                  <a:srgbClr val="F58220"/>
+                </a:solidFill>
+                <a:prstDash val="solid"/>
+                <a:round/>
+              </a:ln>
+              <a:effectLst/>
+            </c:spPr>
+          </c:marker>
+          <c:cat>
+            <c:multiLvlStrRef>
+              <c:f>Sheet1!$A$2:$A$4</c:f>
+              <c:multiLvlStrCache>
+                <c:ptCount val="3"/>
+                <c:lvl>
+                  <c:pt idx="0">
+                    <c:v>2025</c:v>
+                  </c:pt>
+                  <c:pt idx="1">
+                    <c:v>2026E</c:v>
+                  </c:pt>
+                  <c:pt idx="2">
+                    <c:v>2027E</c:v>
+                  </c:pt>
+                </c:lvl>
+              </c:multiLvlStrCache>
+            </c:multiLvlStrRef>
+          </c:cat>
+          <c:val>
+            <c:numRef>
+              <c:f>Sheet1!$B$2:$B$4</c:f>
+              <c:numCache>
+                <c:formatCode>General</c:formatCode>
+                <c:ptCount val="3"/>
+                <c:pt idx="0">
+                  <c:v>62</c:v>
+                </c:pt>
+                <c:pt idx="1">
+                  <c:v>58</c:v>
+                </c:pt>
+                <c:pt idx="2">
+                  <c:v>50</c:v>
+                </c:pt>
+              </c:numCache>
+            </c:numRef>
+          </c:val>
+          <c:smooth val="0"/>
+        </c:ser>
+        <c:ser>
+          <c:idx val="1"/>
+          <c:order val="1"/>
+          <c:tx>
+            <c:strRef>
+              <c:f>Sheet1!$C$1</c:f>
+              <c:strCache>
+                <c:ptCount val="1"/>
+                <c:pt idx="0">
+                  <c:v>삼성전자</c:v>
+                </c:pt>
+              </c:strCache>
+            </c:strRef>
+          </c:tx>
+          <c:spPr>
+            <a:solidFill>
+              <a:srgbClr val="043B72"/>
+            </a:solidFill>
+            <a:ln w="38100" cap="flat">
+              <a:solidFill>
+                <a:srgbClr val="043B72"/>
+              </a:solidFill>
+              <a:prstDash val="solid"/>
+              <a:round/>
+            </a:ln>
+            <a:effectLst/>
+          </c:spPr>
+          <c:invertIfNegative val="0"/>
+          <c:dLbls>
+            <c:numFmt formatCode="#,##0&quot;%&quot;" sourceLinked="0"/>
+            <c:txPr>
+              <a:bodyPr/>
+              <a:lstStyle/>
+              <a:p>
+                <a:pPr>
+                  <a:defRPr b="0" i="0" strike="noStrike" sz="1100" u="none">
+                    <a:solidFill>
+                      <a:srgbClr val="1A1A1A"/>
+                    </a:solidFill>
+                    <a:latin typeface="Spoqa Han Sans Neo"/>
+                  </a:defRPr>
+                </a:pPr>
+              </a:p>
+            </c:txPr>
+            <c:dLblPos val="t"/>
+            <c:showLegendKey val="0"/>
+            <c:showVal val="1"/>
+            <c:showCatName val="0"/>
+            <c:showSerName val="0"/>
+            <c:showPercent val="0"/>
+            <c:showBubbleSize val="0"/>
+            <c:showLeaderLines val="0"/>
+          </c:dLbls>
+          <c:marker>
+            <c:symbol val="circle"/>
+            <c:size val="6"/>
+            <c:spPr>
+              <a:solidFill>
+                <a:srgbClr val="043B72"/>
+              </a:solidFill>
+              <a:ln w="9525" cap="flat">
+                <a:solidFill>
+                  <a:srgbClr val="043B72"/>
+                </a:solidFill>
+                <a:prstDash val="solid"/>
+                <a:round/>
+              </a:ln>
+              <a:effectLst/>
+            </c:spPr>
+          </c:marker>
+          <c:cat>
+            <c:multiLvlStrRef>
+              <c:f>Sheet1!$A$2:$A$4</c:f>
+              <c:multiLvlStrCache>
+                <c:ptCount val="3"/>
+                <c:lvl>
+                  <c:pt idx="0">
+                    <c:v>2025</c:v>
+                  </c:pt>
+                  <c:pt idx="1">
+                    <c:v>2026E</c:v>
+                  </c:pt>
+                  <c:pt idx="2">
+                    <c:v>2027E</c:v>
+                  </c:pt>
+                </c:lvl>
+              </c:multiLvlStrCache>
+            </c:multiLvlStrRef>
+          </c:cat>
+          <c:val>
+            <c:numRef>
+              <c:f>Sheet1!$C$2:$C$4</c:f>
+              <c:numCache>
+                <c:formatCode>General</c:formatCode>
+                <c:ptCount val="3"/>
+                <c:pt idx="0">
+                  <c:v>17</c:v>
+                </c:pt>
+                <c:pt idx="1">
+                  <c:v>33</c:v>
+                </c:pt>
+                <c:pt idx="2">
+                  <c:v>48</c:v>
+                </c:pt>
+              </c:numCache>
+            </c:numRef>
+          </c:val>
+          <c:smooth val="0"/>
+        </c:ser>
+        <c:dLbls>
+          <c:numFmt formatCode="#,##0&quot;%&quot;" sourceLinked="0"/>
+          <c:txPr>
+            <a:bodyPr/>
+            <a:lstStyle/>
+            <a:p>
+              <a:pPr>
+                <a:defRPr b="0" i="0" strike="noStrike" sz="1100" u="none">
+                  <a:solidFill>
+                    <a:srgbClr val="1A1A1A"/>
+                  </a:solidFill>
+                  <a:latin typeface="Spoqa Han Sans Neo"/>
+                </a:defRPr>
+              </a:pPr>
+            </a:p>
+          </c:txPr>
+          <c:dLblPos val="t"/>
+          <c:showLegendKey val="0"/>
+          <c:showVal val="1"/>
+          <c:showCatName val="0"/>
+          <c:showSerName val="0"/>
+          <c:showPercent val="0"/>
+          <c:showBubbleSize val="0"/>
+          <c:showLeaderLines val="0"/>
+        </c:dLbls>
+        <c:marker val="1"/>
+        <c:axId val="2094734554"/>
+        <c:axId val="2094734552"/>
+        <c:axId val="2094734556"/>
+      </c:lineChart>
+      <c:catAx>
+        <c:axId val="2094734554"/>
+        <c:scaling>
+          <c:orientation val="minMax"/>
+        </c:scaling>
+        <c:delete val="0"/>
+        <c:axPos val="b"/>
+        <c:numFmt formatCode="General" sourceLinked="1"/>
+        <c:majorTickMark val="out"/>
+        <c:minorTickMark val="none"/>
+        <c:tickLblPos val="low"/>
+        <c:spPr>
+          <a:ln w="12700" cap="flat">
+            <a:solidFill>
+              <a:srgbClr val="888888"/>
+            </a:solidFill>
+            <a:prstDash val="solid"/>
+            <a:round/>
+          </a:ln>
+        </c:spPr>
+        <c:txPr>
+          <a:bodyPr/>
+          <a:lstStyle/>
+          <a:p>
+            <a:pPr>
+              <a:defRPr sz="1200" b="0" i="0" u="none" strike="noStrike">
+                <a:solidFill>
+                  <a:srgbClr val="1A1A1A"/>
+                </a:solidFill>
+                <a:latin typeface="Spoqa Han Sans Neo"/>
+              </a:defRPr>
+            </a:pPr>
+            <a:endParaRPr lang="en-US"/>
+          </a:p>
+        </c:txPr>
+        <c:crossAx val="2094734552"/>
+        <c:crosses val="autoZero"/>
+        <c:auto val="1"/>
+        <c:lblAlgn val="ctr"/>
+        <c:noMultiLvlLbl val="1"/>
+      </c:catAx>
+      <c:valAx>
+        <c:axId val="2094734552"/>
+        <c:scaling>
+          <c:orientation val="minMax"/>
+          <c:max val="75"/>
+        </c:scaling>
+        <c:delete val="1"/>
+        <c:axPos val="l"/>
+        <c:numFmt formatCode="General" sourceLinked="0"/>
+        <c:majorTickMark val="out"/>
+        <c:minorTickMark val="none"/>
+        <c:tickLblPos val="nextTo"/>
+        <c:spPr>
+          <a:ln w="12700" cap="flat">
+            <a:solidFill>
+              <a:srgbClr val="888888"/>
+            </a:solidFill>
+            <a:prstDash val="solid"/>
+            <a:round/>
+          </a:ln>
+        </c:spPr>
+        <c:txPr>
+          <a:bodyPr/>
+          <a:lstStyle/>
+          <a:p>
+            <a:pPr>
+              <a:defRPr sz="1200" b="0" i="0" u="none" strike="noStrike">
+                <a:solidFill>
+                  <a:srgbClr val="000000"/>
+                </a:solidFill>
+                <a:latin typeface="Arial"/>
+              </a:defRPr>
+            </a:pPr>
+            <a:endParaRPr lang="en-US"/>
+          </a:p>
+        </c:txPr>
+        <c:crossAx val="2094734554"/>
+        <c:crosses val="autoZero"/>
+        <c:crossBetween val="between"/>
+      </c:valAx>
+      <c:spPr>
+        <a:noFill/>
+        <a:ln>
+          <a:noFill/>
+        </a:ln>
+        <a:effectLst/>
+      </c:spPr>
+    </c:plotArea>
+    <c:legend>
+      <c:legendPos val="b"/>
+      <c:overlay val="0"/>
+      <c:txPr>
+        <a:bodyPr/>
+        <a:lstStyle/>
+        <a:p>
+          <a:pPr>
+            <a:defRPr sz="1100">
+              <a:solidFill>
+                <a:srgbClr val="6C6C6C"/>
+              </a:solidFill>
+              <a:latin typeface="Spoqa Han Sans Neo"/>
+              <a:cs typeface="Spoqa Han Sans Neo"/>
+            </a:defRPr>
+          </a:pPr>
+          <a:endParaRPr lang="en-US"/>
+        </a:p>
+      </c:txPr>
+    </c:legend>
+    <c:plotVisOnly val="1"/>
+    <c:dispBlanksAs val="span"/>
+  </c:chart>
+  <c:spPr>
+    <a:noFill/>
+    <a:ln>
+      <a:noFill/>
+    </a:ln>
+    <a:effectLst/>
+  </c:spPr>
+  <c:externalData r:id="rId1">
+    <c:autoUpdate val="0"/>
+  </c:externalData>
+</c:chartSpace>
+</file>
+
+<file path=ppt/charts/chart6.xml><?xml version="1.0" encoding="utf-8"?>
+<c:chartSpace xmlns:c="http://schemas.openxmlformats.org/drawingml/2006/chart" xmlns:a="http://schemas.openxmlformats.org/drawingml/2006/main" xmlns:r="http://schemas.openxmlformats.org/officeDocument/2006/relationships">
+  <c:date1904 val="0"/>
+  <c:roundedCorners val="1"/>
+  <c:chart>
+    <c:autoTitleDeleted val="1"/>
+    <c:plotArea>
+      <c:layout/>
+      <c:lineChart>
+        <c:varyColors val="0"/>
+        <c:ser>
+          <c:idx val="0"/>
+          <c:order val="0"/>
+          <c:tx>
+            <c:strRef>
+              <c:f>Sheet1!$B$1</c:f>
+              <c:strCache>
+                <c:ptCount val="1"/>
+                <c:pt idx="0">
                   <c:v>DRAM 점유율(%)</c:v>
                 </c:pt>
               </c:strCache>
@@ -2495,6 +2880,182 @@
             <a:fld id="{F7021451-1387-4CA6-816F-3879F97B5CBC}" type="slidenum">
               <a:rPr lang="en-US"/>
               <a:t>15</a:t>
+            </a:fld>
+            <a:endParaRPr lang="en-US"/>
+          </a:p>
+        </p:txBody>
+      </p:sp>
+    </p:spTree>
+    <p:extLst>
+      <p:ext uri="{BB962C8B-B14F-4D97-AF65-F5344CB8AC3E}">
+        <p14:creationId xmlns:p14="http://schemas.microsoft.com/office/powerpoint/2010/main" val="1024086991"/>
+      </p:ext>
+    </p:extLst>
+  </p:cSld>
+  <p:clrMapOvr>
+    <a:masterClrMapping/>
+  </p:clrMapOvr>
+</p:notes>
+</file>
+
+<file path=ppt/notesSlides/notesSlide16.xml><?xml version="1.0" encoding="utf-8"?>
+<p:notes xmlns:a="http://schemas.openxmlformats.org/drawingml/2006/main" xmlns:r="http://schemas.openxmlformats.org/officeDocument/2006/relationships" xmlns:p="http://schemas.openxmlformats.org/presentationml/2006/main">
+  <p:cSld>
+    <p:spTree>
+      <p:nvGrpSpPr>
+        <p:cNvPr id="1" name=""/>
+        <p:cNvGrpSpPr/>
+        <p:nvPr/>
+      </p:nvGrpSpPr>
+      <p:grpSpPr>
+        <a:xfrm>
+          <a:off x="0" y="0"/>
+          <a:ext cx="0" cy="0"/>
+          <a:chOff x="0" y="0"/>
+          <a:chExt cx="0" cy="0"/>
+        </a:xfrm>
+      </p:grpSpPr>
+      <p:sp>
+        <p:nvSpPr>
+          <p:cNvPr id="2" name="Slide Image Placeholder 1"/>
+          <p:cNvSpPr>
+            <a:spLocks noGrp="1" noRot="1" noChangeAspect="1"/>
+          </p:cNvSpPr>
+          <p:nvPr>
+            <p:ph type="sldImg"/>
+          </p:nvPr>
+        </p:nvSpPr>
+        <p:spPr/>
+      </p:sp>
+      <p:sp>
+        <p:nvSpPr>
+          <p:cNvPr id="3" name="Notes Placeholder 2"/>
+          <p:cNvSpPr>
+            <a:spLocks noGrp="1"/>
+          </p:cNvSpPr>
+          <p:nvPr>
+            <p:ph type="body" idx="1"/>
+          </p:nvPr>
+        </p:nvSpPr>
+        <p:spPr/>
+        <p:txBody>
+          <a:bodyPr/>
+          <a:lstStyle/>
+          <a:p>
+            <a:r>
+              <a:rPr lang="en-US" dirty="0"/>
+              <a:t/>
+            </a:r>
+            <a:endParaRPr lang="en-US" dirty="0"/>
+          </a:p>
+        </p:txBody>
+      </p:sp>
+      <p:sp>
+        <p:nvSpPr>
+          <p:cNvPr id="4" name="Slide Number Placeholder 3"/>
+          <p:cNvSpPr>
+            <a:spLocks noGrp="1"/>
+          </p:cNvSpPr>
+          <p:nvPr>
+            <p:ph type="sldNum" sz="quarter" idx="10"/>
+          </p:nvPr>
+        </p:nvSpPr>
+        <p:spPr/>
+        <p:txBody>
+          <a:bodyPr/>
+          <a:lstStyle/>
+          <a:p>
+            <a:fld id="{F7021451-1387-4CA6-816F-3879F97B5CBC}" type="slidenum">
+              <a:rPr lang="en-US"/>
+              <a:t>16</a:t>
+            </a:fld>
+            <a:endParaRPr lang="en-US"/>
+          </a:p>
+        </p:txBody>
+      </p:sp>
+    </p:spTree>
+    <p:extLst>
+      <p:ext uri="{BB962C8B-B14F-4D97-AF65-F5344CB8AC3E}">
+        <p14:creationId xmlns:p14="http://schemas.microsoft.com/office/powerpoint/2010/main" val="1024086991"/>
+      </p:ext>
+    </p:extLst>
+  </p:cSld>
+  <p:clrMapOvr>
+    <a:masterClrMapping/>
+  </p:clrMapOvr>
+</p:notes>
+</file>
+
+<file path=ppt/notesSlides/notesSlide17.xml><?xml version="1.0" encoding="utf-8"?>
+<p:notes xmlns:a="http://schemas.openxmlformats.org/drawingml/2006/main" xmlns:r="http://schemas.openxmlformats.org/officeDocument/2006/relationships" xmlns:p="http://schemas.openxmlformats.org/presentationml/2006/main">
+  <p:cSld>
+    <p:spTree>
+      <p:nvGrpSpPr>
+        <p:cNvPr id="1" name=""/>
+        <p:cNvGrpSpPr/>
+        <p:nvPr/>
+      </p:nvGrpSpPr>
+      <p:grpSpPr>
+        <a:xfrm>
+          <a:off x="0" y="0"/>
+          <a:ext cx="0" cy="0"/>
+          <a:chOff x="0" y="0"/>
+          <a:chExt cx="0" cy="0"/>
+        </a:xfrm>
+      </p:grpSpPr>
+      <p:sp>
+        <p:nvSpPr>
+          <p:cNvPr id="2" name="Slide Image Placeholder 1"/>
+          <p:cNvSpPr>
+            <a:spLocks noGrp="1" noRot="1" noChangeAspect="1"/>
+          </p:cNvSpPr>
+          <p:nvPr>
+            <p:ph type="sldImg"/>
+          </p:nvPr>
+        </p:nvSpPr>
+        <p:spPr/>
+      </p:sp>
+      <p:sp>
+        <p:nvSpPr>
+          <p:cNvPr id="3" name="Notes Placeholder 2"/>
+          <p:cNvSpPr>
+            <a:spLocks noGrp="1"/>
+          </p:cNvSpPr>
+          <p:nvPr>
+            <p:ph type="body" idx="1"/>
+          </p:nvPr>
+        </p:nvSpPr>
+        <p:spPr/>
+        <p:txBody>
+          <a:bodyPr/>
+          <a:lstStyle/>
+          <a:p>
+            <a:r>
+              <a:rPr lang="en-US" dirty="0"/>
+              <a:t/>
+            </a:r>
+            <a:endParaRPr lang="en-US" dirty="0"/>
+          </a:p>
+        </p:txBody>
+      </p:sp>
+      <p:sp>
+        <p:nvSpPr>
+          <p:cNvPr id="4" name="Slide Number Placeholder 3"/>
+          <p:cNvSpPr>
+            <a:spLocks noGrp="1"/>
+          </p:cNvSpPr>
+          <p:nvPr>
+            <p:ph type="sldNum" sz="quarter" idx="10"/>
+          </p:nvPr>
+        </p:nvSpPr>
+        <p:spPr/>
+        <p:txBody>
+          <a:bodyPr/>
+          <a:lstStyle/>
+          <a:p>
+            <a:fld id="{F7021451-1387-4CA6-816F-3879F97B5CBC}" type="slidenum">
+              <a:rPr lang="en-US"/>
+              <a:t>17</a:t>
             </a:fld>
             <a:endParaRPr lang="en-US"/>
           </a:p>
@@ -4770,7 +5331,7 @@
                 <a:ea typeface="Spoqa Han Sans Neo" pitchFamily="34" charset="-122"/>
                 <a:cs typeface="Spoqa Han Sans Neo" pitchFamily="34" charset="-120"/>
               </a:rPr>
-              <a:t>PART 04 · 변수</a:t>
+              <a:t>PART 04 · 국내 투 톱</a:t>
             </a:r>
             <a:endParaRPr lang="en-US" sz="1200" dirty="0"/>
           </a:p>
@@ -4809,7 +5370,7 @@
                 <a:ea typeface="Spoqa Han Sans Neo" pitchFamily="34" charset="-122"/>
                 <a:cs typeface="Spoqa Han Sans Neo" pitchFamily="34" charset="-120"/>
               </a:rPr>
-              <a:t>중국 CXMT: 공급 변수의 실체</a:t>
+              <a:t>SK하이닉스 vs 삼성전자: 메모리 양강</a:t>
             </a:r>
             <a:endParaRPr lang="en-US" sz="2700" dirty="0"/>
           </a:p>
@@ -4817,112 +5378,399 @@
       </p:sp>
       <p:sp>
         <p:nvSpPr>
-          <p:cNvPr id="5" name="Text 3"/>
-          <p:cNvSpPr/>
-          <p:nvPr/>
-        </p:nvSpPr>
-        <p:spPr>
-          <a:xfrm>
-            <a:off x="502920" y="1783080"/>
-            <a:ext cx="5303520" cy="320040"/>
-          </a:xfrm>
-          <a:prstGeom prst="rect">
-            <a:avLst/>
-          </a:prstGeom>
-          <a:noFill/>
-          <a:ln/>
-        </p:spPr>
-        <p:txBody>
-          <a:bodyPr wrap="square" lIns="0" tIns="0" rIns="0" bIns="0" rtlCol="0" anchor="ctr"/>
-          <a:lstStyle/>
-          <a:p>
-            <a:pPr indent="0" marL="0">
-              <a:buNone/>
-            </a:pPr>
-            <a:r>
-              <a:rPr lang="en-US" sz="1300" b="1" dirty="0">
-                <a:solidFill>
-                  <a:srgbClr val="1A1A1A"/>
-                </a:solidFill>
-                <a:latin typeface="Spoqa Han Sans Neo" pitchFamily="34" charset="0"/>
-                <a:ea typeface="Spoqa Han Sans Neo" pitchFamily="34" charset="-122"/>
-                <a:cs typeface="Spoqa Han Sans Neo" pitchFamily="34" charset="-120"/>
-              </a:rPr>
-              <a:t>CXMT 글로벌 DRAM 점유율</a:t>
-            </a:r>
-            <a:endParaRPr lang="en-US" sz="1300" dirty="0"/>
-          </a:p>
-        </p:txBody>
-      </p:sp>
-      <p:graphicFrame>
-        <p:nvGraphicFramePr>
-          <p:cNvPr id="6" name="Chart 0" descr=""/>
-          <p:cNvGraphicFramePr/>
-          <p:nvPr/>
-        </p:nvGraphicFramePr>
-        <p:xfrm>
-          <a:off x="457200" y="2148840"/>
-          <a:ext cx="5394960" cy="3017520"/>
-        </p:xfrm>
-        <a:graphic xmlns:a="http://schemas.openxmlformats.org/drawingml/2006/main">
-          <a:graphicData uri="http://schemas.openxmlformats.org/drawingml/2006/chart">
-            <c:chart xmlns:c="http://schemas.openxmlformats.org/drawingml/2006/chart" r:id="rId1"/>
-          </a:graphicData>
-        </a:graphic>
-      </p:graphicFrame>
-      <p:sp>
-        <p:nvSpPr>
-          <p:cNvPr id="7" name="Text 4"/>
-          <p:cNvSpPr/>
-          <p:nvPr/>
-        </p:nvSpPr>
-        <p:spPr>
-          <a:xfrm>
-            <a:off x="502920" y="5212080"/>
-            <a:ext cx="5394960" cy="640080"/>
-          </a:xfrm>
-          <a:prstGeom prst="rect">
-            <a:avLst/>
-          </a:prstGeom>
-          <a:noFill/>
-          <a:ln/>
-        </p:spPr>
-        <p:txBody>
-          <a:bodyPr wrap="square" lIns="0" tIns="0" rIns="0" bIns="0" rtlCol="0" anchor="ctr"/>
-          <a:lstStyle/>
-          <a:p>
-            <a:pPr indent="0" marL="0">
-              <a:buNone/>
-            </a:pPr>
-            <a:r>
-              <a:rPr lang="en-US" sz="1050" dirty="0">
-                <a:solidFill>
-                  <a:srgbClr val="3D3D3D"/>
-                </a:solidFill>
-                <a:latin typeface="Spoqa Han Sans Neo" pitchFamily="34" charset="0"/>
-                <a:ea typeface="Spoqa Han Sans Neo" pitchFamily="34" charset="-122"/>
-                <a:cs typeface="Spoqa Han Sans Neo" pitchFamily="34" charset="-120"/>
-              </a:rPr>
-              <a:t>2026E 약 350K WSPM — 마이크론과 격차 25K WSPM까지 축소. 세계 2위 DRAM 생산기지 부상.</a:t>
-            </a:r>
-            <a:endParaRPr lang="en-US" sz="1050" dirty="0"/>
-          </a:p>
-        </p:txBody>
-      </p:sp>
-      <p:sp>
-        <p:nvSpPr>
-          <p:cNvPr id="8" name="Shape 5"/>
-          <p:cNvSpPr/>
-          <p:nvPr/>
-        </p:nvSpPr>
-        <p:spPr>
-          <a:xfrm>
-            <a:off x="6108192" y="1828800"/>
-            <a:ext cx="5577840" cy="1920240"/>
+          <p:cNvPr id="5" name="Shape 3"/>
+          <p:cNvSpPr/>
+          <p:nvPr/>
+        </p:nvSpPr>
+        <p:spPr>
+          <a:xfrm>
+            <a:off x="502920" y="1645920"/>
+            <a:ext cx="5486400" cy="658368"/>
           </a:xfrm>
           <a:prstGeom prst="roundRect">
             <a:avLst>
-              <a:gd name="adj" fmla="val 1905"/>
+              <a:gd name="adj" fmla="val 5556"/>
+            </a:avLst>
+          </a:prstGeom>
+          <a:solidFill>
+            <a:srgbClr val="F58220"/>
+          </a:solidFill>
+          <a:ln/>
+        </p:spPr>
+      </p:sp>
+      <p:sp>
+        <p:nvSpPr>
+          <p:cNvPr id="6" name="Text 4"/>
+          <p:cNvSpPr/>
+          <p:nvPr/>
+        </p:nvSpPr>
+        <p:spPr>
+          <a:xfrm>
+            <a:off x="731520" y="1645920"/>
+            <a:ext cx="5120640" cy="658368"/>
+          </a:xfrm>
+          <a:prstGeom prst="rect">
+            <a:avLst/>
+          </a:prstGeom>
+          <a:noFill/>
+          <a:ln/>
+        </p:spPr>
+        <p:txBody>
+          <a:bodyPr wrap="square" lIns="0" tIns="0" rIns="0" bIns="0" rtlCol="0" anchor="ctr"/>
+          <a:lstStyle/>
+          <a:p>
+            <a:pPr indent="0" marL="0">
+              <a:buNone/>
+            </a:pPr>
+            <a:r>
+              <a:rPr lang="en-US" sz="1900" b="1" dirty="0">
+                <a:solidFill>
+                  <a:srgbClr val="FFFFFF"/>
+                </a:solidFill>
+                <a:latin typeface="Spoqa Han Sans Neo" pitchFamily="34" charset="0"/>
+                <a:ea typeface="Spoqa Han Sans Neo" pitchFamily="34" charset="-122"/>
+                <a:cs typeface="Spoqa Han Sans Neo" pitchFamily="34" charset="-120"/>
+              </a:rPr>
+              <a:t>SK하이닉스</a:t>
+            </a:r>
+            <a:pPr indent="0" marL="0">
+              <a:buNone/>
+            </a:pPr>
+            <a:r>
+              <a:rPr lang="en-US" sz="1200" dirty="0">
+                <a:solidFill>
+                  <a:srgbClr val="FFFFFF"/>
+                </a:solidFill>
+                <a:latin typeface="Spoqa Han Sans Neo" pitchFamily="34" charset="0"/>
+                <a:ea typeface="Spoqa Han Sans Neo" pitchFamily="34" charset="-122"/>
+                <a:cs typeface="Spoqa Han Sans Neo" pitchFamily="34" charset="-120"/>
+              </a:rPr>
+              <a:t>   HBM 슈퍼사이클 선두</a:t>
+            </a:r>
+            <a:endParaRPr lang="en-US" sz="1900" dirty="0"/>
+          </a:p>
+        </p:txBody>
+      </p:sp>
+      <p:sp>
+        <p:nvSpPr>
+          <p:cNvPr id="7" name="Shape 5"/>
+          <p:cNvSpPr/>
+          <p:nvPr/>
+        </p:nvSpPr>
+        <p:spPr>
+          <a:xfrm>
+            <a:off x="6199632" y="1645920"/>
+            <a:ext cx="5486400" cy="658368"/>
+          </a:xfrm>
+          <a:prstGeom prst="roundRect">
+            <a:avLst>
+              <a:gd name="adj" fmla="val 5556"/>
+            </a:avLst>
+          </a:prstGeom>
+          <a:solidFill>
+            <a:srgbClr val="043B72"/>
+          </a:solidFill>
+          <a:ln/>
+        </p:spPr>
+      </p:sp>
+      <p:sp>
+        <p:nvSpPr>
+          <p:cNvPr id="8" name="Text 6"/>
+          <p:cNvSpPr/>
+          <p:nvPr/>
+        </p:nvSpPr>
+        <p:spPr>
+          <a:xfrm>
+            <a:off x="6428232" y="1645920"/>
+            <a:ext cx="5120640" cy="658368"/>
+          </a:xfrm>
+          <a:prstGeom prst="rect">
+            <a:avLst/>
+          </a:prstGeom>
+          <a:noFill/>
+          <a:ln/>
+        </p:spPr>
+        <p:txBody>
+          <a:bodyPr wrap="square" lIns="0" tIns="0" rIns="0" bIns="0" rtlCol="0" anchor="ctr"/>
+          <a:lstStyle/>
+          <a:p>
+            <a:pPr indent="0" marL="0">
+              <a:buNone/>
+            </a:pPr>
+            <a:r>
+              <a:rPr lang="en-US" sz="1900" b="1" dirty="0">
+                <a:solidFill>
+                  <a:srgbClr val="FFFFFF"/>
+                </a:solidFill>
+                <a:latin typeface="Spoqa Han Sans Neo" pitchFamily="34" charset="0"/>
+                <a:ea typeface="Spoqa Han Sans Neo" pitchFamily="34" charset="-122"/>
+                <a:cs typeface="Spoqa Han Sans Neo" pitchFamily="34" charset="-120"/>
+              </a:rPr>
+              <a:t>삼성전자</a:t>
+            </a:r>
+            <a:pPr indent="0" marL="0">
+              <a:buNone/>
+            </a:pPr>
+            <a:r>
+              <a:rPr lang="en-US" sz="1200" dirty="0">
+                <a:solidFill>
+                  <a:srgbClr val="FFFFFF"/>
+                </a:solidFill>
+                <a:latin typeface="Spoqa Han Sans Neo" pitchFamily="34" charset="0"/>
+                <a:ea typeface="Spoqa Han Sans Neo" pitchFamily="34" charset="-122"/>
+                <a:cs typeface="Spoqa Han Sans Neo" pitchFamily="34" charset="-120"/>
+              </a:rPr>
+              <a:t>   HBM4·파운드리 반격</a:t>
+            </a:r>
+            <a:endParaRPr lang="en-US" sz="1900" dirty="0"/>
+          </a:p>
+        </p:txBody>
+      </p:sp>
+      <p:sp>
+        <p:nvSpPr>
+          <p:cNvPr id="9" name="Text 7"/>
+          <p:cNvSpPr/>
+          <p:nvPr/>
+        </p:nvSpPr>
+        <p:spPr>
+          <a:xfrm>
+            <a:off x="502920" y="2514600"/>
+            <a:ext cx="7315200" cy="274320"/>
+          </a:xfrm>
+          <a:prstGeom prst="rect">
+            <a:avLst/>
+          </a:prstGeom>
+          <a:noFill/>
+          <a:ln/>
+        </p:spPr>
+        <p:txBody>
+          <a:bodyPr wrap="square" lIns="0" tIns="0" rIns="0" bIns="0" rtlCol="0" anchor="ctr"/>
+          <a:lstStyle/>
+          <a:p>
+            <a:pPr indent="0" marL="0">
+              <a:buNone/>
+            </a:pPr>
+            <a:r>
+              <a:rPr lang="en-US" sz="1200" b="1" dirty="0">
+                <a:solidFill>
+                  <a:srgbClr val="1A1A1A"/>
+                </a:solidFill>
+                <a:latin typeface="Spoqa Han Sans Neo" pitchFamily="34" charset="0"/>
+                <a:ea typeface="Spoqa Han Sans Neo" pitchFamily="34" charset="-122"/>
+                <a:cs typeface="Spoqa Han Sans Neo" pitchFamily="34" charset="-120"/>
+              </a:rPr>
+              <a:t>HBM 시장점유율 · 2025 (매출 기준)</a:t>
+            </a:r>
+            <a:endParaRPr lang="en-US" sz="1200" dirty="0"/>
+          </a:p>
+        </p:txBody>
+      </p:sp>
+      <p:sp>
+        <p:nvSpPr>
+          <p:cNvPr id="10" name="Shape 8"/>
+          <p:cNvSpPr/>
+          <p:nvPr/>
+        </p:nvSpPr>
+        <p:spPr>
+          <a:xfrm>
+            <a:off x="502920" y="2834640"/>
+            <a:ext cx="6933529" cy="621792"/>
+          </a:xfrm>
+          <a:prstGeom prst="rect">
+            <a:avLst/>
+          </a:prstGeom>
+          <a:solidFill>
+            <a:srgbClr val="F58220"/>
+          </a:solidFill>
+          <a:ln w="19050">
+            <a:solidFill>
+              <a:srgbClr val="FFFFFF"/>
+            </a:solidFill>
+            <a:prstDash val="solid"/>
+          </a:ln>
+        </p:spPr>
+      </p:sp>
+      <p:sp>
+        <p:nvSpPr>
+          <p:cNvPr id="11" name="Text 9"/>
+          <p:cNvSpPr/>
+          <p:nvPr/>
+        </p:nvSpPr>
+        <p:spPr>
+          <a:xfrm>
+            <a:off x="502920" y="2834640"/>
+            <a:ext cx="6933529" cy="621792"/>
+          </a:xfrm>
+          <a:prstGeom prst="rect">
+            <a:avLst/>
+          </a:prstGeom>
+          <a:noFill/>
+          <a:ln/>
+        </p:spPr>
+        <p:txBody>
+          <a:bodyPr wrap="square" lIns="0" tIns="0" rIns="0" bIns="0" rtlCol="0" anchor="ctr"/>
+          <a:lstStyle/>
+          <a:p>
+            <a:pPr algn="ctr" indent="0" marL="0">
+              <a:buNone/>
+            </a:pPr>
+            <a:r>
+              <a:rPr lang="en-US" sz="1200" b="1" dirty="0">
+                <a:solidFill>
+                  <a:srgbClr val="FFFFFF"/>
+                </a:solidFill>
+                <a:latin typeface="Spoqa Han Sans Neo" pitchFamily="34" charset="0"/>
+                <a:ea typeface="Spoqa Han Sans Neo" pitchFamily="34" charset="-122"/>
+                <a:cs typeface="Spoqa Han Sans Neo" pitchFamily="34" charset="-120"/>
+              </a:rPr>
+              <a:t>SK하이닉스 62%</a:t>
+            </a:r>
+            <a:endParaRPr lang="en-US" sz="1200" dirty="0"/>
+          </a:p>
+        </p:txBody>
+      </p:sp>
+      <p:sp>
+        <p:nvSpPr>
+          <p:cNvPr id="12" name="Shape 10"/>
+          <p:cNvSpPr/>
+          <p:nvPr/>
+        </p:nvSpPr>
+        <p:spPr>
+          <a:xfrm>
+            <a:off x="7436449" y="2834640"/>
+            <a:ext cx="2348454" cy="621792"/>
+          </a:xfrm>
+          <a:prstGeom prst="rect">
+            <a:avLst/>
+          </a:prstGeom>
+          <a:solidFill>
+            <a:srgbClr val="6C6C6C"/>
+          </a:solidFill>
+          <a:ln w="19050">
+            <a:solidFill>
+              <a:srgbClr val="FFFFFF"/>
+            </a:solidFill>
+            <a:prstDash val="solid"/>
+          </a:ln>
+        </p:spPr>
+      </p:sp>
+      <p:sp>
+        <p:nvSpPr>
+          <p:cNvPr id="13" name="Text 11"/>
+          <p:cNvSpPr/>
+          <p:nvPr/>
+        </p:nvSpPr>
+        <p:spPr>
+          <a:xfrm>
+            <a:off x="7436449" y="2834640"/>
+            <a:ext cx="2348454" cy="621792"/>
+          </a:xfrm>
+          <a:prstGeom prst="rect">
+            <a:avLst/>
+          </a:prstGeom>
+          <a:noFill/>
+          <a:ln/>
+        </p:spPr>
+        <p:txBody>
+          <a:bodyPr wrap="square" lIns="0" tIns="0" rIns="0" bIns="0" rtlCol="0" anchor="ctr"/>
+          <a:lstStyle/>
+          <a:p>
+            <a:pPr algn="ctr" indent="0" marL="0">
+              <a:buNone/>
+            </a:pPr>
+            <a:r>
+              <a:rPr lang="en-US" sz="1200" b="1" dirty="0">
+                <a:solidFill>
+                  <a:srgbClr val="FFFFFF"/>
+                </a:solidFill>
+                <a:latin typeface="Spoqa Han Sans Neo" pitchFamily="34" charset="0"/>
+                <a:ea typeface="Spoqa Han Sans Neo" pitchFamily="34" charset="-122"/>
+                <a:cs typeface="Spoqa Han Sans Neo" pitchFamily="34" charset="-120"/>
+              </a:rPr>
+              <a:t>마이크론 21%</a:t>
+            </a:r>
+            <a:endParaRPr lang="en-US" sz="1200" dirty="0"/>
+          </a:p>
+        </p:txBody>
+      </p:sp>
+      <p:sp>
+        <p:nvSpPr>
+          <p:cNvPr id="14" name="Shape 12"/>
+          <p:cNvSpPr/>
+          <p:nvPr/>
+        </p:nvSpPr>
+        <p:spPr>
+          <a:xfrm>
+            <a:off x="9784903" y="2834640"/>
+            <a:ext cx="1901129" cy="621792"/>
+          </a:xfrm>
+          <a:prstGeom prst="rect">
+            <a:avLst/>
+          </a:prstGeom>
+          <a:solidFill>
+            <a:srgbClr val="043B72"/>
+          </a:solidFill>
+          <a:ln w="19050">
+            <a:solidFill>
+              <a:srgbClr val="FFFFFF"/>
+            </a:solidFill>
+            <a:prstDash val="solid"/>
+          </a:ln>
+        </p:spPr>
+      </p:sp>
+      <p:sp>
+        <p:nvSpPr>
+          <p:cNvPr id="15" name="Text 13"/>
+          <p:cNvSpPr/>
+          <p:nvPr/>
+        </p:nvSpPr>
+        <p:spPr>
+          <a:xfrm>
+            <a:off x="9784903" y="2834640"/>
+            <a:ext cx="1901129" cy="621792"/>
+          </a:xfrm>
+          <a:prstGeom prst="rect">
+            <a:avLst/>
+          </a:prstGeom>
+          <a:noFill/>
+          <a:ln/>
+        </p:spPr>
+        <p:txBody>
+          <a:bodyPr wrap="square" lIns="0" tIns="0" rIns="0" bIns="0" rtlCol="0" anchor="ctr"/>
+          <a:lstStyle/>
+          <a:p>
+            <a:pPr algn="ctr" indent="0" marL="0">
+              <a:buNone/>
+            </a:pPr>
+            <a:r>
+              <a:rPr lang="en-US" sz="1000" b="1" dirty="0">
+                <a:solidFill>
+                  <a:srgbClr val="FFFFFF"/>
+                </a:solidFill>
+                <a:latin typeface="Spoqa Han Sans Neo" pitchFamily="34" charset="0"/>
+                <a:ea typeface="Spoqa Han Sans Neo" pitchFamily="34" charset="-122"/>
+                <a:cs typeface="Spoqa Han Sans Neo" pitchFamily="34" charset="-120"/>
+              </a:rPr>
+              <a:t>삼성전자 17%</a:t>
+            </a:r>
+            <a:endParaRPr lang="en-US" sz="1000" dirty="0"/>
+          </a:p>
+        </p:txBody>
+      </p:sp>
+      <p:sp>
+        <p:nvSpPr>
+          <p:cNvPr id="16" name="Shape 14"/>
+          <p:cNvSpPr/>
+          <p:nvPr/>
+        </p:nvSpPr>
+        <p:spPr>
+          <a:xfrm>
+            <a:off x="502920" y="3749040"/>
+            <a:ext cx="5486400" cy="2148840"/>
+          </a:xfrm>
+          <a:prstGeom prst="roundRect">
+            <a:avLst>
+              <a:gd name="adj" fmla="val 1702"/>
             </a:avLst>
           </a:prstGeom>
           <a:solidFill>
@@ -4938,107 +5786,255 @@
       </p:sp>
       <p:sp>
         <p:nvSpPr>
-          <p:cNvPr id="9" name="Text 6"/>
-          <p:cNvSpPr/>
-          <p:nvPr/>
-        </p:nvSpPr>
-        <p:spPr>
-          <a:xfrm>
-            <a:off x="6336792" y="1965960"/>
-            <a:ext cx="5120640" cy="320040"/>
-          </a:xfrm>
-          <a:prstGeom prst="rect">
-            <a:avLst/>
-          </a:prstGeom>
-          <a:noFill/>
-          <a:ln/>
-        </p:spPr>
-        <p:txBody>
-          <a:bodyPr wrap="square" lIns="0" tIns="0" rIns="0" bIns="0" rtlCol="0" anchor="ctr"/>
-          <a:lstStyle/>
-          <a:p>
-            <a:pPr indent="0" marL="0">
-              <a:buNone/>
-            </a:pPr>
-            <a:r>
-              <a:rPr lang="en-US" sz="1300" b="1" dirty="0">
-                <a:solidFill>
-                  <a:srgbClr val="C62828"/>
-                </a:solidFill>
-                <a:latin typeface="Spoqa Han Sans Neo" pitchFamily="34" charset="0"/>
-                <a:ea typeface="Spoqa Han Sans Neo" pitchFamily="34" charset="-122"/>
-                <a:cs typeface="Spoqa Han Sans Neo" pitchFamily="34" charset="-120"/>
-              </a:rPr>
-              <a:t>리스크 — 범용 DRAM 가격 압박</a:t>
-            </a:r>
-            <a:endParaRPr lang="en-US" sz="1300" dirty="0"/>
-          </a:p>
-        </p:txBody>
-      </p:sp>
-      <p:sp>
-        <p:nvSpPr>
-          <p:cNvPr id="10" name="Text 7"/>
-          <p:cNvSpPr/>
-          <p:nvPr/>
-        </p:nvSpPr>
-        <p:spPr>
-          <a:xfrm>
-            <a:off x="6336792" y="2286000"/>
-            <a:ext cx="5120640" cy="1371600"/>
-          </a:xfrm>
-          <a:prstGeom prst="rect">
-            <a:avLst/>
-          </a:prstGeom>
-          <a:noFill/>
-          <a:ln/>
-        </p:spPr>
-        <p:txBody>
-          <a:bodyPr wrap="square" lIns="0" tIns="0" rIns="0" bIns="0" rtlCol="0" anchor="ctr"/>
-          <a:lstStyle/>
-          <a:p>
-            <a:pPr indent="0" marL="0">
-              <a:lnSpc>
-                <a:spcPts val="1600"/>
-              </a:lnSpc>
-              <a:buNone/>
-            </a:pPr>
-            <a:r>
-              <a:rPr lang="en-US" sz="1150" dirty="0">
-                <a:solidFill>
-                  <a:srgbClr val="3D3D3D"/>
-                </a:solidFill>
-                <a:latin typeface="Spoqa Han Sans Neo" pitchFamily="34" charset="0"/>
-                <a:ea typeface="Spoqa Han Sans Neo" pitchFamily="34" charset="-122"/>
-                <a:cs typeface="Spoqa Han Sans Neo" pitchFamily="34" charset="-120"/>
-              </a:rPr>
-              <a:t>공격적 증설이 레거시·범용 DRAM 가격의 상단을 누를 수 있음. 2023→2026 점유율 4%→11%로 3배 가까이 확대.</a:t>
-            </a:r>
-            <a:endParaRPr lang="en-US" sz="1150" dirty="0"/>
-          </a:p>
-        </p:txBody>
-      </p:sp>
-      <p:sp>
-        <p:nvSpPr>
-          <p:cNvPr id="11" name="Shape 8"/>
-          <p:cNvSpPr/>
-          <p:nvPr/>
-        </p:nvSpPr>
-        <p:spPr>
-          <a:xfrm>
-            <a:off x="6108192" y="3886200"/>
-            <a:ext cx="5577840" cy="2011680"/>
+          <p:cNvPr id="17" name="Text 15"/>
+          <p:cNvSpPr/>
+          <p:nvPr/>
+        </p:nvSpPr>
+        <p:spPr>
+          <a:xfrm>
+            <a:off x="731520" y="3913632"/>
+            <a:ext cx="5029200" cy="274320"/>
+          </a:xfrm>
+          <a:prstGeom prst="rect">
+            <a:avLst/>
+          </a:prstGeom>
+          <a:noFill/>
+          <a:ln/>
+        </p:spPr>
+        <p:txBody>
+          <a:bodyPr wrap="square" lIns="0" tIns="0" rIns="0" bIns="0" rtlCol="0" anchor="ctr"/>
+          <a:lstStyle/>
+          <a:p>
+            <a:pPr indent="0" marL="0">
+              <a:buNone/>
+            </a:pPr>
+            <a:r>
+              <a:rPr lang="en-US" sz="1200" b="1" dirty="0">
+                <a:solidFill>
+                  <a:srgbClr val="6C6C6C"/>
+                </a:solidFill>
+                <a:latin typeface="Spoqa Han Sans Neo" pitchFamily="34" charset="0"/>
+                <a:ea typeface="Spoqa Han Sans Neo" pitchFamily="34" charset="-122"/>
+                <a:cs typeface="Spoqa Han Sans Neo" pitchFamily="34" charset="-120"/>
+              </a:rPr>
+              <a:t>DRAM 시장점유율 · 2025</a:t>
+            </a:r>
+            <a:endParaRPr lang="en-US" sz="1200" dirty="0"/>
+          </a:p>
+        </p:txBody>
+      </p:sp>
+      <p:sp>
+        <p:nvSpPr>
+          <p:cNvPr id="18" name="Text 16"/>
+          <p:cNvSpPr/>
+          <p:nvPr/>
+        </p:nvSpPr>
+        <p:spPr>
+          <a:xfrm>
+            <a:off x="731520" y="4224528"/>
+            <a:ext cx="2651760" cy="868680"/>
+          </a:xfrm>
+          <a:prstGeom prst="rect">
+            <a:avLst/>
+          </a:prstGeom>
+          <a:noFill/>
+          <a:ln/>
+        </p:spPr>
+        <p:txBody>
+          <a:bodyPr wrap="square" lIns="0" tIns="0" rIns="0" bIns="0" rtlCol="0" anchor="ctr"/>
+          <a:lstStyle/>
+          <a:p>
+            <a:pPr indent="0" marL="0">
+              <a:buNone/>
+            </a:pPr>
+            <a:r>
+              <a:rPr lang="en-US" sz="4000" b="1" dirty="0">
+                <a:solidFill>
+                  <a:srgbClr val="F58220"/>
+                </a:solidFill>
+                <a:latin typeface="Spoqa Han Sans Neo" pitchFamily="34" charset="0"/>
+                <a:ea typeface="Spoqa Han Sans Neo" pitchFamily="34" charset="-122"/>
+                <a:cs typeface="Spoqa Han Sans Neo" pitchFamily="34" charset="-120"/>
+              </a:rPr>
+              <a:t>34.8%</a:t>
+            </a:r>
+            <a:endParaRPr lang="en-US" sz="4000" dirty="0"/>
+          </a:p>
+        </p:txBody>
+      </p:sp>
+      <p:sp>
+        <p:nvSpPr>
+          <p:cNvPr id="19" name="Text 17"/>
+          <p:cNvSpPr/>
+          <p:nvPr/>
+        </p:nvSpPr>
+        <p:spPr>
+          <a:xfrm>
+            <a:off x="731520" y="5074920"/>
+            <a:ext cx="2651760" cy="548640"/>
+          </a:xfrm>
+          <a:prstGeom prst="rect">
+            <a:avLst/>
+          </a:prstGeom>
+          <a:noFill/>
+          <a:ln/>
+        </p:spPr>
+        <p:txBody>
+          <a:bodyPr wrap="square" lIns="0" tIns="0" rIns="0" bIns="0" rtlCol="0" anchor="ctr"/>
+          <a:lstStyle/>
+          <a:p>
+            <a:pPr indent="0" marL="0">
+              <a:buNone/>
+            </a:pPr>
+            <a:r>
+              <a:rPr lang="en-US" sz="1200" b="1" dirty="0">
+                <a:solidFill>
+                  <a:srgbClr val="1A1A1A"/>
+                </a:solidFill>
+                <a:latin typeface="Spoqa Han Sans Neo" pitchFamily="34" charset="0"/>
+                <a:ea typeface="Spoqa Han Sans Neo" pitchFamily="34" charset="-122"/>
+                <a:cs typeface="Spoqa Han Sans Neo" pitchFamily="34" charset="-120"/>
+              </a:rPr>
+              <a:t>SK하이닉스</a:t>
+            </a:r>
+            <a:endParaRPr lang="en-US" sz="1200" dirty="0"/>
+          </a:p>
+          <a:p>
+            <a:pPr indent="0" marL="0">
+              <a:buNone/>
+            </a:pPr>
+            <a:r>
+              <a:rPr lang="en-US" sz="1100" dirty="0">
+                <a:solidFill>
+                  <a:srgbClr val="2E8540"/>
+                </a:solidFill>
+                <a:latin typeface="Spoqa Han Sans Neo" pitchFamily="34" charset="0"/>
+                <a:ea typeface="Spoqa Han Sans Neo" pitchFamily="34" charset="-122"/>
+                <a:cs typeface="Spoqa Han Sans Neo" pitchFamily="34" charset="-120"/>
+              </a:rPr>
+              <a:t>글로벌 1위 (IDC)</a:t>
+            </a:r>
+            <a:endParaRPr lang="en-US" sz="1200" dirty="0"/>
+          </a:p>
+        </p:txBody>
+      </p:sp>
+      <p:sp>
+        <p:nvSpPr>
+          <p:cNvPr id="20" name="Text 18"/>
+          <p:cNvSpPr/>
+          <p:nvPr/>
+        </p:nvSpPr>
+        <p:spPr>
+          <a:xfrm>
+            <a:off x="3429000" y="4224528"/>
+            <a:ext cx="2377440" cy="868680"/>
+          </a:xfrm>
+          <a:prstGeom prst="rect">
+            <a:avLst/>
+          </a:prstGeom>
+          <a:noFill/>
+          <a:ln/>
+        </p:spPr>
+        <p:txBody>
+          <a:bodyPr wrap="square" lIns="0" tIns="0" rIns="0" bIns="0" rtlCol="0" anchor="ctr"/>
+          <a:lstStyle/>
+          <a:p>
+            <a:pPr indent="0" marL="0">
+              <a:buNone/>
+            </a:pPr>
+            <a:r>
+              <a:rPr lang="en-US" sz="4000" b="1" dirty="0">
+                <a:solidFill>
+                  <a:srgbClr val="043B72"/>
+                </a:solidFill>
+                <a:latin typeface="Spoqa Han Sans Neo" pitchFamily="34" charset="0"/>
+                <a:ea typeface="Spoqa Han Sans Neo" pitchFamily="34" charset="-122"/>
+                <a:cs typeface="Spoqa Han Sans Neo" pitchFamily="34" charset="-120"/>
+              </a:rPr>
+              <a:t>34%</a:t>
+            </a:r>
+            <a:endParaRPr lang="en-US" sz="4000" dirty="0"/>
+          </a:p>
+        </p:txBody>
+      </p:sp>
+      <p:sp>
+        <p:nvSpPr>
+          <p:cNvPr id="21" name="Text 19"/>
+          <p:cNvSpPr/>
+          <p:nvPr/>
+        </p:nvSpPr>
+        <p:spPr>
+          <a:xfrm>
+            <a:off x="3429000" y="5074920"/>
+            <a:ext cx="2377440" cy="548640"/>
+          </a:xfrm>
+          <a:prstGeom prst="rect">
+            <a:avLst/>
+          </a:prstGeom>
+          <a:noFill/>
+          <a:ln/>
+        </p:spPr>
+        <p:txBody>
+          <a:bodyPr wrap="square" lIns="0" tIns="0" rIns="0" bIns="0" rtlCol="0" anchor="ctr"/>
+          <a:lstStyle/>
+          <a:p>
+            <a:pPr indent="0" marL="0">
+              <a:buNone/>
+            </a:pPr>
+            <a:r>
+              <a:rPr lang="en-US" sz="1200" b="1" dirty="0">
+                <a:solidFill>
+                  <a:srgbClr val="1A1A1A"/>
+                </a:solidFill>
+                <a:latin typeface="Spoqa Han Sans Neo" pitchFamily="34" charset="0"/>
+                <a:ea typeface="Spoqa Han Sans Neo" pitchFamily="34" charset="-122"/>
+                <a:cs typeface="Spoqa Han Sans Neo" pitchFamily="34" charset="-120"/>
+              </a:rPr>
+              <a:t>삼성전자</a:t>
+            </a:r>
+            <a:endParaRPr lang="en-US" sz="1200" dirty="0"/>
+          </a:p>
+          <a:p>
+            <a:pPr indent="0" marL="0">
+              <a:buNone/>
+            </a:pPr>
+            <a:r>
+              <a:rPr lang="en-US" sz="1100" dirty="0">
+                <a:solidFill>
+                  <a:srgbClr val="6C6C6C"/>
+                </a:solidFill>
+                <a:latin typeface="Spoqa Han Sans Neo" pitchFamily="34" charset="0"/>
+                <a:ea typeface="Spoqa Han Sans Neo" pitchFamily="34" charset="-122"/>
+                <a:cs typeface="Spoqa Han Sans Neo" pitchFamily="34" charset="-120"/>
+              </a:rPr>
+              <a:t>근소한 2위</a:t>
+            </a:r>
+            <a:endParaRPr lang="en-US" sz="1200" dirty="0"/>
+          </a:p>
+        </p:txBody>
+      </p:sp>
+      <p:sp>
+        <p:nvSpPr>
+          <p:cNvPr id="22" name="Shape 20"/>
+          <p:cNvSpPr/>
+          <p:nvPr/>
+        </p:nvSpPr>
+        <p:spPr>
+          <a:xfrm>
+            <a:off x="6199632" y="3749040"/>
+            <a:ext cx="5486400" cy="2148840"/>
           </a:xfrm>
           <a:prstGeom prst="roundRect">
             <a:avLst>
-              <a:gd name="adj" fmla="val 1818"/>
+              <a:gd name="adj" fmla="val 1702"/>
             </a:avLst>
           </a:prstGeom>
           <a:solidFill>
-            <a:srgbClr val="FFFFFF"/>
+            <a:srgbClr val="F7F8FA"/>
           </a:solidFill>
-          <a:ln w="15875">
+          <a:ln w="12700">
             <a:solidFill>
-              <a:srgbClr val="043B72"/>
+              <a:srgbClr val="CDCECB"/>
             </a:solidFill>
             <a:prstDash val="solid"/>
           </a:ln>
@@ -5046,30 +6042,164 @@
       </p:sp>
       <p:sp>
         <p:nvSpPr>
-          <p:cNvPr id="12" name="Text 9"/>
-          <p:cNvSpPr/>
-          <p:nvPr/>
-        </p:nvSpPr>
-        <p:spPr>
-          <a:xfrm>
-            <a:off x="6336792" y="4023360"/>
-            <a:ext cx="5120640" cy="320040"/>
-          </a:xfrm>
-          <a:prstGeom prst="rect">
-            <a:avLst/>
-          </a:prstGeom>
-          <a:noFill/>
-          <a:ln/>
-        </p:spPr>
-        <p:txBody>
-          <a:bodyPr wrap="square" lIns="0" tIns="0" rIns="0" bIns="0" rtlCol="0" anchor="ctr"/>
-          <a:lstStyle/>
-          <a:p>
-            <a:pPr indent="0" marL="0">
-              <a:buNone/>
-            </a:pPr>
-            <a:r>
-              <a:rPr lang="en-US" sz="1300" b="1" dirty="0">
+          <p:cNvPr id="23" name="Text 21"/>
+          <p:cNvSpPr/>
+          <p:nvPr/>
+        </p:nvSpPr>
+        <p:spPr>
+          <a:xfrm>
+            <a:off x="6428232" y="3913632"/>
+            <a:ext cx="5029200" cy="274320"/>
+          </a:xfrm>
+          <a:prstGeom prst="rect">
+            <a:avLst/>
+          </a:prstGeom>
+          <a:noFill/>
+          <a:ln/>
+        </p:spPr>
+        <p:txBody>
+          <a:bodyPr wrap="square" lIns="0" tIns="0" rIns="0" bIns="0" rtlCol="0" anchor="ctr"/>
+          <a:lstStyle/>
+          <a:p>
+            <a:pPr indent="0" marL="0">
+              <a:buNone/>
+            </a:pPr>
+            <a:r>
+              <a:rPr lang="en-US" sz="1200" b="1" dirty="0">
+                <a:solidFill>
+                  <a:srgbClr val="6C6C6C"/>
+                </a:solidFill>
+                <a:latin typeface="Spoqa Han Sans Neo" pitchFamily="34" charset="0"/>
+                <a:ea typeface="Spoqa Han Sans Neo" pitchFamily="34" charset="-122"/>
+                <a:cs typeface="Spoqa Han Sans Neo" pitchFamily="34" charset="-120"/>
+              </a:rPr>
+              <a:t>엔비디아 HBM4 물량 배분 (베라루빈)</a:t>
+            </a:r>
+            <a:endParaRPr lang="en-US" sz="1200" dirty="0"/>
+          </a:p>
+        </p:txBody>
+      </p:sp>
+      <p:sp>
+        <p:nvSpPr>
+          <p:cNvPr id="24" name="Text 22"/>
+          <p:cNvSpPr/>
+          <p:nvPr/>
+        </p:nvSpPr>
+        <p:spPr>
+          <a:xfrm>
+            <a:off x="6428232" y="4224528"/>
+            <a:ext cx="2743200" cy="868680"/>
+          </a:xfrm>
+          <a:prstGeom prst="rect">
+            <a:avLst/>
+          </a:prstGeom>
+          <a:noFill/>
+          <a:ln/>
+        </p:spPr>
+        <p:txBody>
+          <a:bodyPr wrap="square" lIns="0" tIns="0" rIns="0" bIns="0" rtlCol="0" anchor="ctr"/>
+          <a:lstStyle/>
+          <a:p>
+            <a:pPr indent="0" marL="0">
+              <a:buNone/>
+            </a:pPr>
+            <a:r>
+              <a:rPr lang="en-US" sz="4000" b="1" dirty="0">
+                <a:solidFill>
+                  <a:srgbClr val="F58220"/>
+                </a:solidFill>
+                <a:latin typeface="Spoqa Han Sans Neo" pitchFamily="34" charset="0"/>
+                <a:ea typeface="Spoqa Han Sans Neo" pitchFamily="34" charset="-122"/>
+                <a:cs typeface="Spoqa Han Sans Neo" pitchFamily="34" charset="-120"/>
+              </a:rPr>
+              <a:t>≈70%</a:t>
+            </a:r>
+            <a:endParaRPr lang="en-US" sz="4000" dirty="0"/>
+          </a:p>
+        </p:txBody>
+      </p:sp>
+      <p:sp>
+        <p:nvSpPr>
+          <p:cNvPr id="25" name="Text 23"/>
+          <p:cNvSpPr/>
+          <p:nvPr/>
+        </p:nvSpPr>
+        <p:spPr>
+          <a:xfrm>
+            <a:off x="6428232" y="5074920"/>
+            <a:ext cx="2743200" cy="548640"/>
+          </a:xfrm>
+          <a:prstGeom prst="rect">
+            <a:avLst/>
+          </a:prstGeom>
+          <a:noFill/>
+          <a:ln/>
+        </p:spPr>
+        <p:txBody>
+          <a:bodyPr wrap="square" lIns="0" tIns="0" rIns="0" bIns="0" rtlCol="0" anchor="ctr"/>
+          <a:lstStyle/>
+          <a:p>
+            <a:pPr indent="0" marL="0">
+              <a:buNone/>
+            </a:pPr>
+            <a:r>
+              <a:rPr lang="en-US" sz="1200" b="1" dirty="0">
+                <a:solidFill>
+                  <a:srgbClr val="1A1A1A"/>
+                </a:solidFill>
+                <a:latin typeface="Spoqa Han Sans Neo" pitchFamily="34" charset="0"/>
+                <a:ea typeface="Spoqa Han Sans Neo" pitchFamily="34" charset="-122"/>
+                <a:cs typeface="Spoqa Han Sans Neo" pitchFamily="34" charset="-120"/>
+              </a:rPr>
+              <a:t>SK하이닉스</a:t>
+            </a:r>
+            <a:endParaRPr lang="en-US" sz="1200" dirty="0"/>
+          </a:p>
+          <a:p>
+            <a:pPr indent="0" marL="0">
+              <a:buNone/>
+            </a:pPr>
+            <a:r>
+              <a:rPr lang="en-US" sz="1100" dirty="0">
+                <a:solidFill>
+                  <a:srgbClr val="3D3D3D"/>
+                </a:solidFill>
+                <a:latin typeface="Spoqa Han Sans Neo" pitchFamily="34" charset="0"/>
+                <a:ea typeface="Spoqa Han Sans Neo" pitchFamily="34" charset="-122"/>
+                <a:cs typeface="Spoqa Han Sans Neo" pitchFamily="34" charset="-120"/>
+              </a:rPr>
+              <a:t>약 2/3 물량 확보 (UBS)</a:t>
+            </a:r>
+            <a:endParaRPr lang="en-US" sz="1200" dirty="0"/>
+          </a:p>
+        </p:txBody>
+      </p:sp>
+      <p:sp>
+        <p:nvSpPr>
+          <p:cNvPr id="26" name="Text 24"/>
+          <p:cNvSpPr/>
+          <p:nvPr/>
+        </p:nvSpPr>
+        <p:spPr>
+          <a:xfrm>
+            <a:off x="9235440" y="4315968"/>
+            <a:ext cx="2377440" cy="777240"/>
+          </a:xfrm>
+          <a:prstGeom prst="rect">
+            <a:avLst/>
+          </a:prstGeom>
+          <a:noFill/>
+          <a:ln/>
+        </p:spPr>
+        <p:txBody>
+          <a:bodyPr wrap="square" lIns="0" tIns="0" rIns="0" bIns="0" rtlCol="0" anchor="ctr"/>
+          <a:lstStyle/>
+          <a:p>
+            <a:pPr indent="0" marL="0">
+              <a:buNone/>
+            </a:pPr>
+            <a:r>
+              <a:rPr lang="en-US" sz="2600" b="1" dirty="0">
                 <a:solidFill>
                   <a:srgbClr val="043B72"/>
                 </a:solidFill>
@@ -5077,54 +6207,51 @@
                 <a:ea typeface="Spoqa Han Sans Neo" pitchFamily="34" charset="-122"/>
                 <a:cs typeface="Spoqa Han Sans Neo" pitchFamily="34" charset="-120"/>
               </a:rPr>
-              <a:t>완충 — AI 메모리는 다른 리그</a:t>
-            </a:r>
-            <a:endParaRPr lang="en-US" sz="1300" dirty="0"/>
-          </a:p>
-        </p:txBody>
-      </p:sp>
-      <p:sp>
-        <p:nvSpPr>
-          <p:cNvPr id="13" name="Text 10"/>
-          <p:cNvSpPr/>
-          <p:nvPr/>
-        </p:nvSpPr>
-        <p:spPr>
-          <a:xfrm>
-            <a:off x="6336792" y="4370832"/>
-            <a:ext cx="5120640" cy="457200"/>
-          </a:xfrm>
-          <a:prstGeom prst="rect">
-            <a:avLst/>
-          </a:prstGeom>
-          <a:noFill/>
-          <a:ln/>
-        </p:spPr>
-        <p:txBody>
-          <a:bodyPr wrap="square" lIns="0" tIns="0" rIns="0" bIns="0" rtlCol="0" anchor="ctr"/>
-          <a:lstStyle/>
-          <a:p>
-            <a:pPr indent="0" marL="0">
-              <a:lnSpc>
-                <a:spcPts val="1300"/>
-              </a:lnSpc>
-              <a:buNone/>
-            </a:pPr>
-            <a:r>
-              <a:rPr lang="en-US" sz="1100" b="1" dirty="0">
-                <a:solidFill>
-                  <a:srgbClr val="043B72"/>
-                </a:solidFill>
-                <a:latin typeface="Spoqa Han Sans Neo" pitchFamily="34" charset="0"/>
-                <a:ea typeface="Spoqa Han Sans Neo" pitchFamily="34" charset="-122"/>
-                <a:cs typeface="Spoqa Han Sans Neo" pitchFamily="34" charset="-120"/>
-              </a:rPr>
-              <a:t>•  </a:t>
-            </a:r>
-            <a:pPr indent="0" marL="0">
-              <a:lnSpc>
-                <a:spcPts val="1300"/>
-              </a:lnSpc>
+              <a:t>조기 진입</a:t>
+            </a:r>
+            <a:endParaRPr lang="en-US" sz="2600" dirty="0"/>
+          </a:p>
+        </p:txBody>
+      </p:sp>
+      <p:sp>
+        <p:nvSpPr>
+          <p:cNvPr id="27" name="Text 25"/>
+          <p:cNvSpPr/>
+          <p:nvPr/>
+        </p:nvSpPr>
+        <p:spPr>
+          <a:xfrm>
+            <a:off x="9235440" y="5074920"/>
+            <a:ext cx="2377440" cy="548640"/>
+          </a:xfrm>
+          <a:prstGeom prst="rect">
+            <a:avLst/>
+          </a:prstGeom>
+          <a:noFill/>
+          <a:ln/>
+        </p:spPr>
+        <p:txBody>
+          <a:bodyPr wrap="square" lIns="0" tIns="0" rIns="0" bIns="0" rtlCol="0" anchor="ctr"/>
+          <a:lstStyle/>
+          <a:p>
+            <a:pPr indent="0" marL="0">
+              <a:buNone/>
+            </a:pPr>
+            <a:r>
+              <a:rPr lang="en-US" sz="1200" b="1" dirty="0">
+                <a:solidFill>
+                  <a:srgbClr val="1A1A1A"/>
+                </a:solidFill>
+                <a:latin typeface="Spoqa Han Sans Neo" pitchFamily="34" charset="0"/>
+                <a:ea typeface="Spoqa Han Sans Neo" pitchFamily="34" charset="-122"/>
+                <a:cs typeface="Spoqa Han Sans Neo" pitchFamily="34" charset="-120"/>
+              </a:rPr>
+              <a:t>삼성전자</a:t>
+            </a:r>
+            <a:endParaRPr lang="en-US" sz="1200" dirty="0"/>
+          </a:p>
+          <a:p>
+            <a:pPr indent="0" marL="0">
               <a:buNone/>
             </a:pPr>
             <a:r>
@@ -5136,133 +6263,15 @@
                 <a:ea typeface="Spoqa Han Sans Neo" pitchFamily="34" charset="-122"/>
                 <a:cs typeface="Spoqa Han Sans Neo" pitchFamily="34" charset="-120"/>
               </a:rPr>
-              <a:t>증설 상당분은 중국 내수 소화 → 글로벌 과잉으로 직결되지 않음</a:t>
-            </a:r>
-            <a:endParaRPr lang="en-US" sz="1100" dirty="0"/>
-          </a:p>
-        </p:txBody>
-      </p:sp>
-      <p:sp>
-        <p:nvSpPr>
-          <p:cNvPr id="14" name="Text 11"/>
-          <p:cNvSpPr/>
-          <p:nvPr/>
-        </p:nvSpPr>
-        <p:spPr>
-          <a:xfrm>
-            <a:off x="6336792" y="4855464"/>
-            <a:ext cx="5120640" cy="457200"/>
-          </a:xfrm>
-          <a:prstGeom prst="rect">
-            <a:avLst/>
-          </a:prstGeom>
-          <a:noFill/>
-          <a:ln/>
-        </p:spPr>
-        <p:txBody>
-          <a:bodyPr wrap="square" lIns="0" tIns="0" rIns="0" bIns="0" rtlCol="0" anchor="ctr"/>
-          <a:lstStyle/>
-          <a:p>
-            <a:pPr indent="0" marL="0">
-              <a:lnSpc>
-                <a:spcPts val="1300"/>
-              </a:lnSpc>
-              <a:buNone/>
-            </a:pPr>
-            <a:r>
-              <a:rPr lang="en-US" sz="1100" b="1" dirty="0">
-                <a:solidFill>
-                  <a:srgbClr val="043B72"/>
-                </a:solidFill>
-                <a:latin typeface="Spoqa Han Sans Neo" pitchFamily="34" charset="0"/>
-                <a:ea typeface="Spoqa Han Sans Neo" pitchFamily="34" charset="-122"/>
-                <a:cs typeface="Spoqa Han Sans Neo" pitchFamily="34" charset="-120"/>
-              </a:rPr>
-              <a:t>•  </a:t>
-            </a:r>
-            <a:pPr indent="0" marL="0">
-              <a:lnSpc>
-                <a:spcPts val="1300"/>
-              </a:lnSpc>
-              <a:buNone/>
-            </a:pPr>
-            <a:r>
-              <a:rPr lang="en-US" sz="1100" dirty="0">
-                <a:solidFill>
-                  <a:srgbClr val="3D3D3D"/>
-                </a:solidFill>
-                <a:latin typeface="Spoqa Han Sans Neo" pitchFamily="34" charset="0"/>
-                <a:ea typeface="Spoqa Han Sans Neo" pitchFamily="34" charset="-122"/>
-                <a:cs typeface="Spoqa Han Sans Neo" pitchFamily="34" charset="-120"/>
-              </a:rPr>
-              <a:t>HBM 양산은 아직 미검증 — 핵심 고부가 영역의 격차는 여전</a:t>
-            </a:r>
-            <a:endParaRPr lang="en-US" sz="1100" dirty="0"/>
-          </a:p>
-        </p:txBody>
-      </p:sp>
-      <p:sp>
-        <p:nvSpPr>
-          <p:cNvPr id="15" name="Text 12"/>
-          <p:cNvSpPr/>
-          <p:nvPr/>
-        </p:nvSpPr>
-        <p:spPr>
-          <a:xfrm>
-            <a:off x="6336792" y="5340096"/>
-            <a:ext cx="5120640" cy="457200"/>
-          </a:xfrm>
-          <a:prstGeom prst="rect">
-            <a:avLst/>
-          </a:prstGeom>
-          <a:noFill/>
-          <a:ln/>
-        </p:spPr>
-        <p:txBody>
-          <a:bodyPr wrap="square" lIns="0" tIns="0" rIns="0" bIns="0" rtlCol="0" anchor="ctr"/>
-          <a:lstStyle/>
-          <a:p>
-            <a:pPr indent="0" marL="0">
-              <a:lnSpc>
-                <a:spcPts val="1300"/>
-              </a:lnSpc>
-              <a:buNone/>
-            </a:pPr>
-            <a:r>
-              <a:rPr lang="en-US" sz="1100" b="1" dirty="0">
-                <a:solidFill>
-                  <a:srgbClr val="043B72"/>
-                </a:solidFill>
-                <a:latin typeface="Spoqa Han Sans Neo" pitchFamily="34" charset="0"/>
-                <a:ea typeface="Spoqa Han Sans Neo" pitchFamily="34" charset="-122"/>
-                <a:cs typeface="Spoqa Han Sans Neo" pitchFamily="34" charset="-120"/>
-              </a:rPr>
-              <a:t>•  </a:t>
-            </a:r>
-            <a:pPr indent="0" marL="0">
-              <a:lnSpc>
-                <a:spcPts val="1300"/>
-              </a:lnSpc>
-              <a:buNone/>
-            </a:pPr>
-            <a:r>
-              <a:rPr lang="en-US" sz="1100" dirty="0">
-                <a:solidFill>
-                  <a:srgbClr val="3D3D3D"/>
-                </a:solidFill>
-                <a:latin typeface="Spoqa Han Sans Neo" pitchFamily="34" charset="0"/>
-                <a:ea typeface="Spoqa Han Sans Neo" pitchFamily="34" charset="-122"/>
-                <a:cs typeface="Spoqa Han Sans Neo" pitchFamily="34" charset="-120"/>
-              </a:rPr>
-              <a:t>2027년 말 서버 DRAM+HBM이 DRAM 시장의 50%+ 차지 전망</a:t>
-            </a:r>
-            <a:endParaRPr lang="en-US" sz="1100" dirty="0"/>
-          </a:p>
-        </p:txBody>
-      </p:sp>
-      <p:sp>
-        <p:nvSpPr>
-          <p:cNvPr id="16" name="Text 13"/>
+              <a:t>HBM4 조기 납품 추격</a:t>
+            </a:r>
+            <a:endParaRPr lang="en-US" sz="1200" dirty="0"/>
+          </a:p>
+        </p:txBody>
+      </p:sp>
+      <p:sp>
+        <p:nvSpPr>
+          <p:cNvPr id="28" name="Text 26"/>
           <p:cNvSpPr/>
           <p:nvPr/>
         </p:nvSpPr>
@@ -5293,7 +6302,7 @@
                 <a:ea typeface="Spoqa Han Sans Neo" pitchFamily="34" charset="-122"/>
                 <a:cs typeface="Spoqa Han Sans Neo" pitchFamily="34" charset="-120"/>
               </a:rPr>
-              <a:t>자료: Tom's Hardware, SemiAnalysis, Counterpoint, DigiTimes (2026.07).</a:t>
+              <a:t>자료: IDC, Counterpoint, UBS, TrendForce (2025~2026). 점유율은 매출 기준.</a:t>
             </a:r>
             <a:endParaRPr lang="en-US" sz="850" dirty="0"/>
           </a:p>
@@ -5301,7 +6310,7 @@
       </p:sp>
       <p:sp>
         <p:nvSpPr>
-          <p:cNvPr id="17" name="Text 14"/>
+          <p:cNvPr id="29" name="Text 27"/>
           <p:cNvSpPr/>
           <p:nvPr/>
         </p:nvSpPr>
@@ -5423,7 +6432,7 @@
                 <a:ea typeface="Spoqa Han Sans Neo" pitchFamily="34" charset="-122"/>
                 <a:cs typeface="Spoqa Han Sans Neo" pitchFamily="34" charset="-120"/>
               </a:rPr>
-              <a:t>PART 05 · 심리</a:t>
+              <a:t>PART 04 · 판이 바뀐다</a:t>
             </a:r>
             <a:endParaRPr lang="en-US" sz="1200" dirty="0"/>
           </a:p>
@@ -5462,7 +6471,7 @@
                 <a:ea typeface="Spoqa Han Sans Neo" pitchFamily="34" charset="-122"/>
                 <a:cs typeface="Spoqa Han Sans Neo" pitchFamily="34" charset="-120"/>
               </a:rPr>
-              <a:t>확신은 어떻게 만들어지나 — PER vs PBR</a:t>
+              <a:t>HBM4 전장: 삼성의 반격과 점유율 수렴</a:t>
             </a:r>
             <a:endParaRPr lang="en-US" sz="2700" dirty="0"/>
           </a:p>
@@ -5470,18 +6479,598 @@
       </p:sp>
       <p:sp>
         <p:nvSpPr>
-          <p:cNvPr id="5" name="Shape 3"/>
-          <p:cNvSpPr/>
-          <p:nvPr/>
-        </p:nvSpPr>
-        <p:spPr>
-          <a:xfrm>
-            <a:off x="502920" y="1828800"/>
-            <a:ext cx="5486400" cy="2468880"/>
+          <p:cNvPr id="5" name="Text 3"/>
+          <p:cNvSpPr/>
+          <p:nvPr/>
+        </p:nvSpPr>
+        <p:spPr>
+          <a:xfrm>
+            <a:off x="502920" y="1783080"/>
+            <a:ext cx="5486400" cy="320040"/>
+          </a:xfrm>
+          <a:prstGeom prst="rect">
+            <a:avLst/>
+          </a:prstGeom>
+          <a:noFill/>
+          <a:ln/>
+        </p:spPr>
+        <p:txBody>
+          <a:bodyPr wrap="square" lIns="0" tIns="0" rIns="0" bIns="0" rtlCol="0" anchor="ctr"/>
+          <a:lstStyle/>
+          <a:p>
+            <a:pPr indent="0" marL="0">
+              <a:buNone/>
+            </a:pPr>
+            <a:r>
+              <a:rPr lang="en-US" sz="1300" b="1" dirty="0">
+                <a:solidFill>
+                  <a:srgbClr val="1A1A1A"/>
+                </a:solidFill>
+                <a:latin typeface="Spoqa Han Sans Neo" pitchFamily="34" charset="0"/>
+                <a:ea typeface="Spoqa Han Sans Neo" pitchFamily="34" charset="-122"/>
+                <a:cs typeface="Spoqa Han Sans Neo" pitchFamily="34" charset="-120"/>
+              </a:rPr>
+              <a:t>HBM 점유율 수렴 전망 (UBS)</a:t>
+            </a:r>
+            <a:endParaRPr lang="en-US" sz="1300" dirty="0"/>
+          </a:p>
+        </p:txBody>
+      </p:sp>
+      <p:graphicFrame>
+        <p:nvGraphicFramePr>
+          <p:cNvPr id="6" name="Chart 0" descr=""/>
+          <p:cNvGraphicFramePr/>
+          <p:nvPr/>
+        </p:nvGraphicFramePr>
+        <p:xfrm>
+          <a:off x="457200" y="2148840"/>
+          <a:ext cx="5577840" cy="3200400"/>
+        </p:xfrm>
+        <a:graphic xmlns:a="http://schemas.openxmlformats.org/drawingml/2006/main">
+          <a:graphicData uri="http://schemas.openxmlformats.org/drawingml/2006/chart">
+            <c:chart xmlns:c="http://schemas.openxmlformats.org/drawingml/2006/chart" r:id="rId1"/>
+          </a:graphicData>
+        </a:graphic>
+      </p:graphicFrame>
+      <p:sp>
+        <p:nvSpPr>
+          <p:cNvPr id="7" name="Text 4"/>
+          <p:cNvSpPr/>
+          <p:nvPr/>
+        </p:nvSpPr>
+        <p:spPr>
+          <a:xfrm>
+            <a:off x="502920" y="5394960"/>
+            <a:ext cx="5532120" cy="548640"/>
+          </a:xfrm>
+          <a:prstGeom prst="rect">
+            <a:avLst/>
+          </a:prstGeom>
+          <a:noFill/>
+          <a:ln/>
+        </p:spPr>
+        <p:txBody>
+          <a:bodyPr wrap="square" lIns="0" tIns="0" rIns="0" bIns="0" rtlCol="0" anchor="ctr"/>
+          <a:lstStyle/>
+          <a:p>
+            <a:pPr indent="0" marL="0">
+              <a:lnSpc>
+                <a:spcPts val="1400"/>
+              </a:lnSpc>
+              <a:buNone/>
+            </a:pPr>
+            <a:r>
+              <a:rPr lang="en-US" sz="1050" dirty="0">
+                <a:solidFill>
+                  <a:srgbClr val="3D3D3D"/>
+                </a:solidFill>
+                <a:latin typeface="Spoqa Han Sans Neo" pitchFamily="34" charset="0"/>
+                <a:ea typeface="Spoqa Han Sans Neo" pitchFamily="34" charset="-122"/>
+                <a:cs typeface="Spoqa Han Sans Neo" pitchFamily="34" charset="-120"/>
+              </a:rPr>
+              <a:t>UBS: "2027년까지 삼성이 SK하이닉스와 대등한 HBM 점유율에 도달"</a:t>
+            </a:r>
+            <a:endParaRPr lang="en-US" sz="1050" dirty="0"/>
+          </a:p>
+        </p:txBody>
+      </p:sp>
+      <p:sp>
+        <p:nvSpPr>
+          <p:cNvPr id="8" name="Text 5"/>
+          <p:cNvSpPr/>
+          <p:nvPr/>
+        </p:nvSpPr>
+        <p:spPr>
+          <a:xfrm>
+            <a:off x="6309360" y="1783080"/>
+            <a:ext cx="5486400" cy="320040"/>
+          </a:xfrm>
+          <a:prstGeom prst="rect">
+            <a:avLst/>
+          </a:prstGeom>
+          <a:noFill/>
+          <a:ln/>
+        </p:spPr>
+        <p:txBody>
+          <a:bodyPr wrap="square" lIns="0" tIns="0" rIns="0" bIns="0" rtlCol="0" anchor="ctr"/>
+          <a:lstStyle/>
+          <a:p>
+            <a:pPr indent="0" marL="0">
+              <a:buNone/>
+            </a:pPr>
+            <a:r>
+              <a:rPr lang="en-US" sz="1300" b="1" dirty="0">
+                <a:solidFill>
+                  <a:srgbClr val="1A1A1A"/>
+                </a:solidFill>
+                <a:latin typeface="Spoqa Han Sans Neo" pitchFamily="34" charset="0"/>
+                <a:ea typeface="Spoqa Han Sans Neo" pitchFamily="34" charset="-122"/>
+                <a:cs typeface="Spoqa Han Sans Neo" pitchFamily="34" charset="-120"/>
+              </a:rPr>
+              <a:t>HBM4 주요 이벤트</a:t>
+            </a:r>
+            <a:endParaRPr lang="en-US" sz="1300" dirty="0"/>
+          </a:p>
+        </p:txBody>
+      </p:sp>
+      <p:sp>
+        <p:nvSpPr>
+          <p:cNvPr id="9" name="Shape 6"/>
+          <p:cNvSpPr/>
+          <p:nvPr/>
+        </p:nvSpPr>
+        <p:spPr>
+          <a:xfrm>
+            <a:off x="6720840" y="2331720"/>
+            <a:ext cx="27432" cy="3063240"/>
+          </a:xfrm>
+          <a:prstGeom prst="rect">
+            <a:avLst/>
+          </a:prstGeom>
+          <a:solidFill>
+            <a:srgbClr val="CDCECB"/>
+          </a:solidFill>
+          <a:ln/>
+        </p:spPr>
+      </p:sp>
+      <p:sp>
+        <p:nvSpPr>
+          <p:cNvPr id="10" name="Shape 7"/>
+          <p:cNvSpPr/>
+          <p:nvPr/>
+        </p:nvSpPr>
+        <p:spPr>
+          <a:xfrm>
+            <a:off x="6583680" y="2240280"/>
+            <a:ext cx="292608" cy="292608"/>
+          </a:xfrm>
+          <a:prstGeom prst="ellipse">
+            <a:avLst/>
+          </a:prstGeom>
+          <a:solidFill>
+            <a:srgbClr val="F58220"/>
+          </a:solidFill>
+          <a:ln w="25400">
+            <a:solidFill>
+              <a:srgbClr val="FFFFFF"/>
+            </a:solidFill>
+            <a:prstDash val="solid"/>
+          </a:ln>
+        </p:spPr>
+      </p:sp>
+      <p:sp>
+        <p:nvSpPr>
+          <p:cNvPr id="11" name="Text 8"/>
+          <p:cNvSpPr/>
+          <p:nvPr/>
+        </p:nvSpPr>
+        <p:spPr>
+          <a:xfrm>
+            <a:off x="7086600" y="2176272"/>
+            <a:ext cx="4572000" cy="274320"/>
+          </a:xfrm>
+          <a:prstGeom prst="rect">
+            <a:avLst/>
+          </a:prstGeom>
+          <a:noFill/>
+          <a:ln/>
+        </p:spPr>
+        <p:txBody>
+          <a:bodyPr wrap="square" lIns="0" tIns="0" rIns="0" bIns="0" rtlCol="0" anchor="ctr"/>
+          <a:lstStyle/>
+          <a:p>
+            <a:pPr indent="0" marL="0">
+              <a:buNone/>
+            </a:pPr>
+            <a:r>
+              <a:rPr lang="en-US" sz="1300" b="1" dirty="0">
+                <a:solidFill>
+                  <a:srgbClr val="F58220"/>
+                </a:solidFill>
+                <a:latin typeface="Spoqa Han Sans Neo" pitchFamily="34" charset="0"/>
+                <a:ea typeface="Spoqa Han Sans Neo" pitchFamily="34" charset="-122"/>
+                <a:cs typeface="Spoqa Han Sans Neo" pitchFamily="34" charset="-120"/>
+              </a:rPr>
+              <a:t>2026.02</a:t>
+            </a:r>
+            <a:endParaRPr lang="en-US" sz="1300" dirty="0"/>
+          </a:p>
+        </p:txBody>
+      </p:sp>
+      <p:sp>
+        <p:nvSpPr>
+          <p:cNvPr id="12" name="Text 9"/>
+          <p:cNvSpPr/>
+          <p:nvPr/>
+        </p:nvSpPr>
+        <p:spPr>
+          <a:xfrm>
+            <a:off x="7086600" y="2450592"/>
+            <a:ext cx="4572000" cy="502920"/>
+          </a:xfrm>
+          <a:prstGeom prst="rect">
+            <a:avLst/>
+          </a:prstGeom>
+          <a:noFill/>
+          <a:ln/>
+        </p:spPr>
+        <p:txBody>
+          <a:bodyPr wrap="square" lIns="0" tIns="0" rIns="0" bIns="0" rtlCol="0" anchor="ctr"/>
+          <a:lstStyle/>
+          <a:p>
+            <a:pPr indent="0" marL="0">
+              <a:lnSpc>
+                <a:spcPts val="1500"/>
+              </a:lnSpc>
+              <a:buNone/>
+            </a:pPr>
+            <a:r>
+              <a:rPr lang="en-US" sz="1200" dirty="0">
+                <a:solidFill>
+                  <a:srgbClr val="3D3D3D"/>
+                </a:solidFill>
+                <a:latin typeface="Spoqa Han Sans Neo" pitchFamily="34" charset="0"/>
+                <a:ea typeface="Spoqa Han Sans Neo" pitchFamily="34" charset="-122"/>
+                <a:cs typeface="Spoqa Han Sans Neo" pitchFamily="34" charset="-120"/>
+              </a:rPr>
+              <a:t>삼성전자, 세계 최초 HBM4 양산 출하</a:t>
+            </a:r>
+            <a:endParaRPr lang="en-US" sz="1200" dirty="0"/>
+          </a:p>
+        </p:txBody>
+      </p:sp>
+      <p:sp>
+        <p:nvSpPr>
+          <p:cNvPr id="13" name="Shape 10"/>
+          <p:cNvSpPr/>
+          <p:nvPr/>
+        </p:nvSpPr>
+        <p:spPr>
+          <a:xfrm>
+            <a:off x="6583680" y="3044952"/>
+            <a:ext cx="292608" cy="292608"/>
+          </a:xfrm>
+          <a:prstGeom prst="ellipse">
+            <a:avLst/>
+          </a:prstGeom>
+          <a:solidFill>
+            <a:srgbClr val="043B72"/>
+          </a:solidFill>
+          <a:ln w="25400">
+            <a:solidFill>
+              <a:srgbClr val="FFFFFF"/>
+            </a:solidFill>
+            <a:prstDash val="solid"/>
+          </a:ln>
+        </p:spPr>
+      </p:sp>
+      <p:sp>
+        <p:nvSpPr>
+          <p:cNvPr id="14" name="Text 11"/>
+          <p:cNvSpPr/>
+          <p:nvPr/>
+        </p:nvSpPr>
+        <p:spPr>
+          <a:xfrm>
+            <a:off x="7086600" y="2980944"/>
+            <a:ext cx="4572000" cy="274320"/>
+          </a:xfrm>
+          <a:prstGeom prst="rect">
+            <a:avLst/>
+          </a:prstGeom>
+          <a:noFill/>
+          <a:ln/>
+        </p:spPr>
+        <p:txBody>
+          <a:bodyPr wrap="square" lIns="0" tIns="0" rIns="0" bIns="0" rtlCol="0" anchor="ctr"/>
+          <a:lstStyle/>
+          <a:p>
+            <a:pPr indent="0" marL="0">
+              <a:buNone/>
+            </a:pPr>
+            <a:r>
+              <a:rPr lang="en-US" sz="1300" b="1" dirty="0">
+                <a:solidFill>
+                  <a:srgbClr val="043B72"/>
+                </a:solidFill>
+                <a:latin typeface="Spoqa Han Sans Neo" pitchFamily="34" charset="0"/>
+                <a:ea typeface="Spoqa Han Sans Neo" pitchFamily="34" charset="-122"/>
+                <a:cs typeface="Spoqa Han Sans Neo" pitchFamily="34" charset="-120"/>
+              </a:rPr>
+              <a:t>엔비디아</a:t>
+            </a:r>
+            <a:endParaRPr lang="en-US" sz="1300" dirty="0"/>
+          </a:p>
+        </p:txBody>
+      </p:sp>
+      <p:sp>
+        <p:nvSpPr>
+          <p:cNvPr id="15" name="Text 12"/>
+          <p:cNvSpPr/>
+          <p:nvPr/>
+        </p:nvSpPr>
+        <p:spPr>
+          <a:xfrm>
+            <a:off x="7086600" y="3255264"/>
+            <a:ext cx="4572000" cy="502920"/>
+          </a:xfrm>
+          <a:prstGeom prst="rect">
+            <a:avLst/>
+          </a:prstGeom>
+          <a:noFill/>
+          <a:ln/>
+        </p:spPr>
+        <p:txBody>
+          <a:bodyPr wrap="square" lIns="0" tIns="0" rIns="0" bIns="0" rtlCol="0" anchor="ctr"/>
+          <a:lstStyle/>
+          <a:p>
+            <a:pPr indent="0" marL="0">
+              <a:lnSpc>
+                <a:spcPts val="1500"/>
+              </a:lnSpc>
+              <a:buNone/>
+            </a:pPr>
+            <a:r>
+              <a:rPr lang="en-US" sz="1200" dirty="0">
+                <a:solidFill>
+                  <a:srgbClr val="3D3D3D"/>
+                </a:solidFill>
+                <a:latin typeface="Spoqa Han Sans Neo" pitchFamily="34" charset="0"/>
+                <a:ea typeface="Spoqa Han Sans Neo" pitchFamily="34" charset="-122"/>
+                <a:cs typeface="Spoqa Han Sans Neo" pitchFamily="34" charset="-120"/>
+              </a:rPr>
+              <a:t>베라루빈용 HBM4 '최초 공급자' 지위 (3년 만)</a:t>
+            </a:r>
+            <a:endParaRPr lang="en-US" sz="1200" dirty="0"/>
+          </a:p>
+        </p:txBody>
+      </p:sp>
+      <p:sp>
+        <p:nvSpPr>
+          <p:cNvPr id="16" name="Shape 13"/>
+          <p:cNvSpPr/>
+          <p:nvPr/>
+        </p:nvSpPr>
+        <p:spPr>
+          <a:xfrm>
+            <a:off x="6583680" y="3849624"/>
+            <a:ext cx="292608" cy="292608"/>
+          </a:xfrm>
+          <a:prstGeom prst="ellipse">
+            <a:avLst/>
+          </a:prstGeom>
+          <a:solidFill>
+            <a:srgbClr val="F58220"/>
+          </a:solidFill>
+          <a:ln w="25400">
+            <a:solidFill>
+              <a:srgbClr val="FFFFFF"/>
+            </a:solidFill>
+            <a:prstDash val="solid"/>
+          </a:ln>
+        </p:spPr>
+      </p:sp>
+      <p:sp>
+        <p:nvSpPr>
+          <p:cNvPr id="17" name="Text 14"/>
+          <p:cNvSpPr/>
+          <p:nvPr/>
+        </p:nvSpPr>
+        <p:spPr>
+          <a:xfrm>
+            <a:off x="7086600" y="3785616"/>
+            <a:ext cx="4572000" cy="274320"/>
+          </a:xfrm>
+          <a:prstGeom prst="rect">
+            <a:avLst/>
+          </a:prstGeom>
+          <a:noFill/>
+          <a:ln/>
+        </p:spPr>
+        <p:txBody>
+          <a:bodyPr wrap="square" lIns="0" tIns="0" rIns="0" bIns="0" rtlCol="0" anchor="ctr"/>
+          <a:lstStyle/>
+          <a:p>
+            <a:pPr indent="0" marL="0">
+              <a:buNone/>
+            </a:pPr>
+            <a:r>
+              <a:rPr lang="en-US" sz="1300" b="1" dirty="0">
+                <a:solidFill>
+                  <a:srgbClr val="F58220"/>
+                </a:solidFill>
+                <a:latin typeface="Spoqa Han Sans Neo" pitchFamily="34" charset="0"/>
+                <a:ea typeface="Spoqa Han Sans Neo" pitchFamily="34" charset="-122"/>
+                <a:cs typeface="Spoqa Han Sans Neo" pitchFamily="34" charset="-120"/>
+              </a:rPr>
+              <a:t>+4개월</a:t>
+            </a:r>
+            <a:endParaRPr lang="en-US" sz="1300" dirty="0"/>
+          </a:p>
+        </p:txBody>
+      </p:sp>
+      <p:sp>
+        <p:nvSpPr>
+          <p:cNvPr id="18" name="Text 15"/>
+          <p:cNvSpPr/>
+          <p:nvPr/>
+        </p:nvSpPr>
+        <p:spPr>
+          <a:xfrm>
+            <a:off x="7086600" y="4059936"/>
+            <a:ext cx="4572000" cy="502920"/>
+          </a:xfrm>
+          <a:prstGeom prst="rect">
+            <a:avLst/>
+          </a:prstGeom>
+          <a:noFill/>
+          <a:ln/>
+        </p:spPr>
+        <p:txBody>
+          <a:bodyPr wrap="square" lIns="0" tIns="0" rIns="0" bIns="0" rtlCol="0" anchor="ctr"/>
+          <a:lstStyle/>
+          <a:p>
+            <a:pPr indent="0" marL="0">
+              <a:lnSpc>
+                <a:spcPts val="1500"/>
+              </a:lnSpc>
+              <a:buNone/>
+            </a:pPr>
+            <a:r>
+              <a:rPr lang="en-US" sz="1200" dirty="0">
+                <a:solidFill>
+                  <a:srgbClr val="3D3D3D"/>
+                </a:solidFill>
+                <a:latin typeface="Spoqa Han Sans Neo" pitchFamily="34" charset="0"/>
+                <a:ea typeface="Spoqa Han Sans Neo" pitchFamily="34" charset="-122"/>
+                <a:cs typeface="Spoqa Han Sans Neo" pitchFamily="34" charset="-120"/>
+              </a:rPr>
+              <a:t>삼성 HBM4 매출 10억 달러 돌파</a:t>
+            </a:r>
+            <a:endParaRPr lang="en-US" sz="1200" dirty="0"/>
+          </a:p>
+        </p:txBody>
+      </p:sp>
+      <p:sp>
+        <p:nvSpPr>
+          <p:cNvPr id="19" name="Shape 16"/>
+          <p:cNvSpPr/>
+          <p:nvPr/>
+        </p:nvSpPr>
+        <p:spPr>
+          <a:xfrm>
+            <a:off x="6583680" y="4654296"/>
+            <a:ext cx="292608" cy="292608"/>
+          </a:xfrm>
+          <a:prstGeom prst="ellipse">
+            <a:avLst/>
+          </a:prstGeom>
+          <a:solidFill>
+            <a:srgbClr val="043B72"/>
+          </a:solidFill>
+          <a:ln w="25400">
+            <a:solidFill>
+              <a:srgbClr val="FFFFFF"/>
+            </a:solidFill>
+            <a:prstDash val="solid"/>
+          </a:ln>
+        </p:spPr>
+      </p:sp>
+      <p:sp>
+        <p:nvSpPr>
+          <p:cNvPr id="20" name="Text 17"/>
+          <p:cNvSpPr/>
+          <p:nvPr/>
+        </p:nvSpPr>
+        <p:spPr>
+          <a:xfrm>
+            <a:off x="7086600" y="4590288"/>
+            <a:ext cx="4572000" cy="274320"/>
+          </a:xfrm>
+          <a:prstGeom prst="rect">
+            <a:avLst/>
+          </a:prstGeom>
+          <a:noFill/>
+          <a:ln/>
+        </p:spPr>
+        <p:txBody>
+          <a:bodyPr wrap="square" lIns="0" tIns="0" rIns="0" bIns="0" rtlCol="0" anchor="ctr"/>
+          <a:lstStyle/>
+          <a:p>
+            <a:pPr indent="0" marL="0">
+              <a:buNone/>
+            </a:pPr>
+            <a:r>
+              <a:rPr lang="en-US" sz="1300" b="1" dirty="0">
+                <a:solidFill>
+                  <a:srgbClr val="043B72"/>
+                </a:solidFill>
+                <a:latin typeface="Spoqa Han Sans Neo" pitchFamily="34" charset="0"/>
+                <a:ea typeface="Spoqa Han Sans Neo" pitchFamily="34" charset="-122"/>
+                <a:cs typeface="Spoqa Han Sans Neo" pitchFamily="34" charset="-120"/>
+              </a:rPr>
+              <a:t>방어</a:t>
+            </a:r>
+            <a:endParaRPr lang="en-US" sz="1300" dirty="0"/>
+          </a:p>
+        </p:txBody>
+      </p:sp>
+      <p:sp>
+        <p:nvSpPr>
+          <p:cNvPr id="21" name="Text 18"/>
+          <p:cNvSpPr/>
+          <p:nvPr/>
+        </p:nvSpPr>
+        <p:spPr>
+          <a:xfrm>
+            <a:off x="7086600" y="4864608"/>
+            <a:ext cx="4572000" cy="502920"/>
+          </a:xfrm>
+          <a:prstGeom prst="rect">
+            <a:avLst/>
+          </a:prstGeom>
+          <a:noFill/>
+          <a:ln/>
+        </p:spPr>
+        <p:txBody>
+          <a:bodyPr wrap="square" lIns="0" tIns="0" rIns="0" bIns="0" rtlCol="0" anchor="ctr"/>
+          <a:lstStyle/>
+          <a:p>
+            <a:pPr indent="0" marL="0">
+              <a:lnSpc>
+                <a:spcPts val="1500"/>
+              </a:lnSpc>
+              <a:buNone/>
+            </a:pPr>
+            <a:r>
+              <a:rPr lang="en-US" sz="1200" dirty="0">
+                <a:solidFill>
+                  <a:srgbClr val="3D3D3D"/>
+                </a:solidFill>
+                <a:latin typeface="Spoqa Han Sans Neo" pitchFamily="34" charset="0"/>
+                <a:ea typeface="Spoqa Han Sans Neo" pitchFamily="34" charset="-122"/>
+                <a:cs typeface="Spoqa Han Sans Neo" pitchFamily="34" charset="-120"/>
+              </a:rPr>
+              <a:t>SK하이닉스, 엔비디아 HBM4 물량 약 2/3 유지</a:t>
+            </a:r>
+            <a:endParaRPr lang="en-US" sz="1200" dirty="0"/>
+          </a:p>
+        </p:txBody>
+      </p:sp>
+      <p:sp>
+        <p:nvSpPr>
+          <p:cNvPr id="22" name="Shape 19"/>
+          <p:cNvSpPr/>
+          <p:nvPr/>
+        </p:nvSpPr>
+        <p:spPr>
+          <a:xfrm>
+            <a:off x="6309360" y="5486400"/>
+            <a:ext cx="5376672" cy="548640"/>
           </a:xfrm>
           <a:prstGeom prst="roundRect">
             <a:avLst>
-              <a:gd name="adj" fmla="val 1481"/>
+              <a:gd name="adj" fmla="val 6667"/>
             </a:avLst>
           </a:prstGeom>
           <a:solidFill>
@@ -5489,7 +7078,7 @@
               <a:alpha val="10000"/>
             </a:srgbClr>
           </a:solidFill>
-          <a:ln w="15875">
+          <a:ln w="12700">
             <a:solidFill>
               <a:srgbClr val="F58220"/>
             </a:solidFill>
@@ -5499,30 +7088,30 @@
       </p:sp>
       <p:sp>
         <p:nvSpPr>
-          <p:cNvPr id="6" name="Text 4"/>
-          <p:cNvSpPr/>
-          <p:nvPr/>
-        </p:nvSpPr>
-        <p:spPr>
-          <a:xfrm>
-            <a:off x="777240" y="2011680"/>
-            <a:ext cx="4937760" cy="365760"/>
-          </a:xfrm>
-          <a:prstGeom prst="rect">
-            <a:avLst/>
-          </a:prstGeom>
-          <a:noFill/>
-          <a:ln/>
-        </p:spPr>
-        <p:txBody>
-          <a:bodyPr wrap="square" lIns="0" tIns="0" rIns="0" bIns="0" rtlCol="0" anchor="ctr"/>
-          <a:lstStyle/>
-          <a:p>
-            <a:pPr indent="0" marL="0">
-              <a:buNone/>
-            </a:pPr>
-            <a:r>
-              <a:rPr lang="en-US" sz="1600" b="1" dirty="0">
+          <p:cNvPr id="23" name="Text 20"/>
+          <p:cNvSpPr/>
+          <p:nvPr/>
+        </p:nvSpPr>
+        <p:spPr>
+          <a:xfrm>
+            <a:off x="6492240" y="5486400"/>
+            <a:ext cx="5029200" cy="548640"/>
+          </a:xfrm>
+          <a:prstGeom prst="rect">
+            <a:avLst/>
+          </a:prstGeom>
+          <a:noFill/>
+          <a:ln/>
+        </p:spPr>
+        <p:txBody>
+          <a:bodyPr wrap="square" lIns="0" tIns="0" rIns="0" bIns="0" rtlCol="0" anchor="ctr"/>
+          <a:lstStyle/>
+          <a:p>
+            <a:pPr indent="0" marL="0">
+              <a:buNone/>
+            </a:pPr>
+            <a:r>
+              <a:rPr lang="en-US" sz="1150" b="1" dirty="0">
                 <a:solidFill>
                   <a:srgbClr val="CB6015"/>
                 </a:solidFill>
@@ -5530,270 +7119,15 @@
                 <a:ea typeface="Spoqa Han Sans Neo" pitchFamily="34" charset="-122"/>
                 <a:cs typeface="Spoqa Han Sans Neo" pitchFamily="34" charset="-120"/>
               </a:rPr>
-              <a:t>매수자는 PER로 말한다</a:t>
-            </a:r>
-            <a:endParaRPr lang="en-US" sz="1600" dirty="0"/>
-          </a:p>
-        </p:txBody>
-      </p:sp>
-      <p:sp>
-        <p:nvSpPr>
-          <p:cNvPr id="7" name="Text 5"/>
-          <p:cNvSpPr/>
-          <p:nvPr/>
-        </p:nvSpPr>
-        <p:spPr>
-          <a:xfrm>
-            <a:off x="777240" y="2423160"/>
-            <a:ext cx="4937760" cy="1737360"/>
-          </a:xfrm>
-          <a:prstGeom prst="rect">
-            <a:avLst/>
-          </a:prstGeom>
-          <a:noFill/>
-          <a:ln/>
-        </p:spPr>
-        <p:txBody>
-          <a:bodyPr wrap="square" lIns="0" tIns="0" rIns="0" bIns="0" rtlCol="0" anchor="ctr"/>
-          <a:lstStyle/>
-          <a:p>
-            <a:pPr indent="0" marL="0">
-              <a:lnSpc>
-                <a:spcPts val="1900"/>
-              </a:lnSpc>
-              <a:buNone/>
-            </a:pPr>
-            <a:r>
-              <a:rPr lang="en-US" sz="1300" dirty="0">
-                <a:solidFill>
-                  <a:srgbClr val="3D3D3D"/>
-                </a:solidFill>
-                <a:latin typeface="Spoqa Han Sans Neo" pitchFamily="34" charset="0"/>
-                <a:ea typeface="Spoqa Han Sans Neo" pitchFamily="34" charset="-122"/>
-                <a:cs typeface="Spoqa Han Sans Neo" pitchFamily="34" charset="-120"/>
-              </a:rPr>
-              <a:t>이익 성장 스토리에 주목 — HBM4·서버 DRAM의 이익 레벨 업, 사이클 상승 지속을 근거로 밸류에이션을 정당화.</a:t>
-            </a:r>
-            <a:endParaRPr lang="en-US" sz="1300" dirty="0"/>
-          </a:p>
-        </p:txBody>
-      </p:sp>
-      <p:sp>
-        <p:nvSpPr>
-          <p:cNvPr id="8" name="Shape 6"/>
-          <p:cNvSpPr/>
-          <p:nvPr/>
-        </p:nvSpPr>
-        <p:spPr>
-          <a:xfrm>
-            <a:off x="6199632" y="1828800"/>
-            <a:ext cx="5486400" cy="2468880"/>
-          </a:xfrm>
-          <a:prstGeom prst="roundRect">
-            <a:avLst>
-              <a:gd name="adj" fmla="val 1481"/>
-            </a:avLst>
-          </a:prstGeom>
-          <a:solidFill>
-            <a:srgbClr val="043B72">
-              <a:alpha val="10000"/>
-            </a:srgbClr>
-          </a:solidFill>
-          <a:ln w="15875">
-            <a:solidFill>
-              <a:srgbClr val="043B72"/>
-            </a:solidFill>
-            <a:prstDash val="solid"/>
-          </a:ln>
-        </p:spPr>
-      </p:sp>
-      <p:sp>
-        <p:nvSpPr>
-          <p:cNvPr id="9" name="Text 7"/>
-          <p:cNvSpPr/>
-          <p:nvPr/>
-        </p:nvSpPr>
-        <p:spPr>
-          <a:xfrm>
-            <a:off x="6473952" y="2011680"/>
-            <a:ext cx="4937760" cy="365760"/>
-          </a:xfrm>
-          <a:prstGeom prst="rect">
-            <a:avLst/>
-          </a:prstGeom>
-          <a:noFill/>
-          <a:ln/>
-        </p:spPr>
-        <p:txBody>
-          <a:bodyPr wrap="square" lIns="0" tIns="0" rIns="0" bIns="0" rtlCol="0" anchor="ctr"/>
-          <a:lstStyle/>
-          <a:p>
-            <a:pPr indent="0" marL="0">
-              <a:buNone/>
-            </a:pPr>
-            <a:r>
-              <a:rPr lang="en-US" sz="1600" b="1" dirty="0">
-                <a:solidFill>
-                  <a:srgbClr val="043B72"/>
-                </a:solidFill>
-                <a:latin typeface="Spoqa Han Sans Neo" pitchFamily="34" charset="0"/>
-                <a:ea typeface="Spoqa Han Sans Neo" pitchFamily="34" charset="-122"/>
-                <a:cs typeface="Spoqa Han Sans Neo" pitchFamily="34" charset="-120"/>
-              </a:rPr>
-              <a:t>매도자는 PBR로 말한다</a:t>
-            </a:r>
-            <a:endParaRPr lang="en-US" sz="1600" dirty="0"/>
-          </a:p>
-        </p:txBody>
-      </p:sp>
-      <p:sp>
-        <p:nvSpPr>
-          <p:cNvPr id="10" name="Text 8"/>
-          <p:cNvSpPr/>
-          <p:nvPr/>
-        </p:nvSpPr>
-        <p:spPr>
-          <a:xfrm>
-            <a:off x="6473952" y="2423160"/>
-            <a:ext cx="4937760" cy="1737360"/>
-          </a:xfrm>
-          <a:prstGeom prst="rect">
-            <a:avLst/>
-          </a:prstGeom>
-          <a:noFill/>
-          <a:ln/>
-        </p:spPr>
-        <p:txBody>
-          <a:bodyPr wrap="square" lIns="0" tIns="0" rIns="0" bIns="0" rtlCol="0" anchor="ctr"/>
-          <a:lstStyle/>
-          <a:p>
-            <a:pPr indent="0" marL="0">
-              <a:lnSpc>
-                <a:spcPts val="1900"/>
-              </a:lnSpc>
-              <a:buNone/>
-            </a:pPr>
-            <a:r>
-              <a:rPr lang="en-US" sz="1300" dirty="0">
-                <a:solidFill>
-                  <a:srgbClr val="3D3D3D"/>
-                </a:solidFill>
-                <a:latin typeface="Spoqa Han Sans Neo" pitchFamily="34" charset="0"/>
-                <a:ea typeface="Spoqa Han Sans Neo" pitchFamily="34" charset="-122"/>
-                <a:cs typeface="Spoqa Han Sans Neo" pitchFamily="34" charset="-120"/>
-              </a:rPr>
-              <a:t>자산가치·사이클 고점 부담에 주목 — 이익의 정점 통과 가능성, 다운사이클 재현 리스크를 근거로 눈높이를 낮춤.</a:t>
-            </a:r>
-            <a:endParaRPr lang="en-US" sz="1300" dirty="0"/>
-          </a:p>
-        </p:txBody>
-      </p:sp>
-      <p:sp>
-        <p:nvSpPr>
-          <p:cNvPr id="11" name="Shape 9"/>
-          <p:cNvSpPr/>
-          <p:nvPr/>
-        </p:nvSpPr>
-        <p:spPr>
-          <a:xfrm>
-            <a:off x="502920" y="4526280"/>
-            <a:ext cx="11183112" cy="1371600"/>
-          </a:xfrm>
-          <a:prstGeom prst="roundRect">
-            <a:avLst>
-              <a:gd name="adj" fmla="val 2667"/>
-            </a:avLst>
-          </a:prstGeom>
-          <a:solidFill>
-            <a:srgbClr val="ECEFF4"/>
-          </a:solidFill>
-          <a:ln/>
-        </p:spPr>
-      </p:sp>
-      <p:sp>
-        <p:nvSpPr>
-          <p:cNvPr id="12" name="Text 10"/>
-          <p:cNvSpPr/>
-          <p:nvPr/>
-        </p:nvSpPr>
-        <p:spPr>
-          <a:xfrm>
-            <a:off x="777240" y="4663440"/>
-            <a:ext cx="10515600" cy="320040"/>
-          </a:xfrm>
-          <a:prstGeom prst="rect">
-            <a:avLst/>
-          </a:prstGeom>
-          <a:noFill/>
-          <a:ln/>
-        </p:spPr>
-        <p:txBody>
-          <a:bodyPr wrap="square" lIns="0" tIns="0" rIns="0" bIns="0" rtlCol="0" anchor="ctr"/>
-          <a:lstStyle/>
-          <a:p>
-            <a:pPr indent="0" marL="0">
-              <a:buNone/>
-            </a:pPr>
-            <a:r>
-              <a:rPr lang="en-US" sz="1400" b="1" dirty="0">
-                <a:solidFill>
-                  <a:srgbClr val="1A1A1A"/>
-                </a:solidFill>
-                <a:latin typeface="Spoqa Han Sans Neo" pitchFamily="34" charset="0"/>
-                <a:ea typeface="Spoqa Han Sans Neo" pitchFamily="34" charset="-122"/>
-                <a:cs typeface="Spoqa Han Sans Neo" pitchFamily="34" charset="-120"/>
-              </a:rPr>
-              <a:t>수급 경고 — 단일종목 레버리지 ETF의 변동성 감가(Volatility Decay)</a:t>
-            </a:r>
-            <a:endParaRPr lang="en-US" sz="1400" dirty="0"/>
-          </a:p>
-        </p:txBody>
-      </p:sp>
-      <p:sp>
-        <p:nvSpPr>
-          <p:cNvPr id="13" name="Text 11"/>
-          <p:cNvSpPr/>
-          <p:nvPr/>
-        </p:nvSpPr>
-        <p:spPr>
-          <a:xfrm>
-            <a:off x="777240" y="5029200"/>
-            <a:ext cx="10515600" cy="777240"/>
-          </a:xfrm>
-          <a:prstGeom prst="rect">
-            <a:avLst/>
-          </a:prstGeom>
-          <a:noFill/>
-          <a:ln/>
-        </p:spPr>
-        <p:txBody>
-          <a:bodyPr wrap="square" lIns="0" tIns="0" rIns="0" bIns="0" rtlCol="0" anchor="ctr"/>
-          <a:lstStyle/>
-          <a:p>
-            <a:pPr indent="0" marL="0">
-              <a:lnSpc>
-                <a:spcPts val="1700"/>
-              </a:lnSpc>
-              <a:buNone/>
-            </a:pPr>
-            <a:r>
-              <a:rPr lang="en-US" sz="1250" dirty="0">
-                <a:solidFill>
-                  <a:srgbClr val="3D3D3D"/>
-                </a:solidFill>
-                <a:latin typeface="Spoqa Han Sans Neo" pitchFamily="34" charset="0"/>
-                <a:ea typeface="Spoqa Han Sans Neo" pitchFamily="34" charset="-122"/>
-                <a:cs typeface="Spoqa Han Sans Neo" pitchFamily="34" charset="-120"/>
-              </a:rPr>
-              <a:t>레버리지 ETF는 상승 시 추가 매수·하락 시 추가 매도하는 구조 → 시장 변동성을 증폭. 특정 국가·특정 메모리 비중이 과도하다면, PER과 PBR 두 관점을 균형 있게 점검할 필요.</a:t>
-            </a:r>
-            <a:endParaRPr lang="en-US" sz="1250" dirty="0"/>
-          </a:p>
-        </p:txBody>
-      </p:sp>
-      <p:sp>
-        <p:nvSpPr>
-          <p:cNvPr id="14" name="Text 12"/>
+              <a:t>핵심: 'SK 독주'에서 '양강 경쟁'으로 — HBM 판이 다시 짜인다</a:t>
+            </a:r>
+            <a:endParaRPr lang="en-US" sz="1150" dirty="0"/>
+          </a:p>
+        </p:txBody>
+      </p:sp>
+      <p:sp>
+        <p:nvSpPr>
+          <p:cNvPr id="24" name="Text 21"/>
           <p:cNvSpPr/>
           <p:nvPr/>
         </p:nvSpPr>
@@ -5824,7 +7158,7 @@
                 <a:ea typeface="Spoqa Han Sans Neo" pitchFamily="34" charset="-122"/>
                 <a:cs typeface="Spoqa Han Sans Neo" pitchFamily="34" charset="-120"/>
               </a:rPr>
-              <a:t>자료: 첨부 K-Freedom Insights 'PER과 심리학', '레버리지 ETF 변동성 감가'.</a:t>
+              <a:t>자료: 파이낸셜뉴스, DigiTimes, TrendForce, UBS (2025~2026). 점유율 전망치는 IB 추정.</a:t>
             </a:r>
             <a:endParaRPr lang="en-US" sz="850" dirty="0"/>
           </a:p>
@@ -5832,7 +7166,7 @@
       </p:sp>
       <p:sp>
         <p:nvSpPr>
-          <p:cNvPr id="15" name="Text 13"/>
+          <p:cNvPr id="25" name="Text 22"/>
           <p:cNvSpPr/>
           <p:nvPr/>
         </p:nvSpPr>
@@ -5954,7 +7288,7 @@
                 <a:ea typeface="Spoqa Han Sans Neo" pitchFamily="34" charset="-122"/>
                 <a:cs typeface="Spoqa Han Sans Neo" pitchFamily="34" charset="-120"/>
               </a:rPr>
-              <a:t>PART 05 · 기준</a:t>
+              <a:t>PART 04 · 변수</a:t>
             </a:r>
             <a:endParaRPr lang="en-US" sz="1200" dirty="0"/>
           </a:p>
@@ -5993,7 +7327,7 @@
                 <a:ea typeface="Spoqa Han Sans Neo" pitchFamily="34" charset="-122"/>
                 <a:cs typeface="Spoqa Han Sans Neo" pitchFamily="34" charset="-120"/>
               </a:rPr>
-              <a:t>투자 기준의 재점검: 통제의 경계선</a:t>
+              <a:t>중국 CXMT: 공급 변수의 실체</a:t>
             </a:r>
             <a:endParaRPr lang="en-US" sz="2700" dirty="0"/>
           </a:p>
@@ -6001,18 +7335,112 @@
       </p:sp>
       <p:sp>
         <p:nvSpPr>
-          <p:cNvPr id="5" name="Shape 3"/>
-          <p:cNvSpPr/>
-          <p:nvPr/>
-        </p:nvSpPr>
-        <p:spPr>
-          <a:xfrm>
-            <a:off x="502920" y="1828800"/>
-            <a:ext cx="5486400" cy="4023360"/>
+          <p:cNvPr id="5" name="Text 3"/>
+          <p:cNvSpPr/>
+          <p:nvPr/>
+        </p:nvSpPr>
+        <p:spPr>
+          <a:xfrm>
+            <a:off x="502920" y="1783080"/>
+            <a:ext cx="5303520" cy="320040"/>
+          </a:xfrm>
+          <a:prstGeom prst="rect">
+            <a:avLst/>
+          </a:prstGeom>
+          <a:noFill/>
+          <a:ln/>
+        </p:spPr>
+        <p:txBody>
+          <a:bodyPr wrap="square" lIns="0" tIns="0" rIns="0" bIns="0" rtlCol="0" anchor="ctr"/>
+          <a:lstStyle/>
+          <a:p>
+            <a:pPr indent="0" marL="0">
+              <a:buNone/>
+            </a:pPr>
+            <a:r>
+              <a:rPr lang="en-US" sz="1300" b="1" dirty="0">
+                <a:solidFill>
+                  <a:srgbClr val="1A1A1A"/>
+                </a:solidFill>
+                <a:latin typeface="Spoqa Han Sans Neo" pitchFamily="34" charset="0"/>
+                <a:ea typeface="Spoqa Han Sans Neo" pitchFamily="34" charset="-122"/>
+                <a:cs typeface="Spoqa Han Sans Neo" pitchFamily="34" charset="-120"/>
+              </a:rPr>
+              <a:t>CXMT 글로벌 DRAM 점유율</a:t>
+            </a:r>
+            <a:endParaRPr lang="en-US" sz="1300" dirty="0"/>
+          </a:p>
+        </p:txBody>
+      </p:sp>
+      <p:graphicFrame>
+        <p:nvGraphicFramePr>
+          <p:cNvPr id="6" name="Chart 0" descr=""/>
+          <p:cNvGraphicFramePr/>
+          <p:nvPr/>
+        </p:nvGraphicFramePr>
+        <p:xfrm>
+          <a:off x="457200" y="2148840"/>
+          <a:ext cx="5394960" cy="3017520"/>
+        </p:xfrm>
+        <a:graphic xmlns:a="http://schemas.openxmlformats.org/drawingml/2006/main">
+          <a:graphicData uri="http://schemas.openxmlformats.org/drawingml/2006/chart">
+            <c:chart xmlns:c="http://schemas.openxmlformats.org/drawingml/2006/chart" r:id="rId1"/>
+          </a:graphicData>
+        </a:graphic>
+      </p:graphicFrame>
+      <p:sp>
+        <p:nvSpPr>
+          <p:cNvPr id="7" name="Text 4"/>
+          <p:cNvSpPr/>
+          <p:nvPr/>
+        </p:nvSpPr>
+        <p:spPr>
+          <a:xfrm>
+            <a:off x="502920" y="5212080"/>
+            <a:ext cx="5394960" cy="640080"/>
+          </a:xfrm>
+          <a:prstGeom prst="rect">
+            <a:avLst/>
+          </a:prstGeom>
+          <a:noFill/>
+          <a:ln/>
+        </p:spPr>
+        <p:txBody>
+          <a:bodyPr wrap="square" lIns="0" tIns="0" rIns="0" bIns="0" rtlCol="0" anchor="ctr"/>
+          <a:lstStyle/>
+          <a:p>
+            <a:pPr indent="0" marL="0">
+              <a:buNone/>
+            </a:pPr>
+            <a:r>
+              <a:rPr lang="en-US" sz="1050" dirty="0">
+                <a:solidFill>
+                  <a:srgbClr val="3D3D3D"/>
+                </a:solidFill>
+                <a:latin typeface="Spoqa Han Sans Neo" pitchFamily="34" charset="0"/>
+                <a:ea typeface="Spoqa Han Sans Neo" pitchFamily="34" charset="-122"/>
+                <a:cs typeface="Spoqa Han Sans Neo" pitchFamily="34" charset="-120"/>
+              </a:rPr>
+              <a:t>2026E 약 350K WSPM — 마이크론과 격차 25K WSPM까지 축소. 세계 2위 DRAM 생산기지 부상.</a:t>
+            </a:r>
+            <a:endParaRPr lang="en-US" sz="1050" dirty="0"/>
+          </a:p>
+        </p:txBody>
+      </p:sp>
+      <p:sp>
+        <p:nvSpPr>
+          <p:cNvPr id="8" name="Shape 5"/>
+          <p:cNvSpPr/>
+          <p:nvPr/>
+        </p:nvSpPr>
+        <p:spPr>
+          <a:xfrm>
+            <a:off x="6108192" y="1828800"/>
+            <a:ext cx="5577840" cy="1920240"/>
           </a:xfrm>
           <a:prstGeom prst="roundRect">
             <a:avLst>
-              <a:gd name="adj" fmla="val 909"/>
+              <a:gd name="adj" fmla="val 1905"/>
             </a:avLst>
           </a:prstGeom>
           <a:solidFill>
@@ -6028,65 +7456,68 @@
       </p:sp>
       <p:sp>
         <p:nvSpPr>
-          <p:cNvPr id="6" name="Text 4"/>
-          <p:cNvSpPr/>
-          <p:nvPr/>
-        </p:nvSpPr>
-        <p:spPr>
-          <a:xfrm>
-            <a:off x="777240" y="2011680"/>
-            <a:ext cx="4937760" cy="365760"/>
-          </a:xfrm>
-          <a:prstGeom prst="rect">
-            <a:avLst/>
-          </a:prstGeom>
-          <a:noFill/>
-          <a:ln/>
-        </p:spPr>
-        <p:txBody>
-          <a:bodyPr wrap="square" lIns="0" tIns="0" rIns="0" bIns="0" rtlCol="0" anchor="ctr"/>
-          <a:lstStyle/>
-          <a:p>
-            <a:pPr indent="0" marL="0">
-              <a:buNone/>
-            </a:pPr>
-            <a:r>
-              <a:rPr lang="en-US" sz="1500" b="1" dirty="0">
-                <a:solidFill>
-                  <a:srgbClr val="6C6C6C"/>
-                </a:solidFill>
-                <a:latin typeface="Spoqa Han Sans Neo" pitchFamily="34" charset="0"/>
-                <a:ea typeface="Spoqa Han Sans Neo" pitchFamily="34" charset="-122"/>
-                <a:cs typeface="Spoqa Han Sans Neo" pitchFamily="34" charset="-120"/>
-              </a:rPr>
-              <a:t>✕  기업이 통제하기 어려운 변수</a:t>
-            </a:r>
-            <a:endParaRPr lang="en-US" sz="1500" dirty="0"/>
-          </a:p>
-        </p:txBody>
-      </p:sp>
-      <p:sp>
-        <p:nvSpPr>
-          <p:cNvPr id="7" name="Text 5"/>
-          <p:cNvSpPr/>
-          <p:nvPr/>
-        </p:nvSpPr>
-        <p:spPr>
-          <a:xfrm>
-            <a:off x="777240" y="2395728"/>
-            <a:ext cx="4937760" cy="502920"/>
-          </a:xfrm>
-          <a:prstGeom prst="rect">
-            <a:avLst/>
-          </a:prstGeom>
-          <a:noFill/>
-          <a:ln/>
-        </p:spPr>
-        <p:txBody>
-          <a:bodyPr wrap="square" lIns="0" tIns="0" rIns="0" bIns="0" rtlCol="0" anchor="ctr"/>
-          <a:lstStyle/>
-          <a:p>
-            <a:pPr indent="0" marL="0">
+          <p:cNvPr id="9" name="Text 6"/>
+          <p:cNvSpPr/>
+          <p:nvPr/>
+        </p:nvSpPr>
+        <p:spPr>
+          <a:xfrm>
+            <a:off x="6336792" y="1965960"/>
+            <a:ext cx="5120640" cy="320040"/>
+          </a:xfrm>
+          <a:prstGeom prst="rect">
+            <a:avLst/>
+          </a:prstGeom>
+          <a:noFill/>
+          <a:ln/>
+        </p:spPr>
+        <p:txBody>
+          <a:bodyPr wrap="square" lIns="0" tIns="0" rIns="0" bIns="0" rtlCol="0" anchor="ctr"/>
+          <a:lstStyle/>
+          <a:p>
+            <a:pPr indent="0" marL="0">
+              <a:buNone/>
+            </a:pPr>
+            <a:r>
+              <a:rPr lang="en-US" sz="1300" b="1" dirty="0">
+                <a:solidFill>
+                  <a:srgbClr val="C62828"/>
+                </a:solidFill>
+                <a:latin typeface="Spoqa Han Sans Neo" pitchFamily="34" charset="0"/>
+                <a:ea typeface="Spoqa Han Sans Neo" pitchFamily="34" charset="-122"/>
+                <a:cs typeface="Spoqa Han Sans Neo" pitchFamily="34" charset="-120"/>
+              </a:rPr>
+              <a:t>리스크 — 범용 DRAM 가격 압박</a:t>
+            </a:r>
+            <a:endParaRPr lang="en-US" sz="1300" dirty="0"/>
+          </a:p>
+        </p:txBody>
+      </p:sp>
+      <p:sp>
+        <p:nvSpPr>
+          <p:cNvPr id="10" name="Text 7"/>
+          <p:cNvSpPr/>
+          <p:nvPr/>
+        </p:nvSpPr>
+        <p:spPr>
+          <a:xfrm>
+            <a:off x="6336792" y="2286000"/>
+            <a:ext cx="5120640" cy="1371600"/>
+          </a:xfrm>
+          <a:prstGeom prst="rect">
+            <a:avLst/>
+          </a:prstGeom>
+          <a:noFill/>
+          <a:ln/>
+        </p:spPr>
+        <p:txBody>
+          <a:bodyPr wrap="square" lIns="0" tIns="0" rIns="0" bIns="0" rtlCol="0" anchor="ctr"/>
+          <a:lstStyle/>
+          <a:p>
+            <a:pPr indent="0" marL="0">
+              <a:lnSpc>
+                <a:spcPts val="1600"/>
+              </a:lnSpc>
               <a:buNone/>
             </a:pPr>
             <a:r>
@@ -6098,7 +7529,7 @@
                 <a:ea typeface="Spoqa Han Sans Neo" pitchFamily="34" charset="-122"/>
                 <a:cs typeface="Spoqa Han Sans Neo" pitchFamily="34" charset="-120"/>
               </a:rPr>
-              <a:t>단기 실적·주가에 큰 영향을 주지만, 예측도 어렵고 기업이 바꿀 수도 없다.</a:t>
+              <a:t>공격적 증설이 레거시·범용 DRAM 가격의 상단을 누를 수 있음. 2023→2026 점유율 4%→11%로 3배 가까이 확대.</a:t>
             </a:r>
             <a:endParaRPr lang="en-US" sz="1150" dirty="0"/>
           </a:p>
@@ -6106,26 +7537,26 @@
       </p:sp>
       <p:sp>
         <p:nvSpPr>
-          <p:cNvPr id="8" name="Shape 6"/>
-          <p:cNvSpPr/>
-          <p:nvPr/>
-        </p:nvSpPr>
-        <p:spPr>
-          <a:xfrm>
-            <a:off x="777240" y="3017520"/>
-            <a:ext cx="4937760" cy="548640"/>
+          <p:cNvPr id="11" name="Shape 8"/>
+          <p:cNvSpPr/>
+          <p:nvPr/>
+        </p:nvSpPr>
+        <p:spPr>
+          <a:xfrm>
+            <a:off x="6108192" y="3886200"/>
+            <a:ext cx="5577840" cy="2011680"/>
           </a:xfrm>
           <a:prstGeom prst="roundRect">
             <a:avLst>
-              <a:gd name="adj" fmla="val 5000"/>
+              <a:gd name="adj" fmla="val 1818"/>
             </a:avLst>
           </a:prstGeom>
           <a:solidFill>
             <a:srgbClr val="FFFFFF"/>
           </a:solidFill>
-          <a:ln w="9525">
+          <a:ln w="15875">
             <a:solidFill>
-              <a:srgbClr val="CDCECB"/>
+              <a:srgbClr val="043B72"/>
             </a:solidFill>
             <a:prstDash val="solid"/>
           </a:ln>
@@ -6133,30 +7564,89 @@
       </p:sp>
       <p:sp>
         <p:nvSpPr>
-          <p:cNvPr id="9" name="Text 7"/>
-          <p:cNvSpPr/>
-          <p:nvPr/>
-        </p:nvSpPr>
-        <p:spPr>
-          <a:xfrm>
-            <a:off x="960120" y="3017520"/>
-            <a:ext cx="4663440" cy="548640"/>
-          </a:xfrm>
-          <a:prstGeom prst="rect">
-            <a:avLst/>
-          </a:prstGeom>
-          <a:noFill/>
-          <a:ln/>
-        </p:spPr>
-        <p:txBody>
-          <a:bodyPr wrap="square" lIns="0" tIns="0" rIns="0" bIns="0" rtlCol="0" anchor="ctr"/>
-          <a:lstStyle/>
-          <a:p>
-            <a:pPr indent="0" marL="0">
-              <a:buNone/>
-            </a:pPr>
-            <a:r>
-              <a:rPr lang="en-US" sz="1250" dirty="0">
+          <p:cNvPr id="12" name="Text 9"/>
+          <p:cNvSpPr/>
+          <p:nvPr/>
+        </p:nvSpPr>
+        <p:spPr>
+          <a:xfrm>
+            <a:off x="6336792" y="4023360"/>
+            <a:ext cx="5120640" cy="320040"/>
+          </a:xfrm>
+          <a:prstGeom prst="rect">
+            <a:avLst/>
+          </a:prstGeom>
+          <a:noFill/>
+          <a:ln/>
+        </p:spPr>
+        <p:txBody>
+          <a:bodyPr wrap="square" lIns="0" tIns="0" rIns="0" bIns="0" rtlCol="0" anchor="ctr"/>
+          <a:lstStyle/>
+          <a:p>
+            <a:pPr indent="0" marL="0">
+              <a:buNone/>
+            </a:pPr>
+            <a:r>
+              <a:rPr lang="en-US" sz="1300" b="1" dirty="0">
+                <a:solidFill>
+                  <a:srgbClr val="043B72"/>
+                </a:solidFill>
+                <a:latin typeface="Spoqa Han Sans Neo" pitchFamily="34" charset="0"/>
+                <a:ea typeface="Spoqa Han Sans Neo" pitchFamily="34" charset="-122"/>
+                <a:cs typeface="Spoqa Han Sans Neo" pitchFamily="34" charset="-120"/>
+              </a:rPr>
+              <a:t>완충 — AI 메모리는 다른 리그</a:t>
+            </a:r>
+            <a:endParaRPr lang="en-US" sz="1300" dirty="0"/>
+          </a:p>
+        </p:txBody>
+      </p:sp>
+      <p:sp>
+        <p:nvSpPr>
+          <p:cNvPr id="13" name="Text 10"/>
+          <p:cNvSpPr/>
+          <p:nvPr/>
+        </p:nvSpPr>
+        <p:spPr>
+          <a:xfrm>
+            <a:off x="6336792" y="4370832"/>
+            <a:ext cx="5120640" cy="457200"/>
+          </a:xfrm>
+          <a:prstGeom prst="rect">
+            <a:avLst/>
+          </a:prstGeom>
+          <a:noFill/>
+          <a:ln/>
+        </p:spPr>
+        <p:txBody>
+          <a:bodyPr wrap="square" lIns="0" tIns="0" rIns="0" bIns="0" rtlCol="0" anchor="ctr"/>
+          <a:lstStyle/>
+          <a:p>
+            <a:pPr indent="0" marL="0">
+              <a:lnSpc>
+                <a:spcPts val="1300"/>
+              </a:lnSpc>
+              <a:buNone/>
+            </a:pPr>
+            <a:r>
+              <a:rPr lang="en-US" sz="1100" b="1" dirty="0">
+                <a:solidFill>
+                  <a:srgbClr val="043B72"/>
+                </a:solidFill>
+                <a:latin typeface="Spoqa Han Sans Neo" pitchFamily="34" charset="0"/>
+                <a:ea typeface="Spoqa Han Sans Neo" pitchFamily="34" charset="-122"/>
+                <a:cs typeface="Spoqa Han Sans Neo" pitchFamily="34" charset="-120"/>
+              </a:rPr>
+              <a:t>•  </a:t>
+            </a:r>
+            <a:pPr indent="0" marL="0">
+              <a:lnSpc>
+                <a:spcPts val="1300"/>
+              </a:lnSpc>
+              <a:buNone/>
+            </a:pPr>
+            <a:r>
+              <a:rPr lang="en-US" sz="1100" dirty="0">
                 <a:solidFill>
                   <a:srgbClr val="3D3D3D"/>
                 </a:solidFill>
@@ -6164,65 +7654,58 @@
                 <a:ea typeface="Spoqa Han Sans Neo" pitchFamily="34" charset="-122"/>
                 <a:cs typeface="Spoqa Han Sans Neo" pitchFamily="34" charset="-120"/>
               </a:rPr>
-              <a:t>고객사의 데이터센터 증설 속도</a:t>
-            </a:r>
-            <a:endParaRPr lang="en-US" sz="1250" dirty="0"/>
-          </a:p>
-        </p:txBody>
-      </p:sp>
-      <p:sp>
-        <p:nvSpPr>
-          <p:cNvPr id="10" name="Shape 8"/>
-          <p:cNvSpPr/>
-          <p:nvPr/>
-        </p:nvSpPr>
-        <p:spPr>
-          <a:xfrm>
-            <a:off x="777240" y="3675888"/>
-            <a:ext cx="4937760" cy="548640"/>
-          </a:xfrm>
-          <a:prstGeom prst="roundRect">
-            <a:avLst>
-              <a:gd name="adj" fmla="val 5000"/>
-            </a:avLst>
-          </a:prstGeom>
-          <a:solidFill>
-            <a:srgbClr val="FFFFFF"/>
-          </a:solidFill>
-          <a:ln w="9525">
-            <a:solidFill>
-              <a:srgbClr val="CDCECB"/>
-            </a:solidFill>
-            <a:prstDash val="solid"/>
-          </a:ln>
-        </p:spPr>
-      </p:sp>
-      <p:sp>
-        <p:nvSpPr>
-          <p:cNvPr id="11" name="Text 9"/>
-          <p:cNvSpPr/>
-          <p:nvPr/>
-        </p:nvSpPr>
-        <p:spPr>
-          <a:xfrm>
-            <a:off x="960120" y="3675888"/>
-            <a:ext cx="4663440" cy="548640"/>
-          </a:xfrm>
-          <a:prstGeom prst="rect">
-            <a:avLst/>
-          </a:prstGeom>
-          <a:noFill/>
-          <a:ln/>
-        </p:spPr>
-        <p:txBody>
-          <a:bodyPr wrap="square" lIns="0" tIns="0" rIns="0" bIns="0" rtlCol="0" anchor="ctr"/>
-          <a:lstStyle/>
-          <a:p>
-            <a:pPr indent="0" marL="0">
-              <a:buNone/>
-            </a:pPr>
-            <a:r>
-              <a:rPr lang="en-US" sz="1250" dirty="0">
+              <a:t>증설 상당분은 중국 내수 소화 → 글로벌 과잉으로 직결되지 않음</a:t>
+            </a:r>
+            <a:endParaRPr lang="en-US" sz="1100" dirty="0"/>
+          </a:p>
+        </p:txBody>
+      </p:sp>
+      <p:sp>
+        <p:nvSpPr>
+          <p:cNvPr id="14" name="Text 11"/>
+          <p:cNvSpPr/>
+          <p:nvPr/>
+        </p:nvSpPr>
+        <p:spPr>
+          <a:xfrm>
+            <a:off x="6336792" y="4855464"/>
+            <a:ext cx="5120640" cy="457200"/>
+          </a:xfrm>
+          <a:prstGeom prst="rect">
+            <a:avLst/>
+          </a:prstGeom>
+          <a:noFill/>
+          <a:ln/>
+        </p:spPr>
+        <p:txBody>
+          <a:bodyPr wrap="square" lIns="0" tIns="0" rIns="0" bIns="0" rtlCol="0" anchor="ctr"/>
+          <a:lstStyle/>
+          <a:p>
+            <a:pPr indent="0" marL="0">
+              <a:lnSpc>
+                <a:spcPts val="1300"/>
+              </a:lnSpc>
+              <a:buNone/>
+            </a:pPr>
+            <a:r>
+              <a:rPr lang="en-US" sz="1100" b="1" dirty="0">
+                <a:solidFill>
+                  <a:srgbClr val="043B72"/>
+                </a:solidFill>
+                <a:latin typeface="Spoqa Han Sans Neo" pitchFamily="34" charset="0"/>
+                <a:ea typeface="Spoqa Han Sans Neo" pitchFamily="34" charset="-122"/>
+                <a:cs typeface="Spoqa Han Sans Neo" pitchFamily="34" charset="-120"/>
+              </a:rPr>
+              <a:t>•  </a:t>
+            </a:r>
+            <a:pPr indent="0" marL="0">
+              <a:lnSpc>
+                <a:spcPts val="1300"/>
+              </a:lnSpc>
+              <a:buNone/>
+            </a:pPr>
+            <a:r>
+              <a:rPr lang="en-US" sz="1100" dirty="0">
                 <a:solidFill>
                   <a:srgbClr val="3D3D3D"/>
                 </a:solidFill>
@@ -6230,65 +7713,58 @@
                 <a:ea typeface="Spoqa Han Sans Neo" pitchFamily="34" charset="-122"/>
                 <a:cs typeface="Spoqa Han Sans Neo" pitchFamily="34" charset="-120"/>
               </a:rPr>
-              <a:t>메모리 가격 사이클(업/다운)</a:t>
-            </a:r>
-            <a:endParaRPr lang="en-US" sz="1250" dirty="0"/>
-          </a:p>
-        </p:txBody>
-      </p:sp>
-      <p:sp>
-        <p:nvSpPr>
-          <p:cNvPr id="12" name="Shape 10"/>
-          <p:cNvSpPr/>
-          <p:nvPr/>
-        </p:nvSpPr>
-        <p:spPr>
-          <a:xfrm>
-            <a:off x="777240" y="4334256"/>
-            <a:ext cx="4937760" cy="548640"/>
-          </a:xfrm>
-          <a:prstGeom prst="roundRect">
-            <a:avLst>
-              <a:gd name="adj" fmla="val 5000"/>
-            </a:avLst>
-          </a:prstGeom>
-          <a:solidFill>
-            <a:srgbClr val="FFFFFF"/>
-          </a:solidFill>
-          <a:ln w="9525">
-            <a:solidFill>
-              <a:srgbClr val="CDCECB"/>
-            </a:solidFill>
-            <a:prstDash val="solid"/>
-          </a:ln>
-        </p:spPr>
-      </p:sp>
-      <p:sp>
-        <p:nvSpPr>
-          <p:cNvPr id="13" name="Text 11"/>
-          <p:cNvSpPr/>
-          <p:nvPr/>
-        </p:nvSpPr>
-        <p:spPr>
-          <a:xfrm>
-            <a:off x="960120" y="4334256"/>
-            <a:ext cx="4663440" cy="548640"/>
-          </a:xfrm>
-          <a:prstGeom prst="rect">
-            <a:avLst/>
-          </a:prstGeom>
-          <a:noFill/>
-          <a:ln/>
-        </p:spPr>
-        <p:txBody>
-          <a:bodyPr wrap="square" lIns="0" tIns="0" rIns="0" bIns="0" rtlCol="0" anchor="ctr"/>
-          <a:lstStyle/>
-          <a:p>
-            <a:pPr indent="0" marL="0">
-              <a:buNone/>
-            </a:pPr>
-            <a:r>
-              <a:rPr lang="en-US" sz="1250" dirty="0">
+              <a:t>HBM 양산은 아직 미검증 — 핵심 고부가 영역의 격차는 여전</a:t>
+            </a:r>
+            <a:endParaRPr lang="en-US" sz="1100" dirty="0"/>
+          </a:p>
+        </p:txBody>
+      </p:sp>
+      <p:sp>
+        <p:nvSpPr>
+          <p:cNvPr id="15" name="Text 12"/>
+          <p:cNvSpPr/>
+          <p:nvPr/>
+        </p:nvSpPr>
+        <p:spPr>
+          <a:xfrm>
+            <a:off x="6336792" y="5340096"/>
+            <a:ext cx="5120640" cy="457200"/>
+          </a:xfrm>
+          <a:prstGeom prst="rect">
+            <a:avLst/>
+          </a:prstGeom>
+          <a:noFill/>
+          <a:ln/>
+        </p:spPr>
+        <p:txBody>
+          <a:bodyPr wrap="square" lIns="0" tIns="0" rIns="0" bIns="0" rtlCol="0" anchor="ctr"/>
+          <a:lstStyle/>
+          <a:p>
+            <a:pPr indent="0" marL="0">
+              <a:lnSpc>
+                <a:spcPts val="1300"/>
+              </a:lnSpc>
+              <a:buNone/>
+            </a:pPr>
+            <a:r>
+              <a:rPr lang="en-US" sz="1100" b="1" dirty="0">
+                <a:solidFill>
+                  <a:srgbClr val="043B72"/>
+                </a:solidFill>
+                <a:latin typeface="Spoqa Han Sans Neo" pitchFamily="34" charset="0"/>
+                <a:ea typeface="Spoqa Han Sans Neo" pitchFamily="34" charset="-122"/>
+                <a:cs typeface="Spoqa Han Sans Neo" pitchFamily="34" charset="-120"/>
+              </a:rPr>
+              <a:t>•  </a:t>
+            </a:r>
+            <a:pPr indent="0" marL="0">
+              <a:lnSpc>
+                <a:spcPts val="1300"/>
+              </a:lnSpc>
+              <a:buNone/>
+            </a:pPr>
+            <a:r>
+              <a:rPr lang="en-US" sz="1100" dirty="0">
                 <a:solidFill>
                   <a:srgbClr val="3D3D3D"/>
                 </a:solidFill>
@@ -6296,438 +7772,15 @@
                 <a:ea typeface="Spoqa Han Sans Neo" pitchFamily="34" charset="-122"/>
                 <a:cs typeface="Spoqa Han Sans Neo" pitchFamily="34" charset="-120"/>
               </a:rPr>
-              <a:t>AI 효율화가 바꾸는 단기 수요 전망</a:t>
-            </a:r>
-            <a:endParaRPr lang="en-US" sz="1250" dirty="0"/>
-          </a:p>
-        </p:txBody>
-      </p:sp>
-      <p:sp>
-        <p:nvSpPr>
-          <p:cNvPr id="14" name="Shape 12"/>
-          <p:cNvSpPr/>
-          <p:nvPr/>
-        </p:nvSpPr>
-        <p:spPr>
-          <a:xfrm>
-            <a:off x="777240" y="4992624"/>
-            <a:ext cx="4937760" cy="548640"/>
-          </a:xfrm>
-          <a:prstGeom prst="roundRect">
-            <a:avLst>
-              <a:gd name="adj" fmla="val 5000"/>
-            </a:avLst>
-          </a:prstGeom>
-          <a:solidFill>
-            <a:srgbClr val="FFFFFF"/>
-          </a:solidFill>
-          <a:ln w="9525">
-            <a:solidFill>
-              <a:srgbClr val="CDCECB"/>
-            </a:solidFill>
-            <a:prstDash val="solid"/>
-          </a:ln>
-        </p:spPr>
-      </p:sp>
-      <p:sp>
-        <p:nvSpPr>
-          <p:cNvPr id="15" name="Text 13"/>
-          <p:cNvSpPr/>
-          <p:nvPr/>
-        </p:nvSpPr>
-        <p:spPr>
-          <a:xfrm>
-            <a:off x="960120" y="4992624"/>
-            <a:ext cx="4663440" cy="548640"/>
-          </a:xfrm>
-          <a:prstGeom prst="rect">
-            <a:avLst/>
-          </a:prstGeom>
-          <a:noFill/>
-          <a:ln/>
-        </p:spPr>
-        <p:txBody>
-          <a:bodyPr wrap="square" lIns="0" tIns="0" rIns="0" bIns="0" rtlCol="0" anchor="ctr"/>
-          <a:lstStyle/>
-          <a:p>
-            <a:pPr indent="0" marL="0">
-              <a:buNone/>
-            </a:pPr>
-            <a:r>
-              <a:rPr lang="en-US" sz="1250" dirty="0">
-                <a:solidFill>
-                  <a:srgbClr val="3D3D3D"/>
-                </a:solidFill>
-                <a:latin typeface="Spoqa Han Sans Neo" pitchFamily="34" charset="0"/>
-                <a:ea typeface="Spoqa Han Sans Neo" pitchFamily="34" charset="-122"/>
-                <a:cs typeface="Spoqa Han Sans Neo" pitchFamily="34" charset="-120"/>
-              </a:rPr>
-              <a:t>매크로·환율·지정학 리스크</a:t>
-            </a:r>
-            <a:endParaRPr lang="en-US" sz="1250" dirty="0"/>
-          </a:p>
-        </p:txBody>
-      </p:sp>
-      <p:sp>
-        <p:nvSpPr>
-          <p:cNvPr id="16" name="Shape 14"/>
-          <p:cNvSpPr/>
-          <p:nvPr/>
-        </p:nvSpPr>
-        <p:spPr>
-          <a:xfrm>
-            <a:off x="6199632" y="1828800"/>
-            <a:ext cx="5486400" cy="4023360"/>
-          </a:xfrm>
-          <a:prstGeom prst="roundRect">
-            <a:avLst>
-              <a:gd name="adj" fmla="val 909"/>
-            </a:avLst>
-          </a:prstGeom>
-          <a:solidFill>
-            <a:srgbClr val="FFFFFF"/>
-          </a:solidFill>
-          <a:ln w="19050">
-            <a:solidFill>
-              <a:srgbClr val="F58220"/>
-            </a:solidFill>
-            <a:prstDash val="solid"/>
-          </a:ln>
-        </p:spPr>
-      </p:sp>
-      <p:sp>
-        <p:nvSpPr>
-          <p:cNvPr id="17" name="Text 15"/>
-          <p:cNvSpPr/>
-          <p:nvPr/>
-        </p:nvSpPr>
-        <p:spPr>
-          <a:xfrm>
-            <a:off x="6473952" y="2011680"/>
-            <a:ext cx="4937760" cy="365760"/>
-          </a:xfrm>
-          <a:prstGeom prst="rect">
-            <a:avLst/>
-          </a:prstGeom>
-          <a:noFill/>
-          <a:ln/>
-        </p:spPr>
-        <p:txBody>
-          <a:bodyPr wrap="square" lIns="0" tIns="0" rIns="0" bIns="0" rtlCol="0" anchor="ctr"/>
-          <a:lstStyle/>
-          <a:p>
-            <a:pPr indent="0" marL="0">
-              <a:buNone/>
-            </a:pPr>
-            <a:r>
-              <a:rPr lang="en-US" sz="1500" b="1" dirty="0">
-                <a:solidFill>
-                  <a:srgbClr val="CB6015"/>
-                </a:solidFill>
-                <a:latin typeface="Spoqa Han Sans Neo" pitchFamily="34" charset="0"/>
-                <a:ea typeface="Spoqa Han Sans Neo" pitchFamily="34" charset="-122"/>
-                <a:cs typeface="Spoqa Han Sans Neo" pitchFamily="34" charset="-120"/>
-              </a:rPr>
-              <a:t>✓  기업이 스스로 만드는 것</a:t>
-            </a:r>
-            <a:endParaRPr lang="en-US" sz="1500" dirty="0"/>
-          </a:p>
-        </p:txBody>
-      </p:sp>
-      <p:sp>
-        <p:nvSpPr>
-          <p:cNvPr id="18" name="Text 16"/>
-          <p:cNvSpPr/>
-          <p:nvPr/>
-        </p:nvSpPr>
-        <p:spPr>
-          <a:xfrm>
-            <a:off x="6473952" y="2395728"/>
-            <a:ext cx="4937760" cy="502920"/>
-          </a:xfrm>
-          <a:prstGeom prst="rect">
-            <a:avLst/>
-          </a:prstGeom>
-          <a:noFill/>
-          <a:ln/>
-        </p:spPr>
-        <p:txBody>
-          <a:bodyPr wrap="square" lIns="0" tIns="0" rIns="0" bIns="0" rtlCol="0" anchor="ctr"/>
-          <a:lstStyle/>
-          <a:p>
-            <a:pPr indent="0" marL="0">
-              <a:buNone/>
-            </a:pPr>
-            <a:r>
-              <a:rPr lang="en-US" sz="1150" dirty="0">
-                <a:solidFill>
-                  <a:srgbClr val="3D3D3D"/>
-                </a:solidFill>
-                <a:latin typeface="Spoqa Han Sans Neo" pitchFamily="34" charset="0"/>
-                <a:ea typeface="Spoqa Han Sans Neo" pitchFamily="34" charset="-122"/>
-                <a:cs typeface="Spoqa Han Sans Neo" pitchFamily="34" charset="-120"/>
-              </a:rPr>
-              <a:t>고객사의 투자 속도와 무관하게 지속적으로 발전해야 하는 영역.</a:t>
-            </a:r>
-            <a:endParaRPr lang="en-US" sz="1150" dirty="0"/>
-          </a:p>
-        </p:txBody>
-      </p:sp>
-      <p:sp>
-        <p:nvSpPr>
-          <p:cNvPr id="19" name="Shape 17"/>
-          <p:cNvSpPr/>
-          <p:nvPr/>
-        </p:nvSpPr>
-        <p:spPr>
-          <a:xfrm>
-            <a:off x="6473952" y="3017520"/>
-            <a:ext cx="4937760" cy="548640"/>
-          </a:xfrm>
-          <a:prstGeom prst="roundRect">
-            <a:avLst>
-              <a:gd name="adj" fmla="val 5000"/>
-            </a:avLst>
-          </a:prstGeom>
-          <a:solidFill>
-            <a:srgbClr val="F58220">
-              <a:alpha val="10000"/>
-            </a:srgbClr>
-          </a:solidFill>
-          <a:ln/>
-        </p:spPr>
-      </p:sp>
-      <p:sp>
-        <p:nvSpPr>
-          <p:cNvPr id="20" name="Text 18"/>
-          <p:cNvSpPr/>
-          <p:nvPr/>
-        </p:nvSpPr>
-        <p:spPr>
-          <a:xfrm>
-            <a:off x="6656832" y="3017520"/>
-            <a:ext cx="4663440" cy="548640"/>
-          </a:xfrm>
-          <a:prstGeom prst="rect">
-            <a:avLst/>
-          </a:prstGeom>
-          <a:noFill/>
-          <a:ln/>
-        </p:spPr>
-        <p:txBody>
-          <a:bodyPr wrap="square" lIns="0" tIns="0" rIns="0" bIns="0" rtlCol="0" anchor="ctr"/>
-          <a:lstStyle/>
-          <a:p>
-            <a:pPr indent="0" marL="0">
-              <a:buNone/>
-            </a:pPr>
-            <a:r>
-              <a:rPr lang="en-US" sz="1250" b="1" dirty="0">
-                <a:solidFill>
-                  <a:srgbClr val="1A1A1A"/>
-                </a:solidFill>
-                <a:latin typeface="Spoqa Han Sans Neo" pitchFamily="34" charset="0"/>
-                <a:ea typeface="Spoqa Han Sans Neo" pitchFamily="34" charset="-122"/>
-                <a:cs typeface="Spoqa Han Sans Neo" pitchFamily="34" charset="-120"/>
-              </a:rPr>
-              <a:t>더 낮은 전력 · 더 높은 성능 기술</a:t>
-            </a:r>
-            <a:endParaRPr lang="en-US" sz="1250" dirty="0"/>
-          </a:p>
-        </p:txBody>
-      </p:sp>
-      <p:sp>
-        <p:nvSpPr>
-          <p:cNvPr id="21" name="Shape 19"/>
-          <p:cNvSpPr/>
-          <p:nvPr/>
-        </p:nvSpPr>
-        <p:spPr>
-          <a:xfrm>
-            <a:off x="6473952" y="3675888"/>
-            <a:ext cx="4937760" cy="548640"/>
-          </a:xfrm>
-          <a:prstGeom prst="roundRect">
-            <a:avLst>
-              <a:gd name="adj" fmla="val 5000"/>
-            </a:avLst>
-          </a:prstGeom>
-          <a:solidFill>
-            <a:srgbClr val="F58220">
-              <a:alpha val="10000"/>
-            </a:srgbClr>
-          </a:solidFill>
-          <a:ln/>
-        </p:spPr>
-      </p:sp>
-      <p:sp>
-        <p:nvSpPr>
-          <p:cNvPr id="22" name="Text 20"/>
-          <p:cNvSpPr/>
-          <p:nvPr/>
-        </p:nvSpPr>
-        <p:spPr>
-          <a:xfrm>
-            <a:off x="6656832" y="3675888"/>
-            <a:ext cx="4663440" cy="548640"/>
-          </a:xfrm>
-          <a:prstGeom prst="rect">
-            <a:avLst/>
-          </a:prstGeom>
-          <a:noFill/>
-          <a:ln/>
-        </p:spPr>
-        <p:txBody>
-          <a:bodyPr wrap="square" lIns="0" tIns="0" rIns="0" bIns="0" rtlCol="0" anchor="ctr"/>
-          <a:lstStyle/>
-          <a:p>
-            <a:pPr indent="0" marL="0">
-              <a:buNone/>
-            </a:pPr>
-            <a:r>
-              <a:rPr lang="en-US" sz="1250" b="1" dirty="0">
-                <a:solidFill>
-                  <a:srgbClr val="1A1A1A"/>
-                </a:solidFill>
-                <a:latin typeface="Spoqa Han Sans Neo" pitchFamily="34" charset="0"/>
-                <a:ea typeface="Spoqa Han Sans Neo" pitchFamily="34" charset="-122"/>
-                <a:cs typeface="Spoqa Han Sans Neo" pitchFamily="34" charset="-120"/>
-              </a:rPr>
-              <a:t>높은 수율을 확보하는 공정</a:t>
-            </a:r>
-            <a:endParaRPr lang="en-US" sz="1250" dirty="0"/>
-          </a:p>
-        </p:txBody>
-      </p:sp>
-      <p:sp>
-        <p:nvSpPr>
-          <p:cNvPr id="23" name="Shape 21"/>
-          <p:cNvSpPr/>
-          <p:nvPr/>
-        </p:nvSpPr>
-        <p:spPr>
-          <a:xfrm>
-            <a:off x="6473952" y="4334256"/>
-            <a:ext cx="4937760" cy="548640"/>
-          </a:xfrm>
-          <a:prstGeom prst="roundRect">
-            <a:avLst>
-              <a:gd name="adj" fmla="val 5000"/>
-            </a:avLst>
-          </a:prstGeom>
-          <a:solidFill>
-            <a:srgbClr val="F58220">
-              <a:alpha val="10000"/>
-            </a:srgbClr>
-          </a:solidFill>
-          <a:ln/>
-        </p:spPr>
-      </p:sp>
-      <p:sp>
-        <p:nvSpPr>
-          <p:cNvPr id="24" name="Text 22"/>
-          <p:cNvSpPr/>
-          <p:nvPr/>
-        </p:nvSpPr>
-        <p:spPr>
-          <a:xfrm>
-            <a:off x="6656832" y="4334256"/>
-            <a:ext cx="4663440" cy="548640"/>
-          </a:xfrm>
-          <a:prstGeom prst="rect">
-            <a:avLst/>
-          </a:prstGeom>
-          <a:noFill/>
-          <a:ln/>
-        </p:spPr>
-        <p:txBody>
-          <a:bodyPr wrap="square" lIns="0" tIns="0" rIns="0" bIns="0" rtlCol="0" anchor="ctr"/>
-          <a:lstStyle/>
-          <a:p>
-            <a:pPr indent="0" marL="0">
-              <a:buNone/>
-            </a:pPr>
-            <a:r>
-              <a:rPr lang="en-US" sz="1250" b="1" dirty="0">
-                <a:solidFill>
-                  <a:srgbClr val="1A1A1A"/>
-                </a:solidFill>
-                <a:latin typeface="Spoqa Han Sans Neo" pitchFamily="34" charset="0"/>
-                <a:ea typeface="Spoqa Han Sans Neo" pitchFamily="34" charset="-122"/>
-                <a:cs typeface="Spoqa Han Sans Neo" pitchFamily="34" charset="-120"/>
-              </a:rPr>
-              <a:t>첨단 패키징 장비·소재</a:t>
-            </a:r>
-            <a:endParaRPr lang="en-US" sz="1250" dirty="0"/>
-          </a:p>
-        </p:txBody>
-      </p:sp>
-      <p:sp>
-        <p:nvSpPr>
-          <p:cNvPr id="25" name="Shape 23"/>
-          <p:cNvSpPr/>
-          <p:nvPr/>
-        </p:nvSpPr>
-        <p:spPr>
-          <a:xfrm>
-            <a:off x="6473952" y="4992624"/>
-            <a:ext cx="4937760" cy="548640"/>
-          </a:xfrm>
-          <a:prstGeom prst="roundRect">
-            <a:avLst>
-              <a:gd name="adj" fmla="val 5000"/>
-            </a:avLst>
-          </a:prstGeom>
-          <a:solidFill>
-            <a:srgbClr val="F58220">
-              <a:alpha val="10000"/>
-            </a:srgbClr>
-          </a:solidFill>
-          <a:ln/>
-        </p:spPr>
-      </p:sp>
-      <p:sp>
-        <p:nvSpPr>
-          <p:cNvPr id="26" name="Text 24"/>
-          <p:cNvSpPr/>
-          <p:nvPr/>
-        </p:nvSpPr>
-        <p:spPr>
-          <a:xfrm>
-            <a:off x="6656832" y="4992624"/>
-            <a:ext cx="4663440" cy="548640"/>
-          </a:xfrm>
-          <a:prstGeom prst="rect">
-            <a:avLst/>
-          </a:prstGeom>
-          <a:noFill/>
-          <a:ln/>
-        </p:spPr>
-        <p:txBody>
-          <a:bodyPr wrap="square" lIns="0" tIns="0" rIns="0" bIns="0" rtlCol="0" anchor="ctr"/>
-          <a:lstStyle/>
-          <a:p>
-            <a:pPr indent="0" marL="0">
-              <a:buNone/>
-            </a:pPr>
-            <a:r>
-              <a:rPr lang="en-US" sz="1250" b="1" dirty="0">
-                <a:solidFill>
-                  <a:srgbClr val="1A1A1A"/>
-                </a:solidFill>
-                <a:latin typeface="Spoqa Han Sans Neo" pitchFamily="34" charset="0"/>
-                <a:ea typeface="Spoqa Han Sans Neo" pitchFamily="34" charset="-122"/>
-                <a:cs typeface="Spoqa Han Sans Neo" pitchFamily="34" charset="-120"/>
-              </a:rPr>
-              <a:t>효율적 설계를 지원하는 소프트웨어</a:t>
-            </a:r>
-            <a:endParaRPr lang="en-US" sz="1250" dirty="0"/>
-          </a:p>
-        </p:txBody>
-      </p:sp>
-      <p:sp>
-        <p:nvSpPr>
-          <p:cNvPr id="27" name="Text 25"/>
+              <a:t>2027년 말 서버 DRAM+HBM이 DRAM 시장의 50%+ 차지 전망</a:t>
+            </a:r>
+            <a:endParaRPr lang="en-US" sz="1100" dirty="0"/>
+          </a:p>
+        </p:txBody>
+      </p:sp>
+      <p:sp>
+        <p:nvSpPr>
+          <p:cNvPr id="16" name="Text 13"/>
           <p:cNvSpPr/>
           <p:nvPr/>
         </p:nvSpPr>
@@ -6758,7 +7811,7 @@
                 <a:ea typeface="Spoqa Han Sans Neo" pitchFamily="34" charset="-122"/>
                 <a:cs typeface="Spoqa Han Sans Neo" pitchFamily="34" charset="-120"/>
               </a:rPr>
-              <a:t>자료: 첨부 K-Freedom Insights '투자 기준의 재점검' 재구성.</a:t>
+              <a:t>자료: Tom's Hardware, SemiAnalysis, Counterpoint, DigiTimes (2026.07).</a:t>
             </a:r>
             <a:endParaRPr lang="en-US" sz="850" dirty="0"/>
           </a:p>
@@ -6766,7 +7819,7 @@
       </p:sp>
       <p:sp>
         <p:nvSpPr>
-          <p:cNvPr id="28" name="Text 26"/>
+          <p:cNvPr id="17" name="Text 14"/>
           <p:cNvSpPr/>
           <p:nvPr/>
         </p:nvSpPr>
@@ -6817,7 +7870,7 @@
     <p:bg>
       <p:bgPr>
         <a:solidFill>
-          <a:srgbClr val="043B72"/>
+          <a:srgbClr val="FFFFFF"/>
         </a:solidFill>
       </p:bgPr>
     </p:bg>
@@ -6843,7 +7896,7 @@
         </p:nvSpPr>
         <p:spPr>
           <a:xfrm>
-            <a:off x="502920" y="640080"/>
+            <a:off x="502920" y="502920"/>
             <a:ext cx="502920" cy="45720"/>
           </a:xfrm>
           <a:prstGeom prst="rect">
@@ -6863,7 +7916,7 @@
         </p:nvSpPr>
         <p:spPr>
           <a:xfrm>
-            <a:off x="502920" y="749808"/>
+            <a:off x="502920" y="603504"/>
             <a:ext cx="10058400" cy="274320"/>
           </a:xfrm>
           <a:prstGeom prst="rect">
@@ -6882,13 +7935,13 @@
             <a:r>
               <a:rPr lang="en-US" sz="1200" b="1" spc="100" kern="0" dirty="0">
                 <a:solidFill>
-                  <a:srgbClr val="FAB072"/>
-                </a:solidFill>
-                <a:latin typeface="Spoqa Han Sans Neo" pitchFamily="34" charset="0"/>
-                <a:ea typeface="Spoqa Han Sans Neo" pitchFamily="34" charset="-122"/>
-                <a:cs typeface="Spoqa Han Sans Neo" pitchFamily="34" charset="-120"/>
-              </a:rPr>
-              <a:t>CONCLUSION</a:t>
+                  <a:srgbClr val="F58220"/>
+                </a:solidFill>
+                <a:latin typeface="Spoqa Han Sans Neo" pitchFamily="34" charset="0"/>
+                <a:ea typeface="Spoqa Han Sans Neo" pitchFamily="34" charset="-122"/>
+                <a:cs typeface="Spoqa Han Sans Neo" pitchFamily="34" charset="-120"/>
+              </a:rPr>
+              <a:t>PART 05 · 심리</a:t>
             </a:r>
             <a:endParaRPr lang="en-US" sz="1200" dirty="0"/>
           </a:p>
@@ -6902,170 +7955,115 @@
         </p:nvSpPr>
         <p:spPr>
           <a:xfrm>
-            <a:off x="484632" y="1051560"/>
-            <a:ext cx="11155680" cy="640080"/>
-          </a:xfrm>
-          <a:prstGeom prst="rect">
-            <a:avLst/>
-          </a:prstGeom>
-          <a:noFill/>
-          <a:ln/>
-        </p:spPr>
-        <p:txBody>
-          <a:bodyPr wrap="square" lIns="0" tIns="0" rIns="0" bIns="0" rtlCol="0" anchor="ctr"/>
-          <a:lstStyle/>
-          <a:p>
-            <a:pPr indent="0" marL="0">
-              <a:buNone/>
-            </a:pPr>
-            <a:r>
-              <a:rPr lang="en-US" sz="2600" b="1" dirty="0">
-                <a:solidFill>
-                  <a:srgbClr val="FFFFFF"/>
-                </a:solidFill>
-                <a:latin typeface="Spoqa Han Sans Neo" pitchFamily="34" charset="0"/>
-                <a:ea typeface="Spoqa Han Sans Neo" pitchFamily="34" charset="-122"/>
-                <a:cs typeface="Spoqa Han Sans Neo" pitchFamily="34" charset="-120"/>
-              </a:rPr>
-              <a:t>핵심 결론: 사이클이 아니라 '기술 로드맵의 방향'</a:t>
-            </a:r>
-            <a:endParaRPr lang="en-US" sz="2600" dirty="0"/>
-          </a:p>
-        </p:txBody>
-      </p:sp>
-      <p:sp>
-        <p:nvSpPr>
-          <p:cNvPr id="5" name="Text 3"/>
+            <a:off x="484632" y="896112"/>
+            <a:ext cx="11155680" cy="685800"/>
+          </a:xfrm>
+          <a:prstGeom prst="rect">
+            <a:avLst/>
+          </a:prstGeom>
+          <a:noFill/>
+          <a:ln/>
+        </p:spPr>
+        <p:txBody>
+          <a:bodyPr wrap="square" lIns="0" tIns="0" rIns="0" bIns="0" rtlCol="0" anchor="ctr"/>
+          <a:lstStyle/>
+          <a:p>
+            <a:pPr indent="0" marL="0">
+              <a:buNone/>
+            </a:pPr>
+            <a:r>
+              <a:rPr lang="en-US" sz="2700" b="1" dirty="0">
+                <a:solidFill>
+                  <a:srgbClr val="1A1A1A"/>
+                </a:solidFill>
+                <a:latin typeface="Spoqa Han Sans Neo" pitchFamily="34" charset="0"/>
+                <a:ea typeface="Spoqa Han Sans Neo" pitchFamily="34" charset="-122"/>
+                <a:cs typeface="Spoqa Han Sans Neo" pitchFamily="34" charset="-120"/>
+              </a:rPr>
+              <a:t>확신은 어떻게 만들어지나 — PER vs PBR</a:t>
+            </a:r>
+            <a:endParaRPr lang="en-US" sz="2700" dirty="0"/>
+          </a:p>
+        </p:txBody>
+      </p:sp>
+      <p:sp>
+        <p:nvSpPr>
+          <p:cNvPr id="5" name="Shape 3"/>
           <p:cNvSpPr/>
           <p:nvPr/>
         </p:nvSpPr>
         <p:spPr>
           <a:xfrm>
             <a:off x="502920" y="1828800"/>
-            <a:ext cx="11155680" cy="731520"/>
-          </a:xfrm>
-          <a:prstGeom prst="rect">
-            <a:avLst/>
-          </a:prstGeom>
-          <a:noFill/>
-          <a:ln/>
-        </p:spPr>
-        <p:txBody>
-          <a:bodyPr wrap="square" lIns="0" tIns="0" rIns="0" bIns="0" rtlCol="0" anchor="ctr"/>
-          <a:lstStyle/>
-          <a:p>
-            <a:pPr indent="0" marL="0">
-              <a:lnSpc>
-                <a:spcPts val="2000"/>
-              </a:lnSpc>
-              <a:buNone/>
-            </a:pPr>
-            <a:r>
-              <a:rPr lang="en-US" sz="1400" dirty="0">
-                <a:solidFill>
-                  <a:srgbClr val="DCE6F2"/>
-                </a:solidFill>
-                <a:latin typeface="Spoqa Han Sans Neo" pitchFamily="34" charset="0"/>
-                <a:ea typeface="Spoqa Han Sans Neo" pitchFamily="34" charset="-122"/>
-                <a:cs typeface="Spoqa Han Sans Neo" pitchFamily="34" charset="-120"/>
-              </a:rPr>
-              <a:t>반도체 투자의 핵심은 고객사의 증설 사이클을 예측하는 것이 아니라, 기술 발전의 방향에서 필수적인 역할을 수행하고 스스로 제품 로드맵을 발전시키는 기업을 찾는 데 있다.</a:t>
-            </a:r>
-            <a:endParaRPr lang="en-US" sz="1400" dirty="0"/>
-          </a:p>
-        </p:txBody>
-      </p:sp>
-      <p:sp>
-        <p:nvSpPr>
-          <p:cNvPr id="6" name="Shape 4"/>
-          <p:cNvSpPr/>
-          <p:nvPr/>
-        </p:nvSpPr>
-        <p:spPr>
-          <a:xfrm>
-            <a:off x="502920" y="2880360"/>
-            <a:ext cx="2697480" cy="1828800"/>
+            <a:ext cx="5486400" cy="2468880"/>
           </a:xfrm>
           <a:prstGeom prst="roundRect">
             <a:avLst>
-              <a:gd name="adj" fmla="val 2000"/>
+              <a:gd name="adj" fmla="val 1481"/>
             </a:avLst>
           </a:prstGeom>
           <a:solidFill>
-            <a:srgbClr val="FFFFFF"/>
+            <a:srgbClr val="F58220">
+              <a:alpha val="10000"/>
+            </a:srgbClr>
           </a:solidFill>
-          <a:ln/>
-        </p:spPr>
-      </p:sp>
-      <p:sp>
-        <p:nvSpPr>
-          <p:cNvPr id="7" name="Shape 5"/>
-          <p:cNvSpPr/>
-          <p:nvPr/>
-        </p:nvSpPr>
-        <p:spPr>
-          <a:xfrm>
-            <a:off x="731520" y="3108960"/>
-            <a:ext cx="457200" cy="457200"/>
-          </a:xfrm>
-          <a:prstGeom prst="ellipse">
-            <a:avLst/>
-          </a:prstGeom>
-          <a:solidFill>
-            <a:srgbClr val="F58220"/>
-          </a:solidFill>
-          <a:ln/>
-        </p:spPr>
-      </p:sp>
-      <p:sp>
-        <p:nvSpPr>
-          <p:cNvPr id="8" name="Text 6"/>
-          <p:cNvSpPr/>
-          <p:nvPr/>
-        </p:nvSpPr>
-        <p:spPr>
-          <a:xfrm>
-            <a:off x="731520" y="3657600"/>
-            <a:ext cx="2286000" cy="365760"/>
-          </a:xfrm>
-          <a:prstGeom prst="rect">
-            <a:avLst/>
-          </a:prstGeom>
-          <a:noFill/>
-          <a:ln/>
-        </p:spPr>
-        <p:txBody>
-          <a:bodyPr wrap="square" lIns="0" tIns="0" rIns="0" bIns="0" rtlCol="0" anchor="ctr"/>
-          <a:lstStyle/>
-          <a:p>
-            <a:pPr indent="0" marL="0">
-              <a:buNone/>
-            </a:pPr>
-            <a:r>
-              <a:rPr lang="en-US" sz="1500" b="1" dirty="0">
-                <a:solidFill>
-                  <a:srgbClr val="043B72"/>
-                </a:solidFill>
-                <a:latin typeface="Spoqa Han Sans Neo" pitchFamily="34" charset="0"/>
-                <a:ea typeface="Spoqa Han Sans Neo" pitchFamily="34" charset="-122"/>
-                <a:cs typeface="Spoqa Han Sans Neo" pitchFamily="34" charset="-120"/>
-              </a:rPr>
-              <a:t>성능 향상</a:t>
-            </a:r>
-            <a:endParaRPr lang="en-US" sz="1500" dirty="0"/>
-          </a:p>
-        </p:txBody>
-      </p:sp>
-      <p:sp>
-        <p:nvSpPr>
-          <p:cNvPr id="9" name="Text 7"/>
-          <p:cNvSpPr/>
-          <p:nvPr/>
-        </p:nvSpPr>
-        <p:spPr>
-          <a:xfrm>
-            <a:off x="731520" y="4023360"/>
-            <a:ext cx="2286000" cy="640080"/>
+          <a:ln w="15875">
+            <a:solidFill>
+              <a:srgbClr val="F58220"/>
+            </a:solidFill>
+            <a:prstDash val="solid"/>
+          </a:ln>
+        </p:spPr>
+      </p:sp>
+      <p:sp>
+        <p:nvSpPr>
+          <p:cNvPr id="6" name="Text 4"/>
+          <p:cNvSpPr/>
+          <p:nvPr/>
+        </p:nvSpPr>
+        <p:spPr>
+          <a:xfrm>
+            <a:off x="777240" y="2011680"/>
+            <a:ext cx="4937760" cy="365760"/>
+          </a:xfrm>
+          <a:prstGeom prst="rect">
+            <a:avLst/>
+          </a:prstGeom>
+          <a:noFill/>
+          <a:ln/>
+        </p:spPr>
+        <p:txBody>
+          <a:bodyPr wrap="square" lIns="0" tIns="0" rIns="0" bIns="0" rtlCol="0" anchor="ctr"/>
+          <a:lstStyle/>
+          <a:p>
+            <a:pPr indent="0" marL="0">
+              <a:buNone/>
+            </a:pPr>
+            <a:r>
+              <a:rPr lang="en-US" sz="1600" b="1" dirty="0">
+                <a:solidFill>
+                  <a:srgbClr val="CB6015"/>
+                </a:solidFill>
+                <a:latin typeface="Spoqa Han Sans Neo" pitchFamily="34" charset="0"/>
+                <a:ea typeface="Spoqa Han Sans Neo" pitchFamily="34" charset="-122"/>
+                <a:cs typeface="Spoqa Han Sans Neo" pitchFamily="34" charset="-120"/>
+              </a:rPr>
+              <a:t>매수자는 PER로 말한다</a:t>
+            </a:r>
+            <a:endParaRPr lang="en-US" sz="1600" dirty="0"/>
+          </a:p>
+        </p:txBody>
+      </p:sp>
+      <p:sp>
+        <p:nvSpPr>
+          <p:cNvPr id="7" name="Text 5"/>
+          <p:cNvSpPr/>
+          <p:nvPr/>
+        </p:nvSpPr>
+        <p:spPr>
+          <a:xfrm>
+            <a:off x="777240" y="2423160"/>
+            <a:ext cx="4937760" cy="1737360"/>
           </a:xfrm>
           <a:prstGeom prst="rect">
             <a:avLst/>
@@ -7079,12 +8077,12 @@
           <a:p>
             <a:pPr indent="0" marL="0">
               <a:lnSpc>
-                <a:spcPts val="1400"/>
+                <a:spcPts val="1900"/>
               </a:lnSpc>
               <a:buNone/>
             </a:pPr>
             <a:r>
-              <a:rPr lang="en-US" sz="1150" dirty="0">
+              <a:rPr lang="en-US" sz="1300" dirty="0">
                 <a:solidFill>
                   <a:srgbClr val="3D3D3D"/>
                 </a:solidFill>
@@ -7092,53 +8090,121 @@
                 <a:ea typeface="Spoqa Han Sans Neo" pitchFamily="34" charset="-122"/>
                 <a:cs typeface="Spoqa Han Sans Neo" pitchFamily="34" charset="-120"/>
               </a:rPr>
-              <a:t>동일 전력 대비</a:t>
-            </a:r>
-            <a:endParaRPr lang="en-US" sz="1150" dirty="0"/>
-          </a:p>
-          <a:p>
-            <a:pPr indent="0" marL="0">
-              <a:lnSpc>
-                <a:spcPts val="1400"/>
-              </a:lnSpc>
-              <a:buNone/>
-            </a:pPr>
-            <a:r>
-              <a:rPr lang="en-US" sz="1150" dirty="0">
-                <a:solidFill>
-                  <a:srgbClr val="3D3D3D"/>
-                </a:solidFill>
-                <a:latin typeface="Spoqa Han Sans Neo" pitchFamily="34" charset="0"/>
-                <a:ea typeface="Spoqa Han Sans Neo" pitchFamily="34" charset="-122"/>
-                <a:cs typeface="Spoqa Han Sans Neo" pitchFamily="34" charset="-120"/>
-              </a:rPr>
-              <a:t>더 높은 연산 성능</a:t>
-            </a:r>
-            <a:endParaRPr lang="en-US" sz="1150" dirty="0"/>
-          </a:p>
-        </p:txBody>
-      </p:sp>
-      <p:sp>
-        <p:nvSpPr>
-          <p:cNvPr id="10" name="Shape 8"/>
-          <p:cNvSpPr/>
-          <p:nvPr/>
-        </p:nvSpPr>
-        <p:spPr>
-          <a:xfrm>
-            <a:off x="3319272" y="2880360"/>
-            <a:ext cx="2697480" cy="1828800"/>
+              <a:t>이익 성장 스토리에 주목 — HBM4·서버 DRAM의 이익 레벨 업, 사이클 상승 지속을 근거로 밸류에이션을 정당화.</a:t>
+            </a:r>
+            <a:endParaRPr lang="en-US" sz="1300" dirty="0"/>
+          </a:p>
+        </p:txBody>
+      </p:sp>
+      <p:sp>
+        <p:nvSpPr>
+          <p:cNvPr id="8" name="Shape 6"/>
+          <p:cNvSpPr/>
+          <p:nvPr/>
+        </p:nvSpPr>
+        <p:spPr>
+          <a:xfrm>
+            <a:off x="6199632" y="1828800"/>
+            <a:ext cx="5486400" cy="2468880"/>
           </a:xfrm>
           <a:prstGeom prst="roundRect">
             <a:avLst>
-              <a:gd name="adj" fmla="val 2000"/>
+              <a:gd name="adj" fmla="val 1481"/>
             </a:avLst>
           </a:prstGeom>
           <a:solidFill>
-            <a:srgbClr val="FFFFFF"/>
+            <a:srgbClr val="043B72">
+              <a:alpha val="10000"/>
+            </a:srgbClr>
           </a:solidFill>
-          <a:ln/>
-        </p:spPr>
+          <a:ln w="15875">
+            <a:solidFill>
+              <a:srgbClr val="043B72"/>
+            </a:solidFill>
+            <a:prstDash val="solid"/>
+          </a:ln>
+        </p:spPr>
+      </p:sp>
+      <p:sp>
+        <p:nvSpPr>
+          <p:cNvPr id="9" name="Text 7"/>
+          <p:cNvSpPr/>
+          <p:nvPr/>
+        </p:nvSpPr>
+        <p:spPr>
+          <a:xfrm>
+            <a:off x="6473952" y="2011680"/>
+            <a:ext cx="4937760" cy="365760"/>
+          </a:xfrm>
+          <a:prstGeom prst="rect">
+            <a:avLst/>
+          </a:prstGeom>
+          <a:noFill/>
+          <a:ln/>
+        </p:spPr>
+        <p:txBody>
+          <a:bodyPr wrap="square" lIns="0" tIns="0" rIns="0" bIns="0" rtlCol="0" anchor="ctr"/>
+          <a:lstStyle/>
+          <a:p>
+            <a:pPr indent="0" marL="0">
+              <a:buNone/>
+            </a:pPr>
+            <a:r>
+              <a:rPr lang="en-US" sz="1600" b="1" dirty="0">
+                <a:solidFill>
+                  <a:srgbClr val="043B72"/>
+                </a:solidFill>
+                <a:latin typeface="Spoqa Han Sans Neo" pitchFamily="34" charset="0"/>
+                <a:ea typeface="Spoqa Han Sans Neo" pitchFamily="34" charset="-122"/>
+                <a:cs typeface="Spoqa Han Sans Neo" pitchFamily="34" charset="-120"/>
+              </a:rPr>
+              <a:t>매도자는 PBR로 말한다</a:t>
+            </a:r>
+            <a:endParaRPr lang="en-US" sz="1600" dirty="0"/>
+          </a:p>
+        </p:txBody>
+      </p:sp>
+      <p:sp>
+        <p:nvSpPr>
+          <p:cNvPr id="10" name="Text 8"/>
+          <p:cNvSpPr/>
+          <p:nvPr/>
+        </p:nvSpPr>
+        <p:spPr>
+          <a:xfrm>
+            <a:off x="6473952" y="2423160"/>
+            <a:ext cx="4937760" cy="1737360"/>
+          </a:xfrm>
+          <a:prstGeom prst="rect">
+            <a:avLst/>
+          </a:prstGeom>
+          <a:noFill/>
+          <a:ln/>
+        </p:spPr>
+        <p:txBody>
+          <a:bodyPr wrap="square" lIns="0" tIns="0" rIns="0" bIns="0" rtlCol="0" anchor="ctr"/>
+          <a:lstStyle/>
+          <a:p>
+            <a:pPr indent="0" marL="0">
+              <a:lnSpc>
+                <a:spcPts val="1900"/>
+              </a:lnSpc>
+              <a:buNone/>
+            </a:pPr>
+            <a:r>
+              <a:rPr lang="en-US" sz="1300" dirty="0">
+                <a:solidFill>
+                  <a:srgbClr val="3D3D3D"/>
+                </a:solidFill>
+                <a:latin typeface="Spoqa Han Sans Neo" pitchFamily="34" charset="0"/>
+                <a:ea typeface="Spoqa Han Sans Neo" pitchFamily="34" charset="-122"/>
+                <a:cs typeface="Spoqa Han Sans Neo" pitchFamily="34" charset="-120"/>
+              </a:rPr>
+              <a:t>자산가치·사이클 고점 부담에 주목 — 이익의 정점 통과 가능성, 다운사이클 재현 리스크를 근거로 눈높이를 낮춤.</a:t>
+            </a:r>
+            <a:endParaRPr lang="en-US" sz="1300" dirty="0"/>
+          </a:p>
+        </p:txBody>
       </p:sp>
       <p:sp>
         <p:nvSpPr>
@@ -7148,210 +8214,69 @@
         </p:nvSpPr>
         <p:spPr>
           <a:xfrm>
-            <a:off x="3547872" y="3108960"/>
-            <a:ext cx="457200" cy="457200"/>
-          </a:xfrm>
-          <a:prstGeom prst="ellipse">
-            <a:avLst/>
-          </a:prstGeom>
-          <a:solidFill>
-            <a:srgbClr val="F58220"/>
-          </a:solidFill>
-          <a:ln/>
-        </p:spPr>
-      </p:sp>
-      <p:sp>
-        <p:nvSpPr>
-          <p:cNvPr id="12" name="Text 10"/>
-          <p:cNvSpPr/>
-          <p:nvPr/>
-        </p:nvSpPr>
-        <p:spPr>
-          <a:xfrm>
-            <a:off x="3547872" y="3657600"/>
-            <a:ext cx="2286000" cy="365760"/>
-          </a:xfrm>
-          <a:prstGeom prst="rect">
-            <a:avLst/>
-          </a:prstGeom>
-          <a:noFill/>
-          <a:ln/>
-        </p:spPr>
-        <p:txBody>
-          <a:bodyPr wrap="square" lIns="0" tIns="0" rIns="0" bIns="0" rtlCol="0" anchor="ctr"/>
-          <a:lstStyle/>
-          <a:p>
-            <a:pPr indent="0" marL="0">
-              <a:buNone/>
-            </a:pPr>
-            <a:r>
-              <a:rPr lang="en-US" sz="1500" b="1" dirty="0">
-                <a:solidFill>
-                  <a:srgbClr val="043B72"/>
-                </a:solidFill>
-                <a:latin typeface="Spoqa Han Sans Neo" pitchFamily="34" charset="0"/>
-                <a:ea typeface="Spoqa Han Sans Neo" pitchFamily="34" charset="-122"/>
-                <a:cs typeface="Spoqa Han Sans Neo" pitchFamily="34" charset="-120"/>
-              </a:rPr>
-              <a:t>전력 효율</a:t>
-            </a:r>
-            <a:endParaRPr lang="en-US" sz="1500" dirty="0"/>
-          </a:p>
-        </p:txBody>
-      </p:sp>
-      <p:sp>
-        <p:nvSpPr>
-          <p:cNvPr id="13" name="Text 11"/>
-          <p:cNvSpPr/>
-          <p:nvPr/>
-        </p:nvSpPr>
-        <p:spPr>
-          <a:xfrm>
-            <a:off x="3547872" y="4023360"/>
-            <a:ext cx="2286000" cy="640080"/>
-          </a:xfrm>
-          <a:prstGeom prst="rect">
-            <a:avLst/>
-          </a:prstGeom>
-          <a:noFill/>
-          <a:ln/>
-        </p:spPr>
-        <p:txBody>
-          <a:bodyPr wrap="square" lIns="0" tIns="0" rIns="0" bIns="0" rtlCol="0" anchor="ctr"/>
-          <a:lstStyle/>
-          <a:p>
-            <a:pPr indent="0" marL="0">
-              <a:lnSpc>
-                <a:spcPts val="1400"/>
-              </a:lnSpc>
-              <a:buNone/>
-            </a:pPr>
-            <a:r>
-              <a:rPr lang="en-US" sz="1150" dirty="0">
-                <a:solidFill>
-                  <a:srgbClr val="3D3D3D"/>
-                </a:solidFill>
-                <a:latin typeface="Spoqa Han Sans Neo" pitchFamily="34" charset="0"/>
-                <a:ea typeface="Spoqa Han Sans Neo" pitchFamily="34" charset="-122"/>
-                <a:cs typeface="Spoqa Han Sans Neo" pitchFamily="34" charset="-120"/>
-              </a:rPr>
-              <a:t>AI 시스템의 전력·</a:t>
-            </a:r>
-            <a:endParaRPr lang="en-US" sz="1150" dirty="0"/>
-          </a:p>
-          <a:p>
-            <a:pPr indent="0" marL="0">
-              <a:lnSpc>
-                <a:spcPts val="1400"/>
-              </a:lnSpc>
-              <a:buNone/>
-            </a:pPr>
-            <a:r>
-              <a:rPr lang="en-US" sz="1150" dirty="0">
-                <a:solidFill>
-                  <a:srgbClr val="3D3D3D"/>
-                </a:solidFill>
-                <a:latin typeface="Spoqa Han Sans Neo" pitchFamily="34" charset="0"/>
-                <a:ea typeface="Spoqa Han Sans Neo" pitchFamily="34" charset="-122"/>
-                <a:cs typeface="Spoqa Han Sans Neo" pitchFamily="34" charset="-120"/>
-              </a:rPr>
-              <a:t>비용을 낮추는 기술</a:t>
-            </a:r>
-            <a:endParaRPr lang="en-US" sz="1150" dirty="0"/>
-          </a:p>
-        </p:txBody>
-      </p:sp>
-      <p:sp>
-        <p:nvSpPr>
-          <p:cNvPr id="14" name="Shape 12"/>
-          <p:cNvSpPr/>
-          <p:nvPr/>
-        </p:nvSpPr>
-        <p:spPr>
-          <a:xfrm>
-            <a:off x="6135624" y="2880360"/>
-            <a:ext cx="2697480" cy="1828800"/>
+            <a:off x="502920" y="4526280"/>
+            <a:ext cx="11183112" cy="1371600"/>
           </a:xfrm>
           <a:prstGeom prst="roundRect">
             <a:avLst>
-              <a:gd name="adj" fmla="val 2000"/>
+              <a:gd name="adj" fmla="val 2667"/>
             </a:avLst>
           </a:prstGeom>
           <a:solidFill>
-            <a:srgbClr val="FFFFFF"/>
+            <a:srgbClr val="ECEFF4"/>
           </a:solidFill>
           <a:ln/>
         </p:spPr>
       </p:sp>
       <p:sp>
         <p:nvSpPr>
-          <p:cNvPr id="15" name="Shape 13"/>
-          <p:cNvSpPr/>
-          <p:nvPr/>
-        </p:nvSpPr>
-        <p:spPr>
-          <a:xfrm>
-            <a:off x="6364224" y="3108960"/>
-            <a:ext cx="457200" cy="457200"/>
-          </a:xfrm>
-          <a:prstGeom prst="ellipse">
-            <a:avLst/>
-          </a:prstGeom>
-          <a:solidFill>
-            <a:srgbClr val="F58220"/>
-          </a:solidFill>
-          <a:ln/>
-        </p:spPr>
-      </p:sp>
-      <p:sp>
-        <p:nvSpPr>
-          <p:cNvPr id="16" name="Text 14"/>
-          <p:cNvSpPr/>
-          <p:nvPr/>
-        </p:nvSpPr>
-        <p:spPr>
-          <a:xfrm>
-            <a:off x="6364224" y="3657600"/>
-            <a:ext cx="2286000" cy="365760"/>
-          </a:xfrm>
-          <a:prstGeom prst="rect">
-            <a:avLst/>
-          </a:prstGeom>
-          <a:noFill/>
-          <a:ln/>
-        </p:spPr>
-        <p:txBody>
-          <a:bodyPr wrap="square" lIns="0" tIns="0" rIns="0" bIns="0" rtlCol="0" anchor="ctr"/>
-          <a:lstStyle/>
-          <a:p>
-            <a:pPr indent="0" marL="0">
-              <a:buNone/>
-            </a:pPr>
-            <a:r>
-              <a:rPr lang="en-US" sz="1500" b="1" dirty="0">
-                <a:solidFill>
-                  <a:srgbClr val="043B72"/>
-                </a:solidFill>
-                <a:latin typeface="Spoqa Han Sans Neo" pitchFamily="34" charset="0"/>
-                <a:ea typeface="Spoqa Han Sans Neo" pitchFamily="34" charset="-122"/>
-                <a:cs typeface="Spoqa Han Sans Neo" pitchFamily="34" charset="-120"/>
-              </a:rPr>
-              <a:t>공정 미세화</a:t>
-            </a:r>
-            <a:endParaRPr lang="en-US" sz="1500" dirty="0"/>
-          </a:p>
-        </p:txBody>
-      </p:sp>
-      <p:sp>
-        <p:nvSpPr>
-          <p:cNvPr id="17" name="Text 15"/>
-          <p:cNvSpPr/>
-          <p:nvPr/>
-        </p:nvSpPr>
-        <p:spPr>
-          <a:xfrm>
-            <a:off x="6364224" y="4023360"/>
-            <a:ext cx="2286000" cy="640080"/>
+          <p:cNvPr id="12" name="Text 10"/>
+          <p:cNvSpPr/>
+          <p:nvPr/>
+        </p:nvSpPr>
+        <p:spPr>
+          <a:xfrm>
+            <a:off x="777240" y="4663440"/>
+            <a:ext cx="10515600" cy="320040"/>
+          </a:xfrm>
+          <a:prstGeom prst="rect">
+            <a:avLst/>
+          </a:prstGeom>
+          <a:noFill/>
+          <a:ln/>
+        </p:spPr>
+        <p:txBody>
+          <a:bodyPr wrap="square" lIns="0" tIns="0" rIns="0" bIns="0" rtlCol="0" anchor="ctr"/>
+          <a:lstStyle/>
+          <a:p>
+            <a:pPr indent="0" marL="0">
+              <a:buNone/>
+            </a:pPr>
+            <a:r>
+              <a:rPr lang="en-US" sz="1400" b="1" dirty="0">
+                <a:solidFill>
+                  <a:srgbClr val="1A1A1A"/>
+                </a:solidFill>
+                <a:latin typeface="Spoqa Han Sans Neo" pitchFamily="34" charset="0"/>
+                <a:ea typeface="Spoqa Han Sans Neo" pitchFamily="34" charset="-122"/>
+                <a:cs typeface="Spoqa Han Sans Neo" pitchFamily="34" charset="-120"/>
+              </a:rPr>
+              <a:t>수급 경고 — 단일종목 레버리지 ETF의 변동성 감가(Volatility Decay)</a:t>
+            </a:r>
+            <a:endParaRPr lang="en-US" sz="1400" dirty="0"/>
+          </a:p>
+        </p:txBody>
+      </p:sp>
+      <p:sp>
+        <p:nvSpPr>
+          <p:cNvPr id="13" name="Text 11"/>
+          <p:cNvSpPr/>
+          <p:nvPr/>
+        </p:nvSpPr>
+        <p:spPr>
+          <a:xfrm>
+            <a:off x="777240" y="5029200"/>
+            <a:ext cx="10515600" cy="777240"/>
           </a:xfrm>
           <a:prstGeom prst="rect">
             <a:avLst/>
@@ -7365,12 +8290,12 @@
           <a:p>
             <a:pPr indent="0" marL="0">
               <a:lnSpc>
-                <a:spcPts val="1400"/>
+                <a:spcPts val="1700"/>
               </a:lnSpc>
               <a:buNone/>
             </a:pPr>
             <a:r>
-              <a:rPr lang="en-US" sz="1150" dirty="0">
+              <a:rPr lang="en-US" sz="1250" dirty="0">
                 <a:solidFill>
                   <a:srgbClr val="3D3D3D"/>
                 </a:solidFill>
@@ -7378,242 +8303,54 @@
                 <a:ea typeface="Spoqa Han Sans Neo" pitchFamily="34" charset="-122"/>
                 <a:cs typeface="Spoqa Han Sans Neo" pitchFamily="34" charset="-120"/>
               </a:rPr>
-              <a:t>높은 수율의</a:t>
-            </a:r>
-            <a:endParaRPr lang="en-US" sz="1150" dirty="0"/>
-          </a:p>
-          <a:p>
-            <a:pPr indent="0" marL="0">
-              <a:lnSpc>
-                <a:spcPts val="1400"/>
-              </a:lnSpc>
-              <a:buNone/>
-            </a:pPr>
-            <a:r>
-              <a:rPr lang="en-US" sz="1150" dirty="0">
-                <a:solidFill>
-                  <a:srgbClr val="3D3D3D"/>
-                </a:solidFill>
-                <a:latin typeface="Spoqa Han Sans Neo" pitchFamily="34" charset="0"/>
-                <a:ea typeface="Spoqa Han Sans Neo" pitchFamily="34" charset="-122"/>
-                <a:cs typeface="Spoqa Han Sans Neo" pitchFamily="34" charset="-120"/>
-              </a:rPr>
-              <a:t>첨단 공정 로드맵</a:t>
-            </a:r>
-            <a:endParaRPr lang="en-US" sz="1150" dirty="0"/>
-          </a:p>
-        </p:txBody>
-      </p:sp>
-      <p:sp>
-        <p:nvSpPr>
-          <p:cNvPr id="18" name="Shape 16"/>
-          <p:cNvSpPr/>
-          <p:nvPr/>
-        </p:nvSpPr>
-        <p:spPr>
-          <a:xfrm>
-            <a:off x="8951976" y="2880360"/>
-            <a:ext cx="2697480" cy="1828800"/>
-          </a:xfrm>
-          <a:prstGeom prst="roundRect">
-            <a:avLst>
-              <a:gd name="adj" fmla="val 2000"/>
-            </a:avLst>
-          </a:prstGeom>
-          <a:solidFill>
-            <a:srgbClr val="FFFFFF"/>
-          </a:solidFill>
-          <a:ln/>
-        </p:spPr>
-      </p:sp>
-      <p:sp>
-        <p:nvSpPr>
-          <p:cNvPr id="19" name="Shape 17"/>
-          <p:cNvSpPr/>
-          <p:nvPr/>
-        </p:nvSpPr>
-        <p:spPr>
-          <a:xfrm>
-            <a:off x="9180576" y="3108960"/>
-            <a:ext cx="457200" cy="457200"/>
-          </a:xfrm>
-          <a:prstGeom prst="ellipse">
-            <a:avLst/>
-          </a:prstGeom>
-          <a:solidFill>
-            <a:srgbClr val="F58220"/>
-          </a:solidFill>
-          <a:ln/>
-        </p:spPr>
-      </p:sp>
-      <p:sp>
-        <p:nvSpPr>
-          <p:cNvPr id="20" name="Text 18"/>
-          <p:cNvSpPr/>
-          <p:nvPr/>
-        </p:nvSpPr>
-        <p:spPr>
-          <a:xfrm>
-            <a:off x="9180576" y="3657600"/>
-            <a:ext cx="2286000" cy="365760"/>
-          </a:xfrm>
-          <a:prstGeom prst="rect">
-            <a:avLst/>
-          </a:prstGeom>
-          <a:noFill/>
-          <a:ln/>
-        </p:spPr>
-        <p:txBody>
-          <a:bodyPr wrap="square" lIns="0" tIns="0" rIns="0" bIns="0" rtlCol="0" anchor="ctr"/>
-          <a:lstStyle/>
-          <a:p>
-            <a:pPr indent="0" marL="0">
-              <a:buNone/>
-            </a:pPr>
-            <a:r>
-              <a:rPr lang="en-US" sz="1500" b="1" dirty="0">
-                <a:solidFill>
-                  <a:srgbClr val="043B72"/>
-                </a:solidFill>
-                <a:latin typeface="Spoqa Han Sans Neo" pitchFamily="34" charset="0"/>
-                <a:ea typeface="Spoqa Han Sans Neo" pitchFamily="34" charset="-122"/>
-                <a:cs typeface="Spoqa Han Sans Neo" pitchFamily="34" charset="-120"/>
-              </a:rPr>
-              <a:t>첨단 패키징</a:t>
-            </a:r>
-            <a:endParaRPr lang="en-US" sz="1500" dirty="0"/>
-          </a:p>
-        </p:txBody>
-      </p:sp>
-      <p:sp>
-        <p:nvSpPr>
-          <p:cNvPr id="21" name="Text 19"/>
-          <p:cNvSpPr/>
-          <p:nvPr/>
-        </p:nvSpPr>
-        <p:spPr>
-          <a:xfrm>
-            <a:off x="9180576" y="4023360"/>
-            <a:ext cx="2286000" cy="640080"/>
-          </a:xfrm>
-          <a:prstGeom prst="rect">
-            <a:avLst/>
-          </a:prstGeom>
-          <a:noFill/>
-          <a:ln/>
-        </p:spPr>
-        <p:txBody>
-          <a:bodyPr wrap="square" lIns="0" tIns="0" rIns="0" bIns="0" rtlCol="0" anchor="ctr"/>
-          <a:lstStyle/>
-          <a:p>
-            <a:pPr indent="0" marL="0">
-              <a:lnSpc>
-                <a:spcPts val="1400"/>
-              </a:lnSpc>
-              <a:buNone/>
-            </a:pPr>
-            <a:r>
-              <a:rPr lang="en-US" sz="1150" dirty="0">
-                <a:solidFill>
-                  <a:srgbClr val="3D3D3D"/>
-                </a:solidFill>
-                <a:latin typeface="Spoqa Han Sans Neo" pitchFamily="34" charset="0"/>
-                <a:ea typeface="Spoqa Han Sans Neo" pitchFamily="34" charset="-122"/>
-                <a:cs typeface="Spoqa Han Sans Neo" pitchFamily="34" charset="-120"/>
-              </a:rPr>
-              <a:t>이종집적·2.5D/3D</a:t>
-            </a:r>
-            <a:endParaRPr lang="en-US" sz="1150" dirty="0"/>
-          </a:p>
-          <a:p>
-            <a:pPr indent="0" marL="0">
-              <a:lnSpc>
-                <a:spcPts val="1400"/>
-              </a:lnSpc>
-              <a:buNone/>
-            </a:pPr>
-            <a:r>
-              <a:rPr lang="en-US" sz="1150" dirty="0">
-                <a:solidFill>
-                  <a:srgbClr val="3D3D3D"/>
-                </a:solidFill>
-                <a:latin typeface="Spoqa Han Sans Neo" pitchFamily="34" charset="0"/>
-                <a:ea typeface="Spoqa Han Sans Neo" pitchFamily="34" charset="-122"/>
-                <a:cs typeface="Spoqa Han Sans Neo" pitchFamily="34" charset="-120"/>
-              </a:rPr>
-              <a:t>장비와 소재</a:t>
-            </a:r>
-            <a:endParaRPr lang="en-US" sz="1150" dirty="0"/>
-          </a:p>
-        </p:txBody>
-      </p:sp>
-      <p:sp>
-        <p:nvSpPr>
-          <p:cNvPr id="22" name="Shape 20"/>
-          <p:cNvSpPr/>
-          <p:nvPr/>
-        </p:nvSpPr>
-        <p:spPr>
-          <a:xfrm>
-            <a:off x="502920" y="4983480"/>
-            <a:ext cx="11183112" cy="960120"/>
-          </a:xfrm>
-          <a:prstGeom prst="roundRect">
-            <a:avLst>
-              <a:gd name="adj" fmla="val 3810"/>
-            </a:avLst>
-          </a:prstGeom>
-          <a:solidFill>
-            <a:srgbClr val="F58220"/>
-          </a:solidFill>
-          <a:ln/>
-        </p:spPr>
-      </p:sp>
-      <p:sp>
-        <p:nvSpPr>
-          <p:cNvPr id="23" name="Text 21"/>
-          <p:cNvSpPr/>
-          <p:nvPr/>
-        </p:nvSpPr>
-        <p:spPr>
-          <a:xfrm>
-            <a:off x="777240" y="4983480"/>
-            <a:ext cx="10607040" cy="960120"/>
-          </a:xfrm>
-          <a:prstGeom prst="rect">
-            <a:avLst/>
-          </a:prstGeom>
-          <a:noFill/>
-          <a:ln/>
-        </p:spPr>
-        <p:txBody>
-          <a:bodyPr wrap="square" lIns="0" tIns="0" rIns="0" bIns="0" rtlCol="0" anchor="ctr"/>
-          <a:lstStyle/>
-          <a:p>
-            <a:pPr indent="0" marL="0">
-              <a:lnSpc>
-                <a:spcPts val="2000"/>
-              </a:lnSpc>
-              <a:buNone/>
-            </a:pPr>
-            <a:r>
-              <a:rPr lang="en-US" sz="1500" b="1" dirty="0">
-                <a:solidFill>
-                  <a:srgbClr val="FFFFFF"/>
-                </a:solidFill>
-                <a:latin typeface="Spoqa Han Sans Neo" pitchFamily="34" charset="0"/>
-                <a:ea typeface="Spoqa Han Sans Neo" pitchFamily="34" charset="-122"/>
-                <a:cs typeface="Spoqa Han Sans Neo" pitchFamily="34" charset="-120"/>
-              </a:rPr>
-              <a:t>단기 투자 사이클은 변할 수 있지만, 성능·전력효율·미세화·첨단패키징이라는 기술 로드맵의 방향은 쉽게 바뀌지 않는다.</a:t>
-            </a:r>
-            <a:endParaRPr lang="en-US" sz="1500" dirty="0"/>
-          </a:p>
-        </p:txBody>
-      </p:sp>
-      <p:sp>
-        <p:nvSpPr>
-          <p:cNvPr id="24" name="Text 22"/>
+              <a:t>레버리지 ETF는 상승 시 추가 매수·하락 시 추가 매도하는 구조 → 시장 변동성을 증폭. 특정 국가·특정 메모리 비중이 과도하다면, PER과 PBR 두 관점을 균형 있게 점검할 필요.</a:t>
+            </a:r>
+            <a:endParaRPr lang="en-US" sz="1250" dirty="0"/>
+          </a:p>
+        </p:txBody>
+      </p:sp>
+      <p:sp>
+        <p:nvSpPr>
+          <p:cNvPr id="14" name="Text 12"/>
+          <p:cNvSpPr/>
+          <p:nvPr/>
+        </p:nvSpPr>
+        <p:spPr>
+          <a:xfrm>
+            <a:off x="502920" y="6355080"/>
+            <a:ext cx="10607040" cy="320040"/>
+          </a:xfrm>
+          <a:prstGeom prst="rect">
+            <a:avLst/>
+          </a:prstGeom>
+          <a:noFill/>
+          <a:ln/>
+        </p:spPr>
+        <p:txBody>
+          <a:bodyPr wrap="square" lIns="0" tIns="0" rIns="0" bIns="0" rtlCol="0" anchor="ctr"/>
+          <a:lstStyle/>
+          <a:p>
+            <a:pPr algn="l" indent="0" marL="0">
+              <a:buNone/>
+            </a:pPr>
+            <a:r>
+              <a:rPr lang="en-US" sz="850" dirty="0">
+                <a:solidFill>
+                  <a:srgbClr val="6C6C6C"/>
+                </a:solidFill>
+                <a:latin typeface="Spoqa Han Sans Neo" pitchFamily="34" charset="0"/>
+                <a:ea typeface="Spoqa Han Sans Neo" pitchFamily="34" charset="-122"/>
+                <a:cs typeface="Spoqa Han Sans Neo" pitchFamily="34" charset="-120"/>
+              </a:rPr>
+              <a:t>자료: 첨부 K-Freedom Insights 'PER과 심리학', '레버리지 ETF 변동성 감가'.</a:t>
+            </a:r>
+            <a:endParaRPr lang="en-US" sz="850" dirty="0"/>
+          </a:p>
+        </p:txBody>
+      </p:sp>
+      <p:sp>
+        <p:nvSpPr>
+          <p:cNvPr id="15" name="Text 13"/>
           <p:cNvSpPr/>
           <p:nvPr/>
         </p:nvSpPr>
@@ -7735,7 +8472,7 @@
                 <a:ea typeface="Spoqa Han Sans Neo" pitchFamily="34" charset="-122"/>
                 <a:cs typeface="Spoqa Han Sans Neo" pitchFamily="34" charset="-120"/>
               </a:rPr>
-              <a:t>SUMMARY</a:t>
+              <a:t>PART 05 · 기준</a:t>
             </a:r>
             <a:endParaRPr lang="en-US" sz="1200" dirty="0"/>
           </a:p>
@@ -7774,7 +8511,7 @@
                 <a:ea typeface="Spoqa Han Sans Neo" pitchFamily="34" charset="-122"/>
                 <a:cs typeface="Spoqa Han Sans Neo" pitchFamily="34" charset="-120"/>
               </a:rPr>
-              <a:t>요약 &amp; 실적 시즌 관전 포인트</a:t>
+              <a:t>투자 기준의 재점검: 통제의 경계선</a:t>
             </a:r>
             <a:endParaRPr lang="en-US" sz="2700" dirty="0"/>
           </a:p>
@@ -7782,622 +8519,388 @@
       </p:sp>
       <p:sp>
         <p:nvSpPr>
-          <p:cNvPr id="5" name="Text 3"/>
-          <p:cNvSpPr/>
-          <p:nvPr/>
-        </p:nvSpPr>
-        <p:spPr>
-          <a:xfrm>
-            <a:off x="502920" y="1783080"/>
-            <a:ext cx="5486400" cy="320040"/>
-          </a:xfrm>
-          <a:prstGeom prst="rect">
-            <a:avLst/>
-          </a:prstGeom>
-          <a:noFill/>
-          <a:ln/>
-        </p:spPr>
-        <p:txBody>
-          <a:bodyPr wrap="square" lIns="0" tIns="0" rIns="0" bIns="0" rtlCol="0" anchor="ctr"/>
-          <a:lstStyle/>
-          <a:p>
-            <a:pPr indent="0" marL="0">
-              <a:buNone/>
-            </a:pPr>
-            <a:r>
-              <a:rPr lang="en-US" sz="1400" b="1" dirty="0">
-                <a:solidFill>
-                  <a:srgbClr val="043B72"/>
-                </a:solidFill>
-                <a:latin typeface="Spoqa Han Sans Neo" pitchFamily="34" charset="0"/>
-                <a:ea typeface="Spoqa Han Sans Neo" pitchFamily="34" charset="-122"/>
-                <a:cs typeface="Spoqa Han Sans Neo" pitchFamily="34" charset="-120"/>
-              </a:rPr>
-              <a:t>오늘의 5가지 메시지</a:t>
-            </a:r>
-            <a:endParaRPr lang="en-US" sz="1400" dirty="0"/>
-          </a:p>
-        </p:txBody>
-      </p:sp>
-      <p:sp>
-        <p:nvSpPr>
-          <p:cNvPr id="6" name="Shape 4"/>
-          <p:cNvSpPr/>
-          <p:nvPr/>
-        </p:nvSpPr>
-        <p:spPr>
-          <a:xfrm>
-            <a:off x="502920" y="2286000"/>
-            <a:ext cx="384048" cy="384048"/>
-          </a:xfrm>
-          <a:prstGeom prst="ellipse">
-            <a:avLst/>
-          </a:prstGeom>
-          <a:solidFill>
-            <a:srgbClr val="F58220"/>
-          </a:solidFill>
-          <a:ln/>
-        </p:spPr>
-      </p:sp>
-      <p:sp>
-        <p:nvSpPr>
-          <p:cNvPr id="7" name="Text 5"/>
-          <p:cNvSpPr/>
-          <p:nvPr/>
-        </p:nvSpPr>
-        <p:spPr>
-          <a:xfrm>
-            <a:off x="502920" y="2286000"/>
-            <a:ext cx="384048" cy="384048"/>
-          </a:xfrm>
-          <a:prstGeom prst="rect">
-            <a:avLst/>
-          </a:prstGeom>
-          <a:noFill/>
-          <a:ln/>
-        </p:spPr>
-        <p:txBody>
-          <a:bodyPr wrap="square" lIns="0" tIns="0" rIns="0" bIns="0" rtlCol="0" anchor="ctr"/>
-          <a:lstStyle/>
-          <a:p>
-            <a:pPr algn="ctr" indent="0" marL="0">
-              <a:buNone/>
-            </a:pPr>
-            <a:r>
-              <a:rPr lang="en-US" sz="1400" b="1" dirty="0">
-                <a:solidFill>
-                  <a:srgbClr val="FFFFFF"/>
-                </a:solidFill>
-                <a:latin typeface="Spoqa Han Sans Neo" pitchFamily="34" charset="0"/>
-                <a:ea typeface="Spoqa Han Sans Neo" pitchFamily="34" charset="-122"/>
-                <a:cs typeface="Spoqa Han Sans Neo" pitchFamily="34" charset="-120"/>
-              </a:rPr>
-              <a:t>1</a:t>
-            </a:r>
-            <a:endParaRPr lang="en-US" sz="1400" dirty="0"/>
-          </a:p>
-        </p:txBody>
-      </p:sp>
-      <p:sp>
-        <p:nvSpPr>
-          <p:cNvPr id="8" name="Text 6"/>
-          <p:cNvSpPr/>
-          <p:nvPr/>
-        </p:nvSpPr>
-        <p:spPr>
-          <a:xfrm>
-            <a:off x="1051560" y="2212848"/>
-            <a:ext cx="4892040" cy="603504"/>
-          </a:xfrm>
-          <a:prstGeom prst="rect">
-            <a:avLst/>
-          </a:prstGeom>
-          <a:noFill/>
-          <a:ln/>
-        </p:spPr>
-        <p:txBody>
-          <a:bodyPr wrap="square" lIns="0" tIns="0" rIns="0" bIns="0" rtlCol="0" anchor="ctr"/>
-          <a:lstStyle/>
-          <a:p>
-            <a:pPr indent="0" marL="0">
-              <a:lnSpc>
-                <a:spcPts val="1500"/>
-              </a:lnSpc>
-              <a:buNone/>
-            </a:pPr>
-            <a:r>
-              <a:rPr lang="en-US" sz="1200" dirty="0">
-                <a:solidFill>
-                  <a:srgbClr val="3D3D3D"/>
-                </a:solidFill>
-                <a:latin typeface="Spoqa Han Sans Neo" pitchFamily="34" charset="0"/>
-                <a:ea typeface="Spoqa Han Sans Neo" pitchFamily="34" charset="-122"/>
-                <a:cs typeface="Spoqa Han Sans Neo" pitchFamily="34" charset="-120"/>
-              </a:rPr>
-              <a:t>조정의 방아쇠는 키미 K3발 'AI 효율화' 우려 — 딥시크와 같은 논리.</a:t>
-            </a:r>
-            <a:endParaRPr lang="en-US" sz="1200" dirty="0"/>
-          </a:p>
-        </p:txBody>
-      </p:sp>
-      <p:sp>
-        <p:nvSpPr>
-          <p:cNvPr id="9" name="Shape 7"/>
-          <p:cNvSpPr/>
-          <p:nvPr/>
-        </p:nvSpPr>
-        <p:spPr>
-          <a:xfrm>
-            <a:off x="502920" y="2953512"/>
-            <a:ext cx="384048" cy="384048"/>
-          </a:xfrm>
-          <a:prstGeom prst="ellipse">
-            <a:avLst/>
-          </a:prstGeom>
-          <a:solidFill>
-            <a:srgbClr val="F58220"/>
-          </a:solidFill>
-          <a:ln/>
-        </p:spPr>
-      </p:sp>
-      <p:sp>
-        <p:nvSpPr>
-          <p:cNvPr id="10" name="Text 8"/>
-          <p:cNvSpPr/>
-          <p:nvPr/>
-        </p:nvSpPr>
-        <p:spPr>
-          <a:xfrm>
-            <a:off x="502920" y="2953512"/>
-            <a:ext cx="384048" cy="384048"/>
-          </a:xfrm>
-          <a:prstGeom prst="rect">
-            <a:avLst/>
-          </a:prstGeom>
-          <a:noFill/>
-          <a:ln/>
-        </p:spPr>
-        <p:txBody>
-          <a:bodyPr wrap="square" lIns="0" tIns="0" rIns="0" bIns="0" rtlCol="0" anchor="ctr"/>
-          <a:lstStyle/>
-          <a:p>
-            <a:pPr algn="ctr" indent="0" marL="0">
-              <a:buNone/>
-            </a:pPr>
-            <a:r>
-              <a:rPr lang="en-US" sz="1400" b="1" dirty="0">
-                <a:solidFill>
-                  <a:srgbClr val="FFFFFF"/>
-                </a:solidFill>
-                <a:latin typeface="Spoqa Han Sans Neo" pitchFamily="34" charset="0"/>
-                <a:ea typeface="Spoqa Han Sans Neo" pitchFamily="34" charset="-122"/>
-                <a:cs typeface="Spoqa Han Sans Neo" pitchFamily="34" charset="-120"/>
-              </a:rPr>
-              <a:t>2</a:t>
-            </a:r>
-            <a:endParaRPr lang="en-US" sz="1400" dirty="0"/>
-          </a:p>
-        </p:txBody>
-      </p:sp>
-      <p:sp>
-        <p:nvSpPr>
-          <p:cNvPr id="11" name="Text 9"/>
-          <p:cNvSpPr/>
-          <p:nvPr/>
-        </p:nvSpPr>
-        <p:spPr>
-          <a:xfrm>
-            <a:off x="1051560" y="2880360"/>
-            <a:ext cx="4892040" cy="603504"/>
-          </a:xfrm>
-          <a:prstGeom prst="rect">
-            <a:avLst/>
-          </a:prstGeom>
-          <a:noFill/>
-          <a:ln/>
-        </p:spPr>
-        <p:txBody>
-          <a:bodyPr wrap="square" lIns="0" tIns="0" rIns="0" bIns="0" rtlCol="0" anchor="ctr"/>
-          <a:lstStyle/>
-          <a:p>
-            <a:pPr indent="0" marL="0">
-              <a:lnSpc>
-                <a:spcPts val="1500"/>
-              </a:lnSpc>
-              <a:buNone/>
-            </a:pPr>
-            <a:r>
-              <a:rPr lang="en-US" sz="1200" dirty="0">
-                <a:solidFill>
-                  <a:srgbClr val="3D3D3D"/>
-                </a:solidFill>
-                <a:latin typeface="Spoqa Han Sans Neo" pitchFamily="34" charset="0"/>
-                <a:ea typeface="Spoqa Han Sans Neo" pitchFamily="34" charset="-122"/>
-                <a:cs typeface="Spoqa Han Sans Neo" pitchFamily="34" charset="-120"/>
-              </a:rPr>
-              <a:t>그러나 K3는 초대형 모델로 오히려 HBM·메모리 수요를 키운다.</a:t>
-            </a:r>
-            <a:endParaRPr lang="en-US" sz="1200" dirty="0"/>
-          </a:p>
-        </p:txBody>
-      </p:sp>
-      <p:sp>
-        <p:nvSpPr>
-          <p:cNvPr id="12" name="Shape 10"/>
-          <p:cNvSpPr/>
-          <p:nvPr/>
-        </p:nvSpPr>
-        <p:spPr>
-          <a:xfrm>
-            <a:off x="502920" y="3621024"/>
-            <a:ext cx="384048" cy="384048"/>
-          </a:xfrm>
-          <a:prstGeom prst="ellipse">
-            <a:avLst/>
-          </a:prstGeom>
-          <a:solidFill>
-            <a:srgbClr val="F58220"/>
-          </a:solidFill>
-          <a:ln/>
-        </p:spPr>
-      </p:sp>
-      <p:sp>
-        <p:nvSpPr>
-          <p:cNvPr id="13" name="Text 11"/>
-          <p:cNvSpPr/>
-          <p:nvPr/>
-        </p:nvSpPr>
-        <p:spPr>
-          <a:xfrm>
-            <a:off x="502920" y="3621024"/>
-            <a:ext cx="384048" cy="384048"/>
-          </a:xfrm>
-          <a:prstGeom prst="rect">
-            <a:avLst/>
-          </a:prstGeom>
-          <a:noFill/>
-          <a:ln/>
-        </p:spPr>
-        <p:txBody>
-          <a:bodyPr wrap="square" lIns="0" tIns="0" rIns="0" bIns="0" rtlCol="0" anchor="ctr"/>
-          <a:lstStyle/>
-          <a:p>
-            <a:pPr algn="ctr" indent="0" marL="0">
-              <a:buNone/>
-            </a:pPr>
-            <a:r>
-              <a:rPr lang="en-US" sz="1400" b="1" dirty="0">
-                <a:solidFill>
-                  <a:srgbClr val="FFFFFF"/>
-                </a:solidFill>
-                <a:latin typeface="Spoqa Han Sans Neo" pitchFamily="34" charset="0"/>
-                <a:ea typeface="Spoqa Han Sans Neo" pitchFamily="34" charset="-122"/>
-                <a:cs typeface="Spoqa Han Sans Neo" pitchFamily="34" charset="-120"/>
-              </a:rPr>
-              <a:t>3</a:t>
-            </a:r>
-            <a:endParaRPr lang="en-US" sz="1400" dirty="0"/>
-          </a:p>
-        </p:txBody>
-      </p:sp>
-      <p:sp>
-        <p:nvSpPr>
-          <p:cNvPr id="14" name="Text 12"/>
-          <p:cNvSpPr/>
-          <p:nvPr/>
-        </p:nvSpPr>
-        <p:spPr>
-          <a:xfrm>
-            <a:off x="1051560" y="3547872"/>
-            <a:ext cx="4892040" cy="603504"/>
-          </a:xfrm>
-          <a:prstGeom prst="rect">
-            <a:avLst/>
-          </a:prstGeom>
-          <a:noFill/>
-          <a:ln/>
-        </p:spPr>
-        <p:txBody>
-          <a:bodyPr wrap="square" lIns="0" tIns="0" rIns="0" bIns="0" rtlCol="0" anchor="ctr"/>
-          <a:lstStyle/>
-          <a:p>
-            <a:pPr indent="0" marL="0">
-              <a:lnSpc>
-                <a:spcPts val="1500"/>
-              </a:lnSpc>
-              <a:buNone/>
-            </a:pPr>
-            <a:r>
-              <a:rPr lang="en-US" sz="1200" dirty="0">
-                <a:solidFill>
-                  <a:srgbClr val="3D3D3D"/>
-                </a:solidFill>
-                <a:latin typeface="Spoqa Han Sans Neo" pitchFamily="34" charset="0"/>
-                <a:ea typeface="Spoqa Han Sans Neo" pitchFamily="34" charset="-122"/>
-                <a:cs typeface="Spoqa Han Sans Neo" pitchFamily="34" charset="-120"/>
-              </a:rPr>
-              <a:t>데이터센터 투자는 선행한다 — 단기 Capex와 장기 AI 보급은 분리.</a:t>
-            </a:r>
-            <a:endParaRPr lang="en-US" sz="1200" dirty="0"/>
-          </a:p>
-        </p:txBody>
-      </p:sp>
-      <p:sp>
-        <p:nvSpPr>
-          <p:cNvPr id="15" name="Shape 13"/>
-          <p:cNvSpPr/>
-          <p:nvPr/>
-        </p:nvSpPr>
-        <p:spPr>
-          <a:xfrm>
-            <a:off x="502920" y="4288536"/>
-            <a:ext cx="384048" cy="384048"/>
-          </a:xfrm>
-          <a:prstGeom prst="ellipse">
-            <a:avLst/>
-          </a:prstGeom>
-          <a:solidFill>
-            <a:srgbClr val="F58220"/>
-          </a:solidFill>
-          <a:ln/>
-        </p:spPr>
-      </p:sp>
-      <p:sp>
-        <p:nvSpPr>
-          <p:cNvPr id="16" name="Text 14"/>
-          <p:cNvSpPr/>
-          <p:nvPr/>
-        </p:nvSpPr>
-        <p:spPr>
-          <a:xfrm>
-            <a:off x="502920" y="4288536"/>
-            <a:ext cx="384048" cy="384048"/>
-          </a:xfrm>
-          <a:prstGeom prst="rect">
-            <a:avLst/>
-          </a:prstGeom>
-          <a:noFill/>
-          <a:ln/>
-        </p:spPr>
-        <p:txBody>
-          <a:bodyPr wrap="square" lIns="0" tIns="0" rIns="0" bIns="0" rtlCol="0" anchor="ctr"/>
-          <a:lstStyle/>
-          <a:p>
-            <a:pPr algn="ctr" indent="0" marL="0">
-              <a:buNone/>
-            </a:pPr>
-            <a:r>
-              <a:rPr lang="en-US" sz="1400" b="1" dirty="0">
-                <a:solidFill>
-                  <a:srgbClr val="FFFFFF"/>
-                </a:solidFill>
-                <a:latin typeface="Spoqa Han Sans Neo" pitchFamily="34" charset="0"/>
-                <a:ea typeface="Spoqa Han Sans Neo" pitchFamily="34" charset="-122"/>
-                <a:cs typeface="Spoqa Han Sans Neo" pitchFamily="34" charset="-120"/>
-              </a:rPr>
-              <a:t>4</a:t>
-            </a:r>
-            <a:endParaRPr lang="en-US" sz="1400" dirty="0"/>
-          </a:p>
-        </p:txBody>
-      </p:sp>
-      <p:sp>
-        <p:nvSpPr>
-          <p:cNvPr id="17" name="Text 15"/>
-          <p:cNvSpPr/>
-          <p:nvPr/>
-        </p:nvSpPr>
-        <p:spPr>
-          <a:xfrm>
-            <a:off x="1051560" y="4215384"/>
-            <a:ext cx="4892040" cy="603504"/>
-          </a:xfrm>
-          <a:prstGeom prst="rect">
-            <a:avLst/>
-          </a:prstGeom>
-          <a:noFill/>
-          <a:ln/>
-        </p:spPr>
-        <p:txBody>
-          <a:bodyPr wrap="square" lIns="0" tIns="0" rIns="0" bIns="0" rtlCol="0" anchor="ctr"/>
-          <a:lstStyle/>
-          <a:p>
-            <a:pPr indent="0" marL="0">
-              <a:lnSpc>
-                <a:spcPts val="1500"/>
-              </a:lnSpc>
-              <a:buNone/>
-            </a:pPr>
-            <a:r>
-              <a:rPr lang="en-US" sz="1200" dirty="0">
-                <a:solidFill>
-                  <a:srgbClr val="3D3D3D"/>
-                </a:solidFill>
-                <a:latin typeface="Spoqa Han Sans Neo" pitchFamily="34" charset="0"/>
-                <a:ea typeface="Spoqa Han Sans Neo" pitchFamily="34" charset="-122"/>
-                <a:cs typeface="Spoqa Han Sans Neo" pitchFamily="34" charset="-120"/>
-              </a:rPr>
-              <a:t>IB 전망은 상향과 '정점 경고'가 공존 — 완만한 회복 시나리오.</a:t>
-            </a:r>
-            <a:endParaRPr lang="en-US" sz="1200" dirty="0"/>
-          </a:p>
-        </p:txBody>
-      </p:sp>
-      <p:sp>
-        <p:nvSpPr>
-          <p:cNvPr id="18" name="Shape 16"/>
-          <p:cNvSpPr/>
-          <p:nvPr/>
-        </p:nvSpPr>
-        <p:spPr>
-          <a:xfrm>
-            <a:off x="502920" y="4956048"/>
-            <a:ext cx="384048" cy="384048"/>
-          </a:xfrm>
-          <a:prstGeom prst="ellipse">
-            <a:avLst/>
-          </a:prstGeom>
-          <a:solidFill>
-            <a:srgbClr val="F58220"/>
-          </a:solidFill>
-          <a:ln/>
-        </p:spPr>
-      </p:sp>
-      <p:sp>
-        <p:nvSpPr>
-          <p:cNvPr id="19" name="Text 17"/>
-          <p:cNvSpPr/>
-          <p:nvPr/>
-        </p:nvSpPr>
-        <p:spPr>
-          <a:xfrm>
-            <a:off x="502920" y="4956048"/>
-            <a:ext cx="384048" cy="384048"/>
-          </a:xfrm>
-          <a:prstGeom prst="rect">
-            <a:avLst/>
-          </a:prstGeom>
-          <a:noFill/>
-          <a:ln/>
-        </p:spPr>
-        <p:txBody>
-          <a:bodyPr wrap="square" lIns="0" tIns="0" rIns="0" bIns="0" rtlCol="0" anchor="ctr"/>
-          <a:lstStyle/>
-          <a:p>
-            <a:pPr algn="ctr" indent="0" marL="0">
-              <a:buNone/>
-            </a:pPr>
-            <a:r>
-              <a:rPr lang="en-US" sz="1400" b="1" dirty="0">
-                <a:solidFill>
-                  <a:srgbClr val="FFFFFF"/>
-                </a:solidFill>
-                <a:latin typeface="Spoqa Han Sans Neo" pitchFamily="34" charset="0"/>
-                <a:ea typeface="Spoqa Han Sans Neo" pitchFamily="34" charset="-122"/>
-                <a:cs typeface="Spoqa Han Sans Neo" pitchFamily="34" charset="-120"/>
-              </a:rPr>
-              <a:t>5</a:t>
-            </a:r>
-            <a:endParaRPr lang="en-US" sz="1400" dirty="0"/>
-          </a:p>
-        </p:txBody>
-      </p:sp>
-      <p:sp>
-        <p:nvSpPr>
-          <p:cNvPr id="20" name="Text 18"/>
-          <p:cNvSpPr/>
-          <p:nvPr/>
-        </p:nvSpPr>
-        <p:spPr>
-          <a:xfrm>
-            <a:off x="1051560" y="4882896"/>
-            <a:ext cx="4892040" cy="603504"/>
-          </a:xfrm>
-          <a:prstGeom prst="rect">
-            <a:avLst/>
-          </a:prstGeom>
-          <a:noFill/>
-          <a:ln/>
-        </p:spPr>
-        <p:txBody>
-          <a:bodyPr wrap="square" lIns="0" tIns="0" rIns="0" bIns="0" rtlCol="0" anchor="ctr"/>
-          <a:lstStyle/>
-          <a:p>
-            <a:pPr indent="0" marL="0">
-              <a:lnSpc>
-                <a:spcPts val="1500"/>
-              </a:lnSpc>
-              <a:buNone/>
-            </a:pPr>
-            <a:r>
-              <a:rPr lang="en-US" sz="1200" dirty="0">
-                <a:solidFill>
-                  <a:srgbClr val="3D3D3D"/>
-                </a:solidFill>
-                <a:latin typeface="Spoqa Han Sans Neo" pitchFamily="34" charset="0"/>
-                <a:ea typeface="Spoqa Han Sans Neo" pitchFamily="34" charset="-122"/>
-                <a:cs typeface="Spoqa Han Sans Neo" pitchFamily="34" charset="-120"/>
-              </a:rPr>
-              <a:t>통제 가능한 '기술 로드맵'을 갖춘 기업에 집중하라.</a:t>
-            </a:r>
-            <a:endParaRPr lang="en-US" sz="1200" dirty="0"/>
-          </a:p>
-        </p:txBody>
-      </p:sp>
-      <p:sp>
-        <p:nvSpPr>
-          <p:cNvPr id="21" name="Shape 19"/>
-          <p:cNvSpPr/>
-          <p:nvPr/>
-        </p:nvSpPr>
-        <p:spPr>
-          <a:xfrm>
-            <a:off x="6199632" y="1783080"/>
-            <a:ext cx="5486400" cy="3794760"/>
+          <p:cNvPr id="5" name="Shape 3"/>
+          <p:cNvSpPr/>
+          <p:nvPr/>
+        </p:nvSpPr>
+        <p:spPr>
+          <a:xfrm>
+            <a:off x="502920" y="1828800"/>
+            <a:ext cx="5486400" cy="4023360"/>
           </a:xfrm>
           <a:prstGeom prst="roundRect">
             <a:avLst>
-              <a:gd name="adj" fmla="val 964"/>
+              <a:gd name="adj" fmla="val 909"/>
             </a:avLst>
           </a:prstGeom>
           <a:solidFill>
-            <a:srgbClr val="ECEFF4"/>
+            <a:srgbClr val="F7F8FA"/>
           </a:solidFill>
-          <a:ln/>
-        </p:spPr>
-      </p:sp>
-      <p:sp>
-        <p:nvSpPr>
-          <p:cNvPr id="22" name="Text 20"/>
-          <p:cNvSpPr/>
-          <p:nvPr/>
-        </p:nvSpPr>
-        <p:spPr>
-          <a:xfrm>
-            <a:off x="6446520" y="1965960"/>
-            <a:ext cx="5029200" cy="320040"/>
-          </a:xfrm>
-          <a:prstGeom prst="rect">
-            <a:avLst/>
-          </a:prstGeom>
-          <a:noFill/>
-          <a:ln/>
-        </p:spPr>
-        <p:txBody>
-          <a:bodyPr wrap="square" lIns="0" tIns="0" rIns="0" bIns="0" rtlCol="0" anchor="ctr"/>
-          <a:lstStyle/>
-          <a:p>
-            <a:pPr indent="0" marL="0">
-              <a:buNone/>
-            </a:pPr>
-            <a:r>
-              <a:rPr lang="en-US" sz="1400" b="1" dirty="0">
-                <a:solidFill>
-                  <a:srgbClr val="1A1A1A"/>
-                </a:solidFill>
-                <a:latin typeface="Spoqa Han Sans Neo" pitchFamily="34" charset="0"/>
-                <a:ea typeface="Spoqa Han Sans Neo" pitchFamily="34" charset="-122"/>
-                <a:cs typeface="Spoqa Han Sans Neo" pitchFamily="34" charset="-120"/>
-              </a:rPr>
-              <a:t>실적 시즌 체크리스트 (7/22~7/30)</a:t>
-            </a:r>
-            <a:endParaRPr lang="en-US" sz="1400" dirty="0"/>
-          </a:p>
-        </p:txBody>
-      </p:sp>
-      <p:sp>
-        <p:nvSpPr>
-          <p:cNvPr id="23" name="Shape 21"/>
-          <p:cNvSpPr/>
-          <p:nvPr/>
-        </p:nvSpPr>
-        <p:spPr>
-          <a:xfrm>
-            <a:off x="6446520" y="2423160"/>
-            <a:ext cx="201168" cy="201168"/>
-          </a:xfrm>
-          <a:prstGeom prst="rect">
-            <a:avLst/>
+          <a:ln w="12700">
+            <a:solidFill>
+              <a:srgbClr val="CDCECB"/>
+            </a:solidFill>
+            <a:prstDash val="solid"/>
+          </a:ln>
+        </p:spPr>
+      </p:sp>
+      <p:sp>
+        <p:nvSpPr>
+          <p:cNvPr id="6" name="Text 4"/>
+          <p:cNvSpPr/>
+          <p:nvPr/>
+        </p:nvSpPr>
+        <p:spPr>
+          <a:xfrm>
+            <a:off x="777240" y="2011680"/>
+            <a:ext cx="4937760" cy="365760"/>
+          </a:xfrm>
+          <a:prstGeom prst="rect">
+            <a:avLst/>
+          </a:prstGeom>
+          <a:noFill/>
+          <a:ln/>
+        </p:spPr>
+        <p:txBody>
+          <a:bodyPr wrap="square" lIns="0" tIns="0" rIns="0" bIns="0" rtlCol="0" anchor="ctr"/>
+          <a:lstStyle/>
+          <a:p>
+            <a:pPr indent="0" marL="0">
+              <a:buNone/>
+            </a:pPr>
+            <a:r>
+              <a:rPr lang="en-US" sz="1500" b="1" dirty="0">
+                <a:solidFill>
+                  <a:srgbClr val="6C6C6C"/>
+                </a:solidFill>
+                <a:latin typeface="Spoqa Han Sans Neo" pitchFamily="34" charset="0"/>
+                <a:ea typeface="Spoqa Han Sans Neo" pitchFamily="34" charset="-122"/>
+                <a:cs typeface="Spoqa Han Sans Neo" pitchFamily="34" charset="-120"/>
+              </a:rPr>
+              <a:t>✕  기업이 통제하기 어려운 변수</a:t>
+            </a:r>
+            <a:endParaRPr lang="en-US" sz="1500" dirty="0"/>
+          </a:p>
+        </p:txBody>
+      </p:sp>
+      <p:sp>
+        <p:nvSpPr>
+          <p:cNvPr id="7" name="Text 5"/>
+          <p:cNvSpPr/>
+          <p:nvPr/>
+        </p:nvSpPr>
+        <p:spPr>
+          <a:xfrm>
+            <a:off x="777240" y="2395728"/>
+            <a:ext cx="4937760" cy="502920"/>
+          </a:xfrm>
+          <a:prstGeom prst="rect">
+            <a:avLst/>
+          </a:prstGeom>
+          <a:noFill/>
+          <a:ln/>
+        </p:spPr>
+        <p:txBody>
+          <a:bodyPr wrap="square" lIns="0" tIns="0" rIns="0" bIns="0" rtlCol="0" anchor="ctr"/>
+          <a:lstStyle/>
+          <a:p>
+            <a:pPr indent="0" marL="0">
+              <a:buNone/>
+            </a:pPr>
+            <a:r>
+              <a:rPr lang="en-US" sz="1150" dirty="0">
+                <a:solidFill>
+                  <a:srgbClr val="3D3D3D"/>
+                </a:solidFill>
+                <a:latin typeface="Spoqa Han Sans Neo" pitchFamily="34" charset="0"/>
+                <a:ea typeface="Spoqa Han Sans Neo" pitchFamily="34" charset="-122"/>
+                <a:cs typeface="Spoqa Han Sans Neo" pitchFamily="34" charset="-120"/>
+              </a:rPr>
+              <a:t>단기 실적·주가에 큰 영향을 주지만, 예측도 어렵고 기업이 바꿀 수도 없다.</a:t>
+            </a:r>
+            <a:endParaRPr lang="en-US" sz="1150" dirty="0"/>
+          </a:p>
+        </p:txBody>
+      </p:sp>
+      <p:sp>
+        <p:nvSpPr>
+          <p:cNvPr id="8" name="Shape 6"/>
+          <p:cNvSpPr/>
+          <p:nvPr/>
+        </p:nvSpPr>
+        <p:spPr>
+          <a:xfrm>
+            <a:off x="777240" y="3017520"/>
+            <a:ext cx="4937760" cy="548640"/>
+          </a:xfrm>
+          <a:prstGeom prst="roundRect">
+            <a:avLst>
+              <a:gd name="adj" fmla="val 5000"/>
+            </a:avLst>
+          </a:prstGeom>
+          <a:solidFill>
+            <a:srgbClr val="FFFFFF"/>
+          </a:solidFill>
+          <a:ln w="9525">
+            <a:solidFill>
+              <a:srgbClr val="CDCECB"/>
+            </a:solidFill>
+            <a:prstDash val="solid"/>
+          </a:ln>
+        </p:spPr>
+      </p:sp>
+      <p:sp>
+        <p:nvSpPr>
+          <p:cNvPr id="9" name="Text 7"/>
+          <p:cNvSpPr/>
+          <p:nvPr/>
+        </p:nvSpPr>
+        <p:spPr>
+          <a:xfrm>
+            <a:off x="960120" y="3017520"/>
+            <a:ext cx="4663440" cy="548640"/>
+          </a:xfrm>
+          <a:prstGeom prst="rect">
+            <a:avLst/>
+          </a:prstGeom>
+          <a:noFill/>
+          <a:ln/>
+        </p:spPr>
+        <p:txBody>
+          <a:bodyPr wrap="square" lIns="0" tIns="0" rIns="0" bIns="0" rtlCol="0" anchor="ctr"/>
+          <a:lstStyle/>
+          <a:p>
+            <a:pPr indent="0" marL="0">
+              <a:buNone/>
+            </a:pPr>
+            <a:r>
+              <a:rPr lang="en-US" sz="1250" dirty="0">
+                <a:solidFill>
+                  <a:srgbClr val="3D3D3D"/>
+                </a:solidFill>
+                <a:latin typeface="Spoqa Han Sans Neo" pitchFamily="34" charset="0"/>
+                <a:ea typeface="Spoqa Han Sans Neo" pitchFamily="34" charset="-122"/>
+                <a:cs typeface="Spoqa Han Sans Neo" pitchFamily="34" charset="-120"/>
+              </a:rPr>
+              <a:t>고객사의 데이터센터 증설 속도</a:t>
+            </a:r>
+            <a:endParaRPr lang="en-US" sz="1250" dirty="0"/>
+          </a:p>
+        </p:txBody>
+      </p:sp>
+      <p:sp>
+        <p:nvSpPr>
+          <p:cNvPr id="10" name="Shape 8"/>
+          <p:cNvSpPr/>
+          <p:nvPr/>
+        </p:nvSpPr>
+        <p:spPr>
+          <a:xfrm>
+            <a:off x="777240" y="3675888"/>
+            <a:ext cx="4937760" cy="548640"/>
+          </a:xfrm>
+          <a:prstGeom prst="roundRect">
+            <a:avLst>
+              <a:gd name="adj" fmla="val 5000"/>
+            </a:avLst>
+          </a:prstGeom>
+          <a:solidFill>
+            <a:srgbClr val="FFFFFF"/>
+          </a:solidFill>
+          <a:ln w="9525">
+            <a:solidFill>
+              <a:srgbClr val="CDCECB"/>
+            </a:solidFill>
+            <a:prstDash val="solid"/>
+          </a:ln>
+        </p:spPr>
+      </p:sp>
+      <p:sp>
+        <p:nvSpPr>
+          <p:cNvPr id="11" name="Text 9"/>
+          <p:cNvSpPr/>
+          <p:nvPr/>
+        </p:nvSpPr>
+        <p:spPr>
+          <a:xfrm>
+            <a:off x="960120" y="3675888"/>
+            <a:ext cx="4663440" cy="548640"/>
+          </a:xfrm>
+          <a:prstGeom prst="rect">
+            <a:avLst/>
+          </a:prstGeom>
+          <a:noFill/>
+          <a:ln/>
+        </p:spPr>
+        <p:txBody>
+          <a:bodyPr wrap="square" lIns="0" tIns="0" rIns="0" bIns="0" rtlCol="0" anchor="ctr"/>
+          <a:lstStyle/>
+          <a:p>
+            <a:pPr indent="0" marL="0">
+              <a:buNone/>
+            </a:pPr>
+            <a:r>
+              <a:rPr lang="en-US" sz="1250" dirty="0">
+                <a:solidFill>
+                  <a:srgbClr val="3D3D3D"/>
+                </a:solidFill>
+                <a:latin typeface="Spoqa Han Sans Neo" pitchFamily="34" charset="0"/>
+                <a:ea typeface="Spoqa Han Sans Neo" pitchFamily="34" charset="-122"/>
+                <a:cs typeface="Spoqa Han Sans Neo" pitchFamily="34" charset="-120"/>
+              </a:rPr>
+              <a:t>메모리 가격 사이클(업/다운)</a:t>
+            </a:r>
+            <a:endParaRPr lang="en-US" sz="1250" dirty="0"/>
+          </a:p>
+        </p:txBody>
+      </p:sp>
+      <p:sp>
+        <p:nvSpPr>
+          <p:cNvPr id="12" name="Shape 10"/>
+          <p:cNvSpPr/>
+          <p:nvPr/>
+        </p:nvSpPr>
+        <p:spPr>
+          <a:xfrm>
+            <a:off x="777240" y="4334256"/>
+            <a:ext cx="4937760" cy="548640"/>
+          </a:xfrm>
+          <a:prstGeom prst="roundRect">
+            <a:avLst>
+              <a:gd name="adj" fmla="val 5000"/>
+            </a:avLst>
+          </a:prstGeom>
+          <a:solidFill>
+            <a:srgbClr val="FFFFFF"/>
+          </a:solidFill>
+          <a:ln w="9525">
+            <a:solidFill>
+              <a:srgbClr val="CDCECB"/>
+            </a:solidFill>
+            <a:prstDash val="solid"/>
+          </a:ln>
+        </p:spPr>
+      </p:sp>
+      <p:sp>
+        <p:nvSpPr>
+          <p:cNvPr id="13" name="Text 11"/>
+          <p:cNvSpPr/>
+          <p:nvPr/>
+        </p:nvSpPr>
+        <p:spPr>
+          <a:xfrm>
+            <a:off x="960120" y="4334256"/>
+            <a:ext cx="4663440" cy="548640"/>
+          </a:xfrm>
+          <a:prstGeom prst="rect">
+            <a:avLst/>
+          </a:prstGeom>
+          <a:noFill/>
+          <a:ln/>
+        </p:spPr>
+        <p:txBody>
+          <a:bodyPr wrap="square" lIns="0" tIns="0" rIns="0" bIns="0" rtlCol="0" anchor="ctr"/>
+          <a:lstStyle/>
+          <a:p>
+            <a:pPr indent="0" marL="0">
+              <a:buNone/>
+            </a:pPr>
+            <a:r>
+              <a:rPr lang="en-US" sz="1250" dirty="0">
+                <a:solidFill>
+                  <a:srgbClr val="3D3D3D"/>
+                </a:solidFill>
+                <a:latin typeface="Spoqa Han Sans Neo" pitchFamily="34" charset="0"/>
+                <a:ea typeface="Spoqa Han Sans Neo" pitchFamily="34" charset="-122"/>
+                <a:cs typeface="Spoqa Han Sans Neo" pitchFamily="34" charset="-120"/>
+              </a:rPr>
+              <a:t>AI 효율화가 바꾸는 단기 수요 전망</a:t>
+            </a:r>
+            <a:endParaRPr lang="en-US" sz="1250" dirty="0"/>
+          </a:p>
+        </p:txBody>
+      </p:sp>
+      <p:sp>
+        <p:nvSpPr>
+          <p:cNvPr id="14" name="Shape 12"/>
+          <p:cNvSpPr/>
+          <p:nvPr/>
+        </p:nvSpPr>
+        <p:spPr>
+          <a:xfrm>
+            <a:off x="777240" y="4992624"/>
+            <a:ext cx="4937760" cy="548640"/>
+          </a:xfrm>
+          <a:prstGeom prst="roundRect">
+            <a:avLst>
+              <a:gd name="adj" fmla="val 5000"/>
+            </a:avLst>
+          </a:prstGeom>
+          <a:solidFill>
+            <a:srgbClr val="FFFFFF"/>
+          </a:solidFill>
+          <a:ln w="9525">
+            <a:solidFill>
+              <a:srgbClr val="CDCECB"/>
+            </a:solidFill>
+            <a:prstDash val="solid"/>
+          </a:ln>
+        </p:spPr>
+      </p:sp>
+      <p:sp>
+        <p:nvSpPr>
+          <p:cNvPr id="15" name="Text 13"/>
+          <p:cNvSpPr/>
+          <p:nvPr/>
+        </p:nvSpPr>
+        <p:spPr>
+          <a:xfrm>
+            <a:off x="960120" y="4992624"/>
+            <a:ext cx="4663440" cy="548640"/>
+          </a:xfrm>
+          <a:prstGeom prst="rect">
+            <a:avLst/>
+          </a:prstGeom>
+          <a:noFill/>
+          <a:ln/>
+        </p:spPr>
+        <p:txBody>
+          <a:bodyPr wrap="square" lIns="0" tIns="0" rIns="0" bIns="0" rtlCol="0" anchor="ctr"/>
+          <a:lstStyle/>
+          <a:p>
+            <a:pPr indent="0" marL="0">
+              <a:buNone/>
+            </a:pPr>
+            <a:r>
+              <a:rPr lang="en-US" sz="1250" dirty="0">
+                <a:solidFill>
+                  <a:srgbClr val="3D3D3D"/>
+                </a:solidFill>
+                <a:latin typeface="Spoqa Han Sans Neo" pitchFamily="34" charset="0"/>
+                <a:ea typeface="Spoqa Han Sans Neo" pitchFamily="34" charset="-122"/>
+                <a:cs typeface="Spoqa Han Sans Neo" pitchFamily="34" charset="-120"/>
+              </a:rPr>
+              <a:t>매크로·환율·지정학 리스크</a:t>
+            </a:r>
+            <a:endParaRPr lang="en-US" sz="1250" dirty="0"/>
+          </a:p>
+        </p:txBody>
+      </p:sp>
+      <p:sp>
+        <p:nvSpPr>
+          <p:cNvPr id="16" name="Shape 14"/>
+          <p:cNvSpPr/>
+          <p:nvPr/>
+        </p:nvSpPr>
+        <p:spPr>
+          <a:xfrm>
+            <a:off x="6199632" y="1828800"/>
+            <a:ext cx="5486400" cy="4023360"/>
+          </a:xfrm>
+          <a:prstGeom prst="roundRect">
+            <a:avLst>
+              <a:gd name="adj" fmla="val 909"/>
+            </a:avLst>
           </a:prstGeom>
           <a:solidFill>
             <a:srgbClr val="FFFFFF"/>
@@ -8412,14 +8915,242 @@
       </p:sp>
       <p:sp>
         <p:nvSpPr>
+          <p:cNvPr id="17" name="Text 15"/>
+          <p:cNvSpPr/>
+          <p:nvPr/>
+        </p:nvSpPr>
+        <p:spPr>
+          <a:xfrm>
+            <a:off x="6473952" y="2011680"/>
+            <a:ext cx="4937760" cy="365760"/>
+          </a:xfrm>
+          <a:prstGeom prst="rect">
+            <a:avLst/>
+          </a:prstGeom>
+          <a:noFill/>
+          <a:ln/>
+        </p:spPr>
+        <p:txBody>
+          <a:bodyPr wrap="square" lIns="0" tIns="0" rIns="0" bIns="0" rtlCol="0" anchor="ctr"/>
+          <a:lstStyle/>
+          <a:p>
+            <a:pPr indent="0" marL="0">
+              <a:buNone/>
+            </a:pPr>
+            <a:r>
+              <a:rPr lang="en-US" sz="1500" b="1" dirty="0">
+                <a:solidFill>
+                  <a:srgbClr val="CB6015"/>
+                </a:solidFill>
+                <a:latin typeface="Spoqa Han Sans Neo" pitchFamily="34" charset="0"/>
+                <a:ea typeface="Spoqa Han Sans Neo" pitchFamily="34" charset="-122"/>
+                <a:cs typeface="Spoqa Han Sans Neo" pitchFamily="34" charset="-120"/>
+              </a:rPr>
+              <a:t>✓  기업이 스스로 만드는 것</a:t>
+            </a:r>
+            <a:endParaRPr lang="en-US" sz="1500" dirty="0"/>
+          </a:p>
+        </p:txBody>
+      </p:sp>
+      <p:sp>
+        <p:nvSpPr>
+          <p:cNvPr id="18" name="Text 16"/>
+          <p:cNvSpPr/>
+          <p:nvPr/>
+        </p:nvSpPr>
+        <p:spPr>
+          <a:xfrm>
+            <a:off x="6473952" y="2395728"/>
+            <a:ext cx="4937760" cy="502920"/>
+          </a:xfrm>
+          <a:prstGeom prst="rect">
+            <a:avLst/>
+          </a:prstGeom>
+          <a:noFill/>
+          <a:ln/>
+        </p:spPr>
+        <p:txBody>
+          <a:bodyPr wrap="square" lIns="0" tIns="0" rIns="0" bIns="0" rtlCol="0" anchor="ctr"/>
+          <a:lstStyle/>
+          <a:p>
+            <a:pPr indent="0" marL="0">
+              <a:buNone/>
+            </a:pPr>
+            <a:r>
+              <a:rPr lang="en-US" sz="1150" dirty="0">
+                <a:solidFill>
+                  <a:srgbClr val="3D3D3D"/>
+                </a:solidFill>
+                <a:latin typeface="Spoqa Han Sans Neo" pitchFamily="34" charset="0"/>
+                <a:ea typeface="Spoqa Han Sans Neo" pitchFamily="34" charset="-122"/>
+                <a:cs typeface="Spoqa Han Sans Neo" pitchFamily="34" charset="-120"/>
+              </a:rPr>
+              <a:t>고객사의 투자 속도와 무관하게 지속적으로 발전해야 하는 영역.</a:t>
+            </a:r>
+            <a:endParaRPr lang="en-US" sz="1150" dirty="0"/>
+          </a:p>
+        </p:txBody>
+      </p:sp>
+      <p:sp>
+        <p:nvSpPr>
+          <p:cNvPr id="19" name="Shape 17"/>
+          <p:cNvSpPr/>
+          <p:nvPr/>
+        </p:nvSpPr>
+        <p:spPr>
+          <a:xfrm>
+            <a:off x="6473952" y="3017520"/>
+            <a:ext cx="4937760" cy="548640"/>
+          </a:xfrm>
+          <a:prstGeom prst="roundRect">
+            <a:avLst>
+              <a:gd name="adj" fmla="val 5000"/>
+            </a:avLst>
+          </a:prstGeom>
+          <a:solidFill>
+            <a:srgbClr val="F58220">
+              <a:alpha val="10000"/>
+            </a:srgbClr>
+          </a:solidFill>
+          <a:ln/>
+        </p:spPr>
+      </p:sp>
+      <p:sp>
+        <p:nvSpPr>
+          <p:cNvPr id="20" name="Text 18"/>
+          <p:cNvSpPr/>
+          <p:nvPr/>
+        </p:nvSpPr>
+        <p:spPr>
+          <a:xfrm>
+            <a:off x="6656832" y="3017520"/>
+            <a:ext cx="4663440" cy="548640"/>
+          </a:xfrm>
+          <a:prstGeom prst="rect">
+            <a:avLst/>
+          </a:prstGeom>
+          <a:noFill/>
+          <a:ln/>
+        </p:spPr>
+        <p:txBody>
+          <a:bodyPr wrap="square" lIns="0" tIns="0" rIns="0" bIns="0" rtlCol="0" anchor="ctr"/>
+          <a:lstStyle/>
+          <a:p>
+            <a:pPr indent="0" marL="0">
+              <a:buNone/>
+            </a:pPr>
+            <a:r>
+              <a:rPr lang="en-US" sz="1250" b="1" dirty="0">
+                <a:solidFill>
+                  <a:srgbClr val="1A1A1A"/>
+                </a:solidFill>
+                <a:latin typeface="Spoqa Han Sans Neo" pitchFamily="34" charset="0"/>
+                <a:ea typeface="Spoqa Han Sans Neo" pitchFamily="34" charset="-122"/>
+                <a:cs typeface="Spoqa Han Sans Neo" pitchFamily="34" charset="-120"/>
+              </a:rPr>
+              <a:t>더 낮은 전력 · 더 높은 성능 기술</a:t>
+            </a:r>
+            <a:endParaRPr lang="en-US" sz="1250" dirty="0"/>
+          </a:p>
+        </p:txBody>
+      </p:sp>
+      <p:sp>
+        <p:nvSpPr>
+          <p:cNvPr id="21" name="Shape 19"/>
+          <p:cNvSpPr/>
+          <p:nvPr/>
+        </p:nvSpPr>
+        <p:spPr>
+          <a:xfrm>
+            <a:off x="6473952" y="3675888"/>
+            <a:ext cx="4937760" cy="548640"/>
+          </a:xfrm>
+          <a:prstGeom prst="roundRect">
+            <a:avLst>
+              <a:gd name="adj" fmla="val 5000"/>
+            </a:avLst>
+          </a:prstGeom>
+          <a:solidFill>
+            <a:srgbClr val="F58220">
+              <a:alpha val="10000"/>
+            </a:srgbClr>
+          </a:solidFill>
+          <a:ln/>
+        </p:spPr>
+      </p:sp>
+      <p:sp>
+        <p:nvSpPr>
+          <p:cNvPr id="22" name="Text 20"/>
+          <p:cNvSpPr/>
+          <p:nvPr/>
+        </p:nvSpPr>
+        <p:spPr>
+          <a:xfrm>
+            <a:off x="6656832" y="3675888"/>
+            <a:ext cx="4663440" cy="548640"/>
+          </a:xfrm>
+          <a:prstGeom prst="rect">
+            <a:avLst/>
+          </a:prstGeom>
+          <a:noFill/>
+          <a:ln/>
+        </p:spPr>
+        <p:txBody>
+          <a:bodyPr wrap="square" lIns="0" tIns="0" rIns="0" bIns="0" rtlCol="0" anchor="ctr"/>
+          <a:lstStyle/>
+          <a:p>
+            <a:pPr indent="0" marL="0">
+              <a:buNone/>
+            </a:pPr>
+            <a:r>
+              <a:rPr lang="en-US" sz="1250" b="1" dirty="0">
+                <a:solidFill>
+                  <a:srgbClr val="1A1A1A"/>
+                </a:solidFill>
+                <a:latin typeface="Spoqa Han Sans Neo" pitchFamily="34" charset="0"/>
+                <a:ea typeface="Spoqa Han Sans Neo" pitchFamily="34" charset="-122"/>
+                <a:cs typeface="Spoqa Han Sans Neo" pitchFamily="34" charset="-120"/>
+              </a:rPr>
+              <a:t>높은 수율을 확보하는 공정</a:t>
+            </a:r>
+            <a:endParaRPr lang="en-US" sz="1250" dirty="0"/>
+          </a:p>
+        </p:txBody>
+      </p:sp>
+      <p:sp>
+        <p:nvSpPr>
+          <p:cNvPr id="23" name="Shape 21"/>
+          <p:cNvSpPr/>
+          <p:nvPr/>
+        </p:nvSpPr>
+        <p:spPr>
+          <a:xfrm>
+            <a:off x="6473952" y="4334256"/>
+            <a:ext cx="4937760" cy="548640"/>
+          </a:xfrm>
+          <a:prstGeom prst="roundRect">
+            <a:avLst>
+              <a:gd name="adj" fmla="val 5000"/>
+            </a:avLst>
+          </a:prstGeom>
+          <a:solidFill>
+            <a:srgbClr val="F58220">
+              <a:alpha val="10000"/>
+            </a:srgbClr>
+          </a:solidFill>
+          <a:ln/>
+        </p:spPr>
+      </p:sp>
+      <p:sp>
+        <p:nvSpPr>
           <p:cNvPr id="24" name="Text 22"/>
           <p:cNvSpPr/>
           <p:nvPr/>
         </p:nvSpPr>
         <p:spPr>
           <a:xfrm>
-            <a:off x="6784848" y="2331720"/>
-            <a:ext cx="4663440" cy="292608"/>
+            <a:off x="6656832" y="4334256"/>
+            <a:ext cx="4663440" cy="548640"/>
           </a:xfrm>
           <a:prstGeom prst="rect">
             <a:avLst/>
@@ -8443,7 +9174,7 @@
                 <a:ea typeface="Spoqa Han Sans Neo" pitchFamily="34" charset="-122"/>
                 <a:cs typeface="Spoqa Han Sans Neo" pitchFamily="34" charset="-120"/>
               </a:rPr>
-              <a:t>Capex 가이던스</a:t>
+              <a:t>첨단 패키징 장비·소재</a:t>
             </a:r>
             <a:endParaRPr lang="en-US" sz="1250" dirty="0"/>
           </a:p>
@@ -8451,30 +9182,427 @@
       </p:sp>
       <p:sp>
         <p:nvSpPr>
-          <p:cNvPr id="25" name="Text 23"/>
-          <p:cNvSpPr/>
-          <p:nvPr/>
-        </p:nvSpPr>
-        <p:spPr>
-          <a:xfrm>
-            <a:off x="6784848" y="2596896"/>
-            <a:ext cx="4663440" cy="320040"/>
-          </a:xfrm>
-          <a:prstGeom prst="rect">
-            <a:avLst/>
-          </a:prstGeom>
-          <a:noFill/>
-          <a:ln/>
-        </p:spPr>
-        <p:txBody>
-          <a:bodyPr wrap="square" lIns="0" tIns="0" rIns="0" bIns="0" rtlCol="0" anchor="ctr"/>
-          <a:lstStyle/>
-          <a:p>
-            <a:pPr indent="0" marL="0">
-              <a:buNone/>
-            </a:pPr>
-            <a:r>
-              <a:rPr lang="en-US" sz="1050" dirty="0">
+          <p:cNvPr id="25" name="Shape 23"/>
+          <p:cNvSpPr/>
+          <p:nvPr/>
+        </p:nvSpPr>
+        <p:spPr>
+          <a:xfrm>
+            <a:off x="6473952" y="4992624"/>
+            <a:ext cx="4937760" cy="548640"/>
+          </a:xfrm>
+          <a:prstGeom prst="roundRect">
+            <a:avLst>
+              <a:gd name="adj" fmla="val 5000"/>
+            </a:avLst>
+          </a:prstGeom>
+          <a:solidFill>
+            <a:srgbClr val="F58220">
+              <a:alpha val="10000"/>
+            </a:srgbClr>
+          </a:solidFill>
+          <a:ln/>
+        </p:spPr>
+      </p:sp>
+      <p:sp>
+        <p:nvSpPr>
+          <p:cNvPr id="26" name="Text 24"/>
+          <p:cNvSpPr/>
+          <p:nvPr/>
+        </p:nvSpPr>
+        <p:spPr>
+          <a:xfrm>
+            <a:off x="6656832" y="4992624"/>
+            <a:ext cx="4663440" cy="548640"/>
+          </a:xfrm>
+          <a:prstGeom prst="rect">
+            <a:avLst/>
+          </a:prstGeom>
+          <a:noFill/>
+          <a:ln/>
+        </p:spPr>
+        <p:txBody>
+          <a:bodyPr wrap="square" lIns="0" tIns="0" rIns="0" bIns="0" rtlCol="0" anchor="ctr"/>
+          <a:lstStyle/>
+          <a:p>
+            <a:pPr indent="0" marL="0">
+              <a:buNone/>
+            </a:pPr>
+            <a:r>
+              <a:rPr lang="en-US" sz="1250" b="1" dirty="0">
+                <a:solidFill>
+                  <a:srgbClr val="1A1A1A"/>
+                </a:solidFill>
+                <a:latin typeface="Spoqa Han Sans Neo" pitchFamily="34" charset="0"/>
+                <a:ea typeface="Spoqa Han Sans Neo" pitchFamily="34" charset="-122"/>
+                <a:cs typeface="Spoqa Han Sans Neo" pitchFamily="34" charset="-120"/>
+              </a:rPr>
+              <a:t>효율적 설계를 지원하는 소프트웨어</a:t>
+            </a:r>
+            <a:endParaRPr lang="en-US" sz="1250" dirty="0"/>
+          </a:p>
+        </p:txBody>
+      </p:sp>
+      <p:sp>
+        <p:nvSpPr>
+          <p:cNvPr id="27" name="Text 25"/>
+          <p:cNvSpPr/>
+          <p:nvPr/>
+        </p:nvSpPr>
+        <p:spPr>
+          <a:xfrm>
+            <a:off x="502920" y="6355080"/>
+            <a:ext cx="10607040" cy="320040"/>
+          </a:xfrm>
+          <a:prstGeom prst="rect">
+            <a:avLst/>
+          </a:prstGeom>
+          <a:noFill/>
+          <a:ln/>
+        </p:spPr>
+        <p:txBody>
+          <a:bodyPr wrap="square" lIns="0" tIns="0" rIns="0" bIns="0" rtlCol="0" anchor="ctr"/>
+          <a:lstStyle/>
+          <a:p>
+            <a:pPr algn="l" indent="0" marL="0">
+              <a:buNone/>
+            </a:pPr>
+            <a:r>
+              <a:rPr lang="en-US" sz="850" dirty="0">
+                <a:solidFill>
+                  <a:srgbClr val="6C6C6C"/>
+                </a:solidFill>
+                <a:latin typeface="Spoqa Han Sans Neo" pitchFamily="34" charset="0"/>
+                <a:ea typeface="Spoqa Han Sans Neo" pitchFamily="34" charset="-122"/>
+                <a:cs typeface="Spoqa Han Sans Neo" pitchFamily="34" charset="-120"/>
+              </a:rPr>
+              <a:t>자료: 첨부 K-Freedom Insights '투자 기준의 재점검' 재구성.</a:t>
+            </a:r>
+            <a:endParaRPr lang="en-US" sz="850" dirty="0"/>
+          </a:p>
+        </p:txBody>
+      </p:sp>
+      <p:sp>
+        <p:nvSpPr>
+          <p:cNvPr id="28" name="Text 26"/>
+          <p:cNvSpPr/>
+          <p:nvPr/>
+        </p:nvSpPr>
+        <p:spPr>
+          <a:xfrm>
+            <a:off x="11292840" y="6327648"/>
+            <a:ext cx="640080" cy="365760"/>
+          </a:xfrm>
+          <a:prstGeom prst="rect">
+            <a:avLst/>
+          </a:prstGeom>
+          <a:noFill/>
+          <a:ln/>
+        </p:spPr>
+        <p:txBody>
+          <a:bodyPr wrap="square" lIns="0" tIns="0" rIns="0" bIns="0" rtlCol="0" anchor="ctr"/>
+          <a:lstStyle/>
+          <a:p>
+            <a:pPr algn="r" indent="0" marL="0">
+              <a:buNone/>
+            </a:pPr>
+            <a:r>
+              <a:rPr lang="en-US" sz="1100" b="1" dirty="0">
+                <a:solidFill>
+                  <a:srgbClr val="6C6C6C"/>
+                </a:solidFill>
+                <a:latin typeface="Spoqa Han Sans Neo" pitchFamily="34" charset="0"/>
+                <a:ea typeface="Spoqa Han Sans Neo" pitchFamily="34" charset="-122"/>
+                <a:cs typeface="Spoqa Han Sans Neo" pitchFamily="34" charset="-120"/>
+              </a:rPr>
+              <a:t>15</a:t>
+            </a:r>
+            <a:endParaRPr lang="en-US" sz="1100" dirty="0"/>
+          </a:p>
+        </p:txBody>
+      </p:sp>
+    </p:spTree>
+  </p:cSld>
+  <p:clrMapOvr>
+    <a:masterClrMapping/>
+  </p:clrMapOvr>
+</p:sld>
+</file>
+
+<file path=ppt/slides/slide16.xml><?xml version="1.0" encoding="utf-8"?>
+<p:sld xmlns:a="http://schemas.openxmlformats.org/drawingml/2006/main" xmlns:r="http://schemas.openxmlformats.org/officeDocument/2006/relationships" xmlns:p="http://schemas.openxmlformats.org/presentationml/2006/main">
+  <p:cSld name="Slide 16">
+    <p:bg>
+      <p:bgPr>
+        <a:solidFill>
+          <a:srgbClr val="043B72"/>
+        </a:solidFill>
+      </p:bgPr>
+    </p:bg>
+    <p:spTree>
+      <p:nvGrpSpPr>
+        <p:cNvPr id="1" name=""/>
+        <p:cNvGrpSpPr/>
+        <p:nvPr/>
+      </p:nvGrpSpPr>
+      <p:grpSpPr>
+        <a:xfrm>
+          <a:off x="0" y="0"/>
+          <a:ext cx="0" cy="0"/>
+          <a:chOff x="0" y="0"/>
+          <a:chExt cx="0" cy="0"/>
+        </a:xfrm>
+      </p:grpSpPr>
+      <p:sp>
+        <p:nvSpPr>
+          <p:cNvPr id="2" name="Shape 0"/>
+          <p:cNvSpPr/>
+          <p:nvPr/>
+        </p:nvSpPr>
+        <p:spPr>
+          <a:xfrm>
+            <a:off x="502920" y="640080"/>
+            <a:ext cx="502920" cy="45720"/>
+          </a:xfrm>
+          <a:prstGeom prst="rect">
+            <a:avLst/>
+          </a:prstGeom>
+          <a:solidFill>
+            <a:srgbClr val="F58220"/>
+          </a:solidFill>
+          <a:ln/>
+        </p:spPr>
+      </p:sp>
+      <p:sp>
+        <p:nvSpPr>
+          <p:cNvPr id="3" name="Text 1"/>
+          <p:cNvSpPr/>
+          <p:nvPr/>
+        </p:nvSpPr>
+        <p:spPr>
+          <a:xfrm>
+            <a:off x="502920" y="749808"/>
+            <a:ext cx="10058400" cy="274320"/>
+          </a:xfrm>
+          <a:prstGeom prst="rect">
+            <a:avLst/>
+          </a:prstGeom>
+          <a:noFill/>
+          <a:ln/>
+        </p:spPr>
+        <p:txBody>
+          <a:bodyPr wrap="square" lIns="0" tIns="0" rIns="0" bIns="0" rtlCol="0" anchor="ctr"/>
+          <a:lstStyle/>
+          <a:p>
+            <a:pPr indent="0" marL="0">
+              <a:buNone/>
+            </a:pPr>
+            <a:r>
+              <a:rPr lang="en-US" sz="1200" b="1" spc="100" kern="0" dirty="0">
+                <a:solidFill>
+                  <a:srgbClr val="FAB072"/>
+                </a:solidFill>
+                <a:latin typeface="Spoqa Han Sans Neo" pitchFamily="34" charset="0"/>
+                <a:ea typeface="Spoqa Han Sans Neo" pitchFamily="34" charset="-122"/>
+                <a:cs typeface="Spoqa Han Sans Neo" pitchFamily="34" charset="-120"/>
+              </a:rPr>
+              <a:t>CONCLUSION</a:t>
+            </a:r>
+            <a:endParaRPr lang="en-US" sz="1200" dirty="0"/>
+          </a:p>
+        </p:txBody>
+      </p:sp>
+      <p:sp>
+        <p:nvSpPr>
+          <p:cNvPr id="4" name="Text 2"/>
+          <p:cNvSpPr/>
+          <p:nvPr/>
+        </p:nvSpPr>
+        <p:spPr>
+          <a:xfrm>
+            <a:off x="484632" y="1051560"/>
+            <a:ext cx="11155680" cy="640080"/>
+          </a:xfrm>
+          <a:prstGeom prst="rect">
+            <a:avLst/>
+          </a:prstGeom>
+          <a:noFill/>
+          <a:ln/>
+        </p:spPr>
+        <p:txBody>
+          <a:bodyPr wrap="square" lIns="0" tIns="0" rIns="0" bIns="0" rtlCol="0" anchor="ctr"/>
+          <a:lstStyle/>
+          <a:p>
+            <a:pPr indent="0" marL="0">
+              <a:buNone/>
+            </a:pPr>
+            <a:r>
+              <a:rPr lang="en-US" sz="2600" b="1" dirty="0">
+                <a:solidFill>
+                  <a:srgbClr val="FFFFFF"/>
+                </a:solidFill>
+                <a:latin typeface="Spoqa Han Sans Neo" pitchFamily="34" charset="0"/>
+                <a:ea typeface="Spoqa Han Sans Neo" pitchFamily="34" charset="-122"/>
+                <a:cs typeface="Spoqa Han Sans Neo" pitchFamily="34" charset="-120"/>
+              </a:rPr>
+              <a:t>핵심 결론: 사이클이 아니라 '기술 로드맵의 방향'</a:t>
+            </a:r>
+            <a:endParaRPr lang="en-US" sz="2600" dirty="0"/>
+          </a:p>
+        </p:txBody>
+      </p:sp>
+      <p:sp>
+        <p:nvSpPr>
+          <p:cNvPr id="5" name="Text 3"/>
+          <p:cNvSpPr/>
+          <p:nvPr/>
+        </p:nvSpPr>
+        <p:spPr>
+          <a:xfrm>
+            <a:off x="502920" y="1828800"/>
+            <a:ext cx="11155680" cy="731520"/>
+          </a:xfrm>
+          <a:prstGeom prst="rect">
+            <a:avLst/>
+          </a:prstGeom>
+          <a:noFill/>
+          <a:ln/>
+        </p:spPr>
+        <p:txBody>
+          <a:bodyPr wrap="square" lIns="0" tIns="0" rIns="0" bIns="0" rtlCol="0" anchor="ctr"/>
+          <a:lstStyle/>
+          <a:p>
+            <a:pPr indent="0" marL="0">
+              <a:lnSpc>
+                <a:spcPts val="2000"/>
+              </a:lnSpc>
+              <a:buNone/>
+            </a:pPr>
+            <a:r>
+              <a:rPr lang="en-US" sz="1400" dirty="0">
+                <a:solidFill>
+                  <a:srgbClr val="DCE6F2"/>
+                </a:solidFill>
+                <a:latin typeface="Spoqa Han Sans Neo" pitchFamily="34" charset="0"/>
+                <a:ea typeface="Spoqa Han Sans Neo" pitchFamily="34" charset="-122"/>
+                <a:cs typeface="Spoqa Han Sans Neo" pitchFamily="34" charset="-120"/>
+              </a:rPr>
+              <a:t>반도체 투자의 핵심은 고객사의 증설 사이클을 예측하는 것이 아니라, 기술 발전의 방향에서 필수적인 역할을 수행하고 스스로 제품 로드맵을 발전시키는 기업을 찾는 데 있다.</a:t>
+            </a:r>
+            <a:endParaRPr lang="en-US" sz="1400" dirty="0"/>
+          </a:p>
+        </p:txBody>
+      </p:sp>
+      <p:sp>
+        <p:nvSpPr>
+          <p:cNvPr id="6" name="Shape 4"/>
+          <p:cNvSpPr/>
+          <p:nvPr/>
+        </p:nvSpPr>
+        <p:spPr>
+          <a:xfrm>
+            <a:off x="502920" y="2880360"/>
+            <a:ext cx="2697480" cy="1828800"/>
+          </a:xfrm>
+          <a:prstGeom prst="roundRect">
+            <a:avLst>
+              <a:gd name="adj" fmla="val 2000"/>
+            </a:avLst>
+          </a:prstGeom>
+          <a:solidFill>
+            <a:srgbClr val="FFFFFF"/>
+          </a:solidFill>
+          <a:ln/>
+        </p:spPr>
+      </p:sp>
+      <p:sp>
+        <p:nvSpPr>
+          <p:cNvPr id="7" name="Shape 5"/>
+          <p:cNvSpPr/>
+          <p:nvPr/>
+        </p:nvSpPr>
+        <p:spPr>
+          <a:xfrm>
+            <a:off x="731520" y="3108960"/>
+            <a:ext cx="457200" cy="457200"/>
+          </a:xfrm>
+          <a:prstGeom prst="ellipse">
+            <a:avLst/>
+          </a:prstGeom>
+          <a:solidFill>
+            <a:srgbClr val="F58220"/>
+          </a:solidFill>
+          <a:ln/>
+        </p:spPr>
+      </p:sp>
+      <p:sp>
+        <p:nvSpPr>
+          <p:cNvPr id="8" name="Text 6"/>
+          <p:cNvSpPr/>
+          <p:nvPr/>
+        </p:nvSpPr>
+        <p:spPr>
+          <a:xfrm>
+            <a:off x="731520" y="3657600"/>
+            <a:ext cx="2286000" cy="365760"/>
+          </a:xfrm>
+          <a:prstGeom prst="rect">
+            <a:avLst/>
+          </a:prstGeom>
+          <a:noFill/>
+          <a:ln/>
+        </p:spPr>
+        <p:txBody>
+          <a:bodyPr wrap="square" lIns="0" tIns="0" rIns="0" bIns="0" rtlCol="0" anchor="ctr"/>
+          <a:lstStyle/>
+          <a:p>
+            <a:pPr indent="0" marL="0">
+              <a:buNone/>
+            </a:pPr>
+            <a:r>
+              <a:rPr lang="en-US" sz="1500" b="1" dirty="0">
+                <a:solidFill>
+                  <a:srgbClr val="043B72"/>
+                </a:solidFill>
+                <a:latin typeface="Spoqa Han Sans Neo" pitchFamily="34" charset="0"/>
+                <a:ea typeface="Spoqa Han Sans Neo" pitchFamily="34" charset="-122"/>
+                <a:cs typeface="Spoqa Han Sans Neo" pitchFamily="34" charset="-120"/>
+              </a:rPr>
+              <a:t>성능 향상</a:t>
+            </a:r>
+            <a:endParaRPr lang="en-US" sz="1500" dirty="0"/>
+          </a:p>
+        </p:txBody>
+      </p:sp>
+      <p:sp>
+        <p:nvSpPr>
+          <p:cNvPr id="9" name="Text 7"/>
+          <p:cNvSpPr/>
+          <p:nvPr/>
+        </p:nvSpPr>
+        <p:spPr>
+          <a:xfrm>
+            <a:off x="731520" y="4023360"/>
+            <a:ext cx="2286000" cy="640080"/>
+          </a:xfrm>
+          <a:prstGeom prst="rect">
+            <a:avLst/>
+          </a:prstGeom>
+          <a:noFill/>
+          <a:ln/>
+        </p:spPr>
+        <p:txBody>
+          <a:bodyPr wrap="square" lIns="0" tIns="0" rIns="0" bIns="0" rtlCol="0" anchor="ctr"/>
+          <a:lstStyle/>
+          <a:p>
+            <a:pPr indent="0" marL="0">
+              <a:lnSpc>
+                <a:spcPts val="1400"/>
+              </a:lnSpc>
+              <a:buNone/>
+            </a:pPr>
+            <a:r>
+              <a:rPr lang="en-US" sz="1150" dirty="0">
                 <a:solidFill>
                   <a:srgbClr val="3D3D3D"/>
                 </a:solidFill>
@@ -8482,21 +9610,1308 @@
                 <a:ea typeface="Spoqa Han Sans Neo" pitchFamily="34" charset="-122"/>
                 <a:cs typeface="Spoqa Han Sans Neo" pitchFamily="34" charset="-120"/>
               </a:rPr>
-              <a:t>유지·상향 여부 = HBM 수요 지속 신호</a:t>
-            </a:r>
-            <a:endParaRPr lang="en-US" sz="1050" dirty="0"/>
-          </a:p>
-        </p:txBody>
-      </p:sp>
-      <p:sp>
-        <p:nvSpPr>
-          <p:cNvPr id="26" name="Shape 24"/>
-          <p:cNvSpPr/>
-          <p:nvPr/>
-        </p:nvSpPr>
-        <p:spPr>
-          <a:xfrm>
-            <a:off x="6446520" y="3044952"/>
+              <a:t>동일 전력 대비</a:t>
+            </a:r>
+            <a:endParaRPr lang="en-US" sz="1150" dirty="0"/>
+          </a:p>
+          <a:p>
+            <a:pPr indent="0" marL="0">
+              <a:lnSpc>
+                <a:spcPts val="1400"/>
+              </a:lnSpc>
+              <a:buNone/>
+            </a:pPr>
+            <a:r>
+              <a:rPr lang="en-US" sz="1150" dirty="0">
+                <a:solidFill>
+                  <a:srgbClr val="3D3D3D"/>
+                </a:solidFill>
+                <a:latin typeface="Spoqa Han Sans Neo" pitchFamily="34" charset="0"/>
+                <a:ea typeface="Spoqa Han Sans Neo" pitchFamily="34" charset="-122"/>
+                <a:cs typeface="Spoqa Han Sans Neo" pitchFamily="34" charset="-120"/>
+              </a:rPr>
+              <a:t>더 높은 연산 성능</a:t>
+            </a:r>
+            <a:endParaRPr lang="en-US" sz="1150" dirty="0"/>
+          </a:p>
+        </p:txBody>
+      </p:sp>
+      <p:sp>
+        <p:nvSpPr>
+          <p:cNvPr id="10" name="Shape 8"/>
+          <p:cNvSpPr/>
+          <p:nvPr/>
+        </p:nvSpPr>
+        <p:spPr>
+          <a:xfrm>
+            <a:off x="3319272" y="2880360"/>
+            <a:ext cx="2697480" cy="1828800"/>
+          </a:xfrm>
+          <a:prstGeom prst="roundRect">
+            <a:avLst>
+              <a:gd name="adj" fmla="val 2000"/>
+            </a:avLst>
+          </a:prstGeom>
+          <a:solidFill>
+            <a:srgbClr val="FFFFFF"/>
+          </a:solidFill>
+          <a:ln/>
+        </p:spPr>
+      </p:sp>
+      <p:sp>
+        <p:nvSpPr>
+          <p:cNvPr id="11" name="Shape 9"/>
+          <p:cNvSpPr/>
+          <p:nvPr/>
+        </p:nvSpPr>
+        <p:spPr>
+          <a:xfrm>
+            <a:off x="3547872" y="3108960"/>
+            <a:ext cx="457200" cy="457200"/>
+          </a:xfrm>
+          <a:prstGeom prst="ellipse">
+            <a:avLst/>
+          </a:prstGeom>
+          <a:solidFill>
+            <a:srgbClr val="F58220"/>
+          </a:solidFill>
+          <a:ln/>
+        </p:spPr>
+      </p:sp>
+      <p:sp>
+        <p:nvSpPr>
+          <p:cNvPr id="12" name="Text 10"/>
+          <p:cNvSpPr/>
+          <p:nvPr/>
+        </p:nvSpPr>
+        <p:spPr>
+          <a:xfrm>
+            <a:off x="3547872" y="3657600"/>
+            <a:ext cx="2286000" cy="365760"/>
+          </a:xfrm>
+          <a:prstGeom prst="rect">
+            <a:avLst/>
+          </a:prstGeom>
+          <a:noFill/>
+          <a:ln/>
+        </p:spPr>
+        <p:txBody>
+          <a:bodyPr wrap="square" lIns="0" tIns="0" rIns="0" bIns="0" rtlCol="0" anchor="ctr"/>
+          <a:lstStyle/>
+          <a:p>
+            <a:pPr indent="0" marL="0">
+              <a:buNone/>
+            </a:pPr>
+            <a:r>
+              <a:rPr lang="en-US" sz="1500" b="1" dirty="0">
+                <a:solidFill>
+                  <a:srgbClr val="043B72"/>
+                </a:solidFill>
+                <a:latin typeface="Spoqa Han Sans Neo" pitchFamily="34" charset="0"/>
+                <a:ea typeface="Spoqa Han Sans Neo" pitchFamily="34" charset="-122"/>
+                <a:cs typeface="Spoqa Han Sans Neo" pitchFamily="34" charset="-120"/>
+              </a:rPr>
+              <a:t>전력 효율</a:t>
+            </a:r>
+            <a:endParaRPr lang="en-US" sz="1500" dirty="0"/>
+          </a:p>
+        </p:txBody>
+      </p:sp>
+      <p:sp>
+        <p:nvSpPr>
+          <p:cNvPr id="13" name="Text 11"/>
+          <p:cNvSpPr/>
+          <p:nvPr/>
+        </p:nvSpPr>
+        <p:spPr>
+          <a:xfrm>
+            <a:off x="3547872" y="4023360"/>
+            <a:ext cx="2286000" cy="640080"/>
+          </a:xfrm>
+          <a:prstGeom prst="rect">
+            <a:avLst/>
+          </a:prstGeom>
+          <a:noFill/>
+          <a:ln/>
+        </p:spPr>
+        <p:txBody>
+          <a:bodyPr wrap="square" lIns="0" tIns="0" rIns="0" bIns="0" rtlCol="0" anchor="ctr"/>
+          <a:lstStyle/>
+          <a:p>
+            <a:pPr indent="0" marL="0">
+              <a:lnSpc>
+                <a:spcPts val="1400"/>
+              </a:lnSpc>
+              <a:buNone/>
+            </a:pPr>
+            <a:r>
+              <a:rPr lang="en-US" sz="1150" dirty="0">
+                <a:solidFill>
+                  <a:srgbClr val="3D3D3D"/>
+                </a:solidFill>
+                <a:latin typeface="Spoqa Han Sans Neo" pitchFamily="34" charset="0"/>
+                <a:ea typeface="Spoqa Han Sans Neo" pitchFamily="34" charset="-122"/>
+                <a:cs typeface="Spoqa Han Sans Neo" pitchFamily="34" charset="-120"/>
+              </a:rPr>
+              <a:t>AI 시스템의 전력·</a:t>
+            </a:r>
+            <a:endParaRPr lang="en-US" sz="1150" dirty="0"/>
+          </a:p>
+          <a:p>
+            <a:pPr indent="0" marL="0">
+              <a:lnSpc>
+                <a:spcPts val="1400"/>
+              </a:lnSpc>
+              <a:buNone/>
+            </a:pPr>
+            <a:r>
+              <a:rPr lang="en-US" sz="1150" dirty="0">
+                <a:solidFill>
+                  <a:srgbClr val="3D3D3D"/>
+                </a:solidFill>
+                <a:latin typeface="Spoqa Han Sans Neo" pitchFamily="34" charset="0"/>
+                <a:ea typeface="Spoqa Han Sans Neo" pitchFamily="34" charset="-122"/>
+                <a:cs typeface="Spoqa Han Sans Neo" pitchFamily="34" charset="-120"/>
+              </a:rPr>
+              <a:t>비용을 낮추는 기술</a:t>
+            </a:r>
+            <a:endParaRPr lang="en-US" sz="1150" dirty="0"/>
+          </a:p>
+        </p:txBody>
+      </p:sp>
+      <p:sp>
+        <p:nvSpPr>
+          <p:cNvPr id="14" name="Shape 12"/>
+          <p:cNvSpPr/>
+          <p:nvPr/>
+        </p:nvSpPr>
+        <p:spPr>
+          <a:xfrm>
+            <a:off x="6135624" y="2880360"/>
+            <a:ext cx="2697480" cy="1828800"/>
+          </a:xfrm>
+          <a:prstGeom prst="roundRect">
+            <a:avLst>
+              <a:gd name="adj" fmla="val 2000"/>
+            </a:avLst>
+          </a:prstGeom>
+          <a:solidFill>
+            <a:srgbClr val="FFFFFF"/>
+          </a:solidFill>
+          <a:ln/>
+        </p:spPr>
+      </p:sp>
+      <p:sp>
+        <p:nvSpPr>
+          <p:cNvPr id="15" name="Shape 13"/>
+          <p:cNvSpPr/>
+          <p:nvPr/>
+        </p:nvSpPr>
+        <p:spPr>
+          <a:xfrm>
+            <a:off x="6364224" y="3108960"/>
+            <a:ext cx="457200" cy="457200"/>
+          </a:xfrm>
+          <a:prstGeom prst="ellipse">
+            <a:avLst/>
+          </a:prstGeom>
+          <a:solidFill>
+            <a:srgbClr val="F58220"/>
+          </a:solidFill>
+          <a:ln/>
+        </p:spPr>
+      </p:sp>
+      <p:sp>
+        <p:nvSpPr>
+          <p:cNvPr id="16" name="Text 14"/>
+          <p:cNvSpPr/>
+          <p:nvPr/>
+        </p:nvSpPr>
+        <p:spPr>
+          <a:xfrm>
+            <a:off x="6364224" y="3657600"/>
+            <a:ext cx="2286000" cy="365760"/>
+          </a:xfrm>
+          <a:prstGeom prst="rect">
+            <a:avLst/>
+          </a:prstGeom>
+          <a:noFill/>
+          <a:ln/>
+        </p:spPr>
+        <p:txBody>
+          <a:bodyPr wrap="square" lIns="0" tIns="0" rIns="0" bIns="0" rtlCol="0" anchor="ctr"/>
+          <a:lstStyle/>
+          <a:p>
+            <a:pPr indent="0" marL="0">
+              <a:buNone/>
+            </a:pPr>
+            <a:r>
+              <a:rPr lang="en-US" sz="1500" b="1" dirty="0">
+                <a:solidFill>
+                  <a:srgbClr val="043B72"/>
+                </a:solidFill>
+                <a:latin typeface="Spoqa Han Sans Neo" pitchFamily="34" charset="0"/>
+                <a:ea typeface="Spoqa Han Sans Neo" pitchFamily="34" charset="-122"/>
+                <a:cs typeface="Spoqa Han Sans Neo" pitchFamily="34" charset="-120"/>
+              </a:rPr>
+              <a:t>공정 미세화</a:t>
+            </a:r>
+            <a:endParaRPr lang="en-US" sz="1500" dirty="0"/>
+          </a:p>
+        </p:txBody>
+      </p:sp>
+      <p:sp>
+        <p:nvSpPr>
+          <p:cNvPr id="17" name="Text 15"/>
+          <p:cNvSpPr/>
+          <p:nvPr/>
+        </p:nvSpPr>
+        <p:spPr>
+          <a:xfrm>
+            <a:off x="6364224" y="4023360"/>
+            <a:ext cx="2286000" cy="640080"/>
+          </a:xfrm>
+          <a:prstGeom prst="rect">
+            <a:avLst/>
+          </a:prstGeom>
+          <a:noFill/>
+          <a:ln/>
+        </p:spPr>
+        <p:txBody>
+          <a:bodyPr wrap="square" lIns="0" tIns="0" rIns="0" bIns="0" rtlCol="0" anchor="ctr"/>
+          <a:lstStyle/>
+          <a:p>
+            <a:pPr indent="0" marL="0">
+              <a:lnSpc>
+                <a:spcPts val="1400"/>
+              </a:lnSpc>
+              <a:buNone/>
+            </a:pPr>
+            <a:r>
+              <a:rPr lang="en-US" sz="1150" dirty="0">
+                <a:solidFill>
+                  <a:srgbClr val="3D3D3D"/>
+                </a:solidFill>
+                <a:latin typeface="Spoqa Han Sans Neo" pitchFamily="34" charset="0"/>
+                <a:ea typeface="Spoqa Han Sans Neo" pitchFamily="34" charset="-122"/>
+                <a:cs typeface="Spoqa Han Sans Neo" pitchFamily="34" charset="-120"/>
+              </a:rPr>
+              <a:t>높은 수율의</a:t>
+            </a:r>
+            <a:endParaRPr lang="en-US" sz="1150" dirty="0"/>
+          </a:p>
+          <a:p>
+            <a:pPr indent="0" marL="0">
+              <a:lnSpc>
+                <a:spcPts val="1400"/>
+              </a:lnSpc>
+              <a:buNone/>
+            </a:pPr>
+            <a:r>
+              <a:rPr lang="en-US" sz="1150" dirty="0">
+                <a:solidFill>
+                  <a:srgbClr val="3D3D3D"/>
+                </a:solidFill>
+                <a:latin typeface="Spoqa Han Sans Neo" pitchFamily="34" charset="0"/>
+                <a:ea typeface="Spoqa Han Sans Neo" pitchFamily="34" charset="-122"/>
+                <a:cs typeface="Spoqa Han Sans Neo" pitchFamily="34" charset="-120"/>
+              </a:rPr>
+              <a:t>첨단 공정 로드맵</a:t>
+            </a:r>
+            <a:endParaRPr lang="en-US" sz="1150" dirty="0"/>
+          </a:p>
+        </p:txBody>
+      </p:sp>
+      <p:sp>
+        <p:nvSpPr>
+          <p:cNvPr id="18" name="Shape 16"/>
+          <p:cNvSpPr/>
+          <p:nvPr/>
+        </p:nvSpPr>
+        <p:spPr>
+          <a:xfrm>
+            <a:off x="8951976" y="2880360"/>
+            <a:ext cx="2697480" cy="1828800"/>
+          </a:xfrm>
+          <a:prstGeom prst="roundRect">
+            <a:avLst>
+              <a:gd name="adj" fmla="val 2000"/>
+            </a:avLst>
+          </a:prstGeom>
+          <a:solidFill>
+            <a:srgbClr val="FFFFFF"/>
+          </a:solidFill>
+          <a:ln/>
+        </p:spPr>
+      </p:sp>
+      <p:sp>
+        <p:nvSpPr>
+          <p:cNvPr id="19" name="Shape 17"/>
+          <p:cNvSpPr/>
+          <p:nvPr/>
+        </p:nvSpPr>
+        <p:spPr>
+          <a:xfrm>
+            <a:off x="9180576" y="3108960"/>
+            <a:ext cx="457200" cy="457200"/>
+          </a:xfrm>
+          <a:prstGeom prst="ellipse">
+            <a:avLst/>
+          </a:prstGeom>
+          <a:solidFill>
+            <a:srgbClr val="F58220"/>
+          </a:solidFill>
+          <a:ln/>
+        </p:spPr>
+      </p:sp>
+      <p:sp>
+        <p:nvSpPr>
+          <p:cNvPr id="20" name="Text 18"/>
+          <p:cNvSpPr/>
+          <p:nvPr/>
+        </p:nvSpPr>
+        <p:spPr>
+          <a:xfrm>
+            <a:off x="9180576" y="3657600"/>
+            <a:ext cx="2286000" cy="365760"/>
+          </a:xfrm>
+          <a:prstGeom prst="rect">
+            <a:avLst/>
+          </a:prstGeom>
+          <a:noFill/>
+          <a:ln/>
+        </p:spPr>
+        <p:txBody>
+          <a:bodyPr wrap="square" lIns="0" tIns="0" rIns="0" bIns="0" rtlCol="0" anchor="ctr"/>
+          <a:lstStyle/>
+          <a:p>
+            <a:pPr indent="0" marL="0">
+              <a:buNone/>
+            </a:pPr>
+            <a:r>
+              <a:rPr lang="en-US" sz="1500" b="1" dirty="0">
+                <a:solidFill>
+                  <a:srgbClr val="043B72"/>
+                </a:solidFill>
+                <a:latin typeface="Spoqa Han Sans Neo" pitchFamily="34" charset="0"/>
+                <a:ea typeface="Spoqa Han Sans Neo" pitchFamily="34" charset="-122"/>
+                <a:cs typeface="Spoqa Han Sans Neo" pitchFamily="34" charset="-120"/>
+              </a:rPr>
+              <a:t>첨단 패키징</a:t>
+            </a:r>
+            <a:endParaRPr lang="en-US" sz="1500" dirty="0"/>
+          </a:p>
+        </p:txBody>
+      </p:sp>
+      <p:sp>
+        <p:nvSpPr>
+          <p:cNvPr id="21" name="Text 19"/>
+          <p:cNvSpPr/>
+          <p:nvPr/>
+        </p:nvSpPr>
+        <p:spPr>
+          <a:xfrm>
+            <a:off x="9180576" y="4023360"/>
+            <a:ext cx="2286000" cy="640080"/>
+          </a:xfrm>
+          <a:prstGeom prst="rect">
+            <a:avLst/>
+          </a:prstGeom>
+          <a:noFill/>
+          <a:ln/>
+        </p:spPr>
+        <p:txBody>
+          <a:bodyPr wrap="square" lIns="0" tIns="0" rIns="0" bIns="0" rtlCol="0" anchor="ctr"/>
+          <a:lstStyle/>
+          <a:p>
+            <a:pPr indent="0" marL="0">
+              <a:lnSpc>
+                <a:spcPts val="1400"/>
+              </a:lnSpc>
+              <a:buNone/>
+            </a:pPr>
+            <a:r>
+              <a:rPr lang="en-US" sz="1150" dirty="0">
+                <a:solidFill>
+                  <a:srgbClr val="3D3D3D"/>
+                </a:solidFill>
+                <a:latin typeface="Spoqa Han Sans Neo" pitchFamily="34" charset="0"/>
+                <a:ea typeface="Spoqa Han Sans Neo" pitchFamily="34" charset="-122"/>
+                <a:cs typeface="Spoqa Han Sans Neo" pitchFamily="34" charset="-120"/>
+              </a:rPr>
+              <a:t>이종집적·2.5D/3D</a:t>
+            </a:r>
+            <a:endParaRPr lang="en-US" sz="1150" dirty="0"/>
+          </a:p>
+          <a:p>
+            <a:pPr indent="0" marL="0">
+              <a:lnSpc>
+                <a:spcPts val="1400"/>
+              </a:lnSpc>
+              <a:buNone/>
+            </a:pPr>
+            <a:r>
+              <a:rPr lang="en-US" sz="1150" dirty="0">
+                <a:solidFill>
+                  <a:srgbClr val="3D3D3D"/>
+                </a:solidFill>
+                <a:latin typeface="Spoqa Han Sans Neo" pitchFamily="34" charset="0"/>
+                <a:ea typeface="Spoqa Han Sans Neo" pitchFamily="34" charset="-122"/>
+                <a:cs typeface="Spoqa Han Sans Neo" pitchFamily="34" charset="-120"/>
+              </a:rPr>
+              <a:t>장비와 소재</a:t>
+            </a:r>
+            <a:endParaRPr lang="en-US" sz="1150" dirty="0"/>
+          </a:p>
+        </p:txBody>
+      </p:sp>
+      <p:sp>
+        <p:nvSpPr>
+          <p:cNvPr id="22" name="Shape 20"/>
+          <p:cNvSpPr/>
+          <p:nvPr/>
+        </p:nvSpPr>
+        <p:spPr>
+          <a:xfrm>
+            <a:off x="502920" y="4983480"/>
+            <a:ext cx="11183112" cy="960120"/>
+          </a:xfrm>
+          <a:prstGeom prst="roundRect">
+            <a:avLst>
+              <a:gd name="adj" fmla="val 3810"/>
+            </a:avLst>
+          </a:prstGeom>
+          <a:solidFill>
+            <a:srgbClr val="F58220"/>
+          </a:solidFill>
+          <a:ln/>
+        </p:spPr>
+      </p:sp>
+      <p:sp>
+        <p:nvSpPr>
+          <p:cNvPr id="23" name="Text 21"/>
+          <p:cNvSpPr/>
+          <p:nvPr/>
+        </p:nvSpPr>
+        <p:spPr>
+          <a:xfrm>
+            <a:off x="777240" y="4983480"/>
+            <a:ext cx="10607040" cy="960120"/>
+          </a:xfrm>
+          <a:prstGeom prst="rect">
+            <a:avLst/>
+          </a:prstGeom>
+          <a:noFill/>
+          <a:ln/>
+        </p:spPr>
+        <p:txBody>
+          <a:bodyPr wrap="square" lIns="0" tIns="0" rIns="0" bIns="0" rtlCol="0" anchor="ctr"/>
+          <a:lstStyle/>
+          <a:p>
+            <a:pPr indent="0" marL="0">
+              <a:lnSpc>
+                <a:spcPts val="2000"/>
+              </a:lnSpc>
+              <a:buNone/>
+            </a:pPr>
+            <a:r>
+              <a:rPr lang="en-US" sz="1500" b="1" dirty="0">
+                <a:solidFill>
+                  <a:srgbClr val="FFFFFF"/>
+                </a:solidFill>
+                <a:latin typeface="Spoqa Han Sans Neo" pitchFamily="34" charset="0"/>
+                <a:ea typeface="Spoqa Han Sans Neo" pitchFamily="34" charset="-122"/>
+                <a:cs typeface="Spoqa Han Sans Neo" pitchFamily="34" charset="-120"/>
+              </a:rPr>
+              <a:t>단기 투자 사이클은 변할 수 있지만, 성능·전력효율·미세화·첨단패키징이라는 기술 로드맵의 방향은 쉽게 바뀌지 않는다.</a:t>
+            </a:r>
+            <a:endParaRPr lang="en-US" sz="1500" dirty="0"/>
+          </a:p>
+        </p:txBody>
+      </p:sp>
+      <p:sp>
+        <p:nvSpPr>
+          <p:cNvPr id="24" name="Text 22"/>
+          <p:cNvSpPr/>
+          <p:nvPr/>
+        </p:nvSpPr>
+        <p:spPr>
+          <a:xfrm>
+            <a:off x="11292840" y="6327648"/>
+            <a:ext cx="640080" cy="365760"/>
+          </a:xfrm>
+          <a:prstGeom prst="rect">
+            <a:avLst/>
+          </a:prstGeom>
+          <a:noFill/>
+          <a:ln/>
+        </p:spPr>
+        <p:txBody>
+          <a:bodyPr wrap="square" lIns="0" tIns="0" rIns="0" bIns="0" rtlCol="0" anchor="ctr"/>
+          <a:lstStyle/>
+          <a:p>
+            <a:pPr algn="r" indent="0" marL="0">
+              <a:buNone/>
+            </a:pPr>
+            <a:r>
+              <a:rPr lang="en-US" sz="1100" b="1" dirty="0">
+                <a:solidFill>
+                  <a:srgbClr val="6C6C6C"/>
+                </a:solidFill>
+                <a:latin typeface="Spoqa Han Sans Neo" pitchFamily="34" charset="0"/>
+                <a:ea typeface="Spoqa Han Sans Neo" pitchFamily="34" charset="-122"/>
+                <a:cs typeface="Spoqa Han Sans Neo" pitchFamily="34" charset="-120"/>
+              </a:rPr>
+              <a:t>16</a:t>
+            </a:r>
+            <a:endParaRPr lang="en-US" sz="1100" dirty="0"/>
+          </a:p>
+        </p:txBody>
+      </p:sp>
+    </p:spTree>
+  </p:cSld>
+  <p:clrMapOvr>
+    <a:masterClrMapping/>
+  </p:clrMapOvr>
+</p:sld>
+</file>
+
+<file path=ppt/slides/slide17.xml><?xml version="1.0" encoding="utf-8"?>
+<p:sld xmlns:a="http://schemas.openxmlformats.org/drawingml/2006/main" xmlns:r="http://schemas.openxmlformats.org/officeDocument/2006/relationships" xmlns:p="http://schemas.openxmlformats.org/presentationml/2006/main">
+  <p:cSld name="Slide 17">
+    <p:bg>
+      <p:bgPr>
+        <a:solidFill>
+          <a:srgbClr val="FFFFFF"/>
+        </a:solidFill>
+      </p:bgPr>
+    </p:bg>
+    <p:spTree>
+      <p:nvGrpSpPr>
+        <p:cNvPr id="1" name=""/>
+        <p:cNvGrpSpPr/>
+        <p:nvPr/>
+      </p:nvGrpSpPr>
+      <p:grpSpPr>
+        <a:xfrm>
+          <a:off x="0" y="0"/>
+          <a:ext cx="0" cy="0"/>
+          <a:chOff x="0" y="0"/>
+          <a:chExt cx="0" cy="0"/>
+        </a:xfrm>
+      </p:grpSpPr>
+      <p:sp>
+        <p:nvSpPr>
+          <p:cNvPr id="2" name="Shape 0"/>
+          <p:cNvSpPr/>
+          <p:nvPr/>
+        </p:nvSpPr>
+        <p:spPr>
+          <a:xfrm>
+            <a:off x="502920" y="502920"/>
+            <a:ext cx="502920" cy="45720"/>
+          </a:xfrm>
+          <a:prstGeom prst="rect">
+            <a:avLst/>
+          </a:prstGeom>
+          <a:solidFill>
+            <a:srgbClr val="F58220"/>
+          </a:solidFill>
+          <a:ln/>
+        </p:spPr>
+      </p:sp>
+      <p:sp>
+        <p:nvSpPr>
+          <p:cNvPr id="3" name="Text 1"/>
+          <p:cNvSpPr/>
+          <p:nvPr/>
+        </p:nvSpPr>
+        <p:spPr>
+          <a:xfrm>
+            <a:off x="502920" y="603504"/>
+            <a:ext cx="10058400" cy="274320"/>
+          </a:xfrm>
+          <a:prstGeom prst="rect">
+            <a:avLst/>
+          </a:prstGeom>
+          <a:noFill/>
+          <a:ln/>
+        </p:spPr>
+        <p:txBody>
+          <a:bodyPr wrap="square" lIns="0" tIns="0" rIns="0" bIns="0" rtlCol="0" anchor="ctr"/>
+          <a:lstStyle/>
+          <a:p>
+            <a:pPr indent="0" marL="0">
+              <a:buNone/>
+            </a:pPr>
+            <a:r>
+              <a:rPr lang="en-US" sz="1200" b="1" spc="100" kern="0" dirty="0">
+                <a:solidFill>
+                  <a:srgbClr val="F58220"/>
+                </a:solidFill>
+                <a:latin typeface="Spoqa Han Sans Neo" pitchFamily="34" charset="0"/>
+                <a:ea typeface="Spoqa Han Sans Neo" pitchFamily="34" charset="-122"/>
+                <a:cs typeface="Spoqa Han Sans Neo" pitchFamily="34" charset="-120"/>
+              </a:rPr>
+              <a:t>SUMMARY</a:t>
+            </a:r>
+            <a:endParaRPr lang="en-US" sz="1200" dirty="0"/>
+          </a:p>
+        </p:txBody>
+      </p:sp>
+      <p:sp>
+        <p:nvSpPr>
+          <p:cNvPr id="4" name="Text 2"/>
+          <p:cNvSpPr/>
+          <p:nvPr/>
+        </p:nvSpPr>
+        <p:spPr>
+          <a:xfrm>
+            <a:off x="484632" y="896112"/>
+            <a:ext cx="11155680" cy="685800"/>
+          </a:xfrm>
+          <a:prstGeom prst="rect">
+            <a:avLst/>
+          </a:prstGeom>
+          <a:noFill/>
+          <a:ln/>
+        </p:spPr>
+        <p:txBody>
+          <a:bodyPr wrap="square" lIns="0" tIns="0" rIns="0" bIns="0" rtlCol="0" anchor="ctr"/>
+          <a:lstStyle/>
+          <a:p>
+            <a:pPr indent="0" marL="0">
+              <a:buNone/>
+            </a:pPr>
+            <a:r>
+              <a:rPr lang="en-US" sz="2700" b="1" dirty="0">
+                <a:solidFill>
+                  <a:srgbClr val="1A1A1A"/>
+                </a:solidFill>
+                <a:latin typeface="Spoqa Han Sans Neo" pitchFamily="34" charset="0"/>
+                <a:ea typeface="Spoqa Han Sans Neo" pitchFamily="34" charset="-122"/>
+                <a:cs typeface="Spoqa Han Sans Neo" pitchFamily="34" charset="-120"/>
+              </a:rPr>
+              <a:t>요약 &amp; 실적 시즌 관전 포인트</a:t>
+            </a:r>
+            <a:endParaRPr lang="en-US" sz="2700" dirty="0"/>
+          </a:p>
+        </p:txBody>
+      </p:sp>
+      <p:sp>
+        <p:nvSpPr>
+          <p:cNvPr id="5" name="Text 3"/>
+          <p:cNvSpPr/>
+          <p:nvPr/>
+        </p:nvSpPr>
+        <p:spPr>
+          <a:xfrm>
+            <a:off x="502920" y="1783080"/>
+            <a:ext cx="5486400" cy="320040"/>
+          </a:xfrm>
+          <a:prstGeom prst="rect">
+            <a:avLst/>
+          </a:prstGeom>
+          <a:noFill/>
+          <a:ln/>
+        </p:spPr>
+        <p:txBody>
+          <a:bodyPr wrap="square" lIns="0" tIns="0" rIns="0" bIns="0" rtlCol="0" anchor="ctr"/>
+          <a:lstStyle/>
+          <a:p>
+            <a:pPr indent="0" marL="0">
+              <a:buNone/>
+            </a:pPr>
+            <a:r>
+              <a:rPr lang="en-US" sz="1400" b="1" dirty="0">
+                <a:solidFill>
+                  <a:srgbClr val="043B72"/>
+                </a:solidFill>
+                <a:latin typeface="Spoqa Han Sans Neo" pitchFamily="34" charset="0"/>
+                <a:ea typeface="Spoqa Han Sans Neo" pitchFamily="34" charset="-122"/>
+                <a:cs typeface="Spoqa Han Sans Neo" pitchFamily="34" charset="-120"/>
+              </a:rPr>
+              <a:t>오늘의 5가지 메시지</a:t>
+            </a:r>
+            <a:endParaRPr lang="en-US" sz="1400" dirty="0"/>
+          </a:p>
+        </p:txBody>
+      </p:sp>
+      <p:sp>
+        <p:nvSpPr>
+          <p:cNvPr id="6" name="Shape 4"/>
+          <p:cNvSpPr/>
+          <p:nvPr/>
+        </p:nvSpPr>
+        <p:spPr>
+          <a:xfrm>
+            <a:off x="502920" y="2286000"/>
+            <a:ext cx="384048" cy="384048"/>
+          </a:xfrm>
+          <a:prstGeom prst="ellipse">
+            <a:avLst/>
+          </a:prstGeom>
+          <a:solidFill>
+            <a:srgbClr val="F58220"/>
+          </a:solidFill>
+          <a:ln/>
+        </p:spPr>
+      </p:sp>
+      <p:sp>
+        <p:nvSpPr>
+          <p:cNvPr id="7" name="Text 5"/>
+          <p:cNvSpPr/>
+          <p:nvPr/>
+        </p:nvSpPr>
+        <p:spPr>
+          <a:xfrm>
+            <a:off x="502920" y="2286000"/>
+            <a:ext cx="384048" cy="384048"/>
+          </a:xfrm>
+          <a:prstGeom prst="rect">
+            <a:avLst/>
+          </a:prstGeom>
+          <a:noFill/>
+          <a:ln/>
+        </p:spPr>
+        <p:txBody>
+          <a:bodyPr wrap="square" lIns="0" tIns="0" rIns="0" bIns="0" rtlCol="0" anchor="ctr"/>
+          <a:lstStyle/>
+          <a:p>
+            <a:pPr algn="ctr" indent="0" marL="0">
+              <a:buNone/>
+            </a:pPr>
+            <a:r>
+              <a:rPr lang="en-US" sz="1400" b="1" dirty="0">
+                <a:solidFill>
+                  <a:srgbClr val="FFFFFF"/>
+                </a:solidFill>
+                <a:latin typeface="Spoqa Han Sans Neo" pitchFamily="34" charset="0"/>
+                <a:ea typeface="Spoqa Han Sans Neo" pitchFamily="34" charset="-122"/>
+                <a:cs typeface="Spoqa Han Sans Neo" pitchFamily="34" charset="-120"/>
+              </a:rPr>
+              <a:t>1</a:t>
+            </a:r>
+            <a:endParaRPr lang="en-US" sz="1400" dirty="0"/>
+          </a:p>
+        </p:txBody>
+      </p:sp>
+      <p:sp>
+        <p:nvSpPr>
+          <p:cNvPr id="8" name="Text 6"/>
+          <p:cNvSpPr/>
+          <p:nvPr/>
+        </p:nvSpPr>
+        <p:spPr>
+          <a:xfrm>
+            <a:off x="1051560" y="2212848"/>
+            <a:ext cx="4892040" cy="603504"/>
+          </a:xfrm>
+          <a:prstGeom prst="rect">
+            <a:avLst/>
+          </a:prstGeom>
+          <a:noFill/>
+          <a:ln/>
+        </p:spPr>
+        <p:txBody>
+          <a:bodyPr wrap="square" lIns="0" tIns="0" rIns="0" bIns="0" rtlCol="0" anchor="ctr"/>
+          <a:lstStyle/>
+          <a:p>
+            <a:pPr indent="0" marL="0">
+              <a:lnSpc>
+                <a:spcPts val="1500"/>
+              </a:lnSpc>
+              <a:buNone/>
+            </a:pPr>
+            <a:r>
+              <a:rPr lang="en-US" sz="1200" dirty="0">
+                <a:solidFill>
+                  <a:srgbClr val="3D3D3D"/>
+                </a:solidFill>
+                <a:latin typeface="Spoqa Han Sans Neo" pitchFamily="34" charset="0"/>
+                <a:ea typeface="Spoqa Han Sans Neo" pitchFamily="34" charset="-122"/>
+                <a:cs typeface="Spoqa Han Sans Neo" pitchFamily="34" charset="-120"/>
+              </a:rPr>
+              <a:t>조정의 방아쇠는 키미 K3발 'AI 효율화' 우려 — 딥시크와 같은 논리.</a:t>
+            </a:r>
+            <a:endParaRPr lang="en-US" sz="1200" dirty="0"/>
+          </a:p>
+        </p:txBody>
+      </p:sp>
+      <p:sp>
+        <p:nvSpPr>
+          <p:cNvPr id="9" name="Shape 7"/>
+          <p:cNvSpPr/>
+          <p:nvPr/>
+        </p:nvSpPr>
+        <p:spPr>
+          <a:xfrm>
+            <a:off x="502920" y="2953512"/>
+            <a:ext cx="384048" cy="384048"/>
+          </a:xfrm>
+          <a:prstGeom prst="ellipse">
+            <a:avLst/>
+          </a:prstGeom>
+          <a:solidFill>
+            <a:srgbClr val="F58220"/>
+          </a:solidFill>
+          <a:ln/>
+        </p:spPr>
+      </p:sp>
+      <p:sp>
+        <p:nvSpPr>
+          <p:cNvPr id="10" name="Text 8"/>
+          <p:cNvSpPr/>
+          <p:nvPr/>
+        </p:nvSpPr>
+        <p:spPr>
+          <a:xfrm>
+            <a:off x="502920" y="2953512"/>
+            <a:ext cx="384048" cy="384048"/>
+          </a:xfrm>
+          <a:prstGeom prst="rect">
+            <a:avLst/>
+          </a:prstGeom>
+          <a:noFill/>
+          <a:ln/>
+        </p:spPr>
+        <p:txBody>
+          <a:bodyPr wrap="square" lIns="0" tIns="0" rIns="0" bIns="0" rtlCol="0" anchor="ctr"/>
+          <a:lstStyle/>
+          <a:p>
+            <a:pPr algn="ctr" indent="0" marL="0">
+              <a:buNone/>
+            </a:pPr>
+            <a:r>
+              <a:rPr lang="en-US" sz="1400" b="1" dirty="0">
+                <a:solidFill>
+                  <a:srgbClr val="FFFFFF"/>
+                </a:solidFill>
+                <a:latin typeface="Spoqa Han Sans Neo" pitchFamily="34" charset="0"/>
+                <a:ea typeface="Spoqa Han Sans Neo" pitchFamily="34" charset="-122"/>
+                <a:cs typeface="Spoqa Han Sans Neo" pitchFamily="34" charset="-120"/>
+              </a:rPr>
+              <a:t>2</a:t>
+            </a:r>
+            <a:endParaRPr lang="en-US" sz="1400" dirty="0"/>
+          </a:p>
+        </p:txBody>
+      </p:sp>
+      <p:sp>
+        <p:nvSpPr>
+          <p:cNvPr id="11" name="Text 9"/>
+          <p:cNvSpPr/>
+          <p:nvPr/>
+        </p:nvSpPr>
+        <p:spPr>
+          <a:xfrm>
+            <a:off x="1051560" y="2880360"/>
+            <a:ext cx="4892040" cy="603504"/>
+          </a:xfrm>
+          <a:prstGeom prst="rect">
+            <a:avLst/>
+          </a:prstGeom>
+          <a:noFill/>
+          <a:ln/>
+        </p:spPr>
+        <p:txBody>
+          <a:bodyPr wrap="square" lIns="0" tIns="0" rIns="0" bIns="0" rtlCol="0" anchor="ctr"/>
+          <a:lstStyle/>
+          <a:p>
+            <a:pPr indent="0" marL="0">
+              <a:lnSpc>
+                <a:spcPts val="1500"/>
+              </a:lnSpc>
+              <a:buNone/>
+            </a:pPr>
+            <a:r>
+              <a:rPr lang="en-US" sz="1200" dirty="0">
+                <a:solidFill>
+                  <a:srgbClr val="3D3D3D"/>
+                </a:solidFill>
+                <a:latin typeface="Spoqa Han Sans Neo" pitchFamily="34" charset="0"/>
+                <a:ea typeface="Spoqa Han Sans Neo" pitchFamily="34" charset="-122"/>
+                <a:cs typeface="Spoqa Han Sans Neo" pitchFamily="34" charset="-120"/>
+              </a:rPr>
+              <a:t>그러나 K3는 초대형 모델로 오히려 HBM·메모리 수요를 키운다.</a:t>
+            </a:r>
+            <a:endParaRPr lang="en-US" sz="1200" dirty="0"/>
+          </a:p>
+        </p:txBody>
+      </p:sp>
+      <p:sp>
+        <p:nvSpPr>
+          <p:cNvPr id="12" name="Shape 10"/>
+          <p:cNvSpPr/>
+          <p:nvPr/>
+        </p:nvSpPr>
+        <p:spPr>
+          <a:xfrm>
+            <a:off x="502920" y="3621024"/>
+            <a:ext cx="384048" cy="384048"/>
+          </a:xfrm>
+          <a:prstGeom prst="ellipse">
+            <a:avLst/>
+          </a:prstGeom>
+          <a:solidFill>
+            <a:srgbClr val="F58220"/>
+          </a:solidFill>
+          <a:ln/>
+        </p:spPr>
+      </p:sp>
+      <p:sp>
+        <p:nvSpPr>
+          <p:cNvPr id="13" name="Text 11"/>
+          <p:cNvSpPr/>
+          <p:nvPr/>
+        </p:nvSpPr>
+        <p:spPr>
+          <a:xfrm>
+            <a:off x="502920" y="3621024"/>
+            <a:ext cx="384048" cy="384048"/>
+          </a:xfrm>
+          <a:prstGeom prst="rect">
+            <a:avLst/>
+          </a:prstGeom>
+          <a:noFill/>
+          <a:ln/>
+        </p:spPr>
+        <p:txBody>
+          <a:bodyPr wrap="square" lIns="0" tIns="0" rIns="0" bIns="0" rtlCol="0" anchor="ctr"/>
+          <a:lstStyle/>
+          <a:p>
+            <a:pPr algn="ctr" indent="0" marL="0">
+              <a:buNone/>
+            </a:pPr>
+            <a:r>
+              <a:rPr lang="en-US" sz="1400" b="1" dirty="0">
+                <a:solidFill>
+                  <a:srgbClr val="FFFFFF"/>
+                </a:solidFill>
+                <a:latin typeface="Spoqa Han Sans Neo" pitchFamily="34" charset="0"/>
+                <a:ea typeface="Spoqa Han Sans Neo" pitchFamily="34" charset="-122"/>
+                <a:cs typeface="Spoqa Han Sans Neo" pitchFamily="34" charset="-120"/>
+              </a:rPr>
+              <a:t>3</a:t>
+            </a:r>
+            <a:endParaRPr lang="en-US" sz="1400" dirty="0"/>
+          </a:p>
+        </p:txBody>
+      </p:sp>
+      <p:sp>
+        <p:nvSpPr>
+          <p:cNvPr id="14" name="Text 12"/>
+          <p:cNvSpPr/>
+          <p:nvPr/>
+        </p:nvSpPr>
+        <p:spPr>
+          <a:xfrm>
+            <a:off x="1051560" y="3547872"/>
+            <a:ext cx="4892040" cy="603504"/>
+          </a:xfrm>
+          <a:prstGeom prst="rect">
+            <a:avLst/>
+          </a:prstGeom>
+          <a:noFill/>
+          <a:ln/>
+        </p:spPr>
+        <p:txBody>
+          <a:bodyPr wrap="square" lIns="0" tIns="0" rIns="0" bIns="0" rtlCol="0" anchor="ctr"/>
+          <a:lstStyle/>
+          <a:p>
+            <a:pPr indent="0" marL="0">
+              <a:lnSpc>
+                <a:spcPts val="1500"/>
+              </a:lnSpc>
+              <a:buNone/>
+            </a:pPr>
+            <a:r>
+              <a:rPr lang="en-US" sz="1200" dirty="0">
+                <a:solidFill>
+                  <a:srgbClr val="3D3D3D"/>
+                </a:solidFill>
+                <a:latin typeface="Spoqa Han Sans Neo" pitchFamily="34" charset="0"/>
+                <a:ea typeface="Spoqa Han Sans Neo" pitchFamily="34" charset="-122"/>
+                <a:cs typeface="Spoqa Han Sans Neo" pitchFamily="34" charset="-120"/>
+              </a:rPr>
+              <a:t>데이터센터 투자는 선행한다 — 단기 Capex와 장기 AI 보급은 분리.</a:t>
+            </a:r>
+            <a:endParaRPr lang="en-US" sz="1200" dirty="0"/>
+          </a:p>
+        </p:txBody>
+      </p:sp>
+      <p:sp>
+        <p:nvSpPr>
+          <p:cNvPr id="15" name="Shape 13"/>
+          <p:cNvSpPr/>
+          <p:nvPr/>
+        </p:nvSpPr>
+        <p:spPr>
+          <a:xfrm>
+            <a:off x="502920" y="4288536"/>
+            <a:ext cx="384048" cy="384048"/>
+          </a:xfrm>
+          <a:prstGeom prst="ellipse">
+            <a:avLst/>
+          </a:prstGeom>
+          <a:solidFill>
+            <a:srgbClr val="F58220"/>
+          </a:solidFill>
+          <a:ln/>
+        </p:spPr>
+      </p:sp>
+      <p:sp>
+        <p:nvSpPr>
+          <p:cNvPr id="16" name="Text 14"/>
+          <p:cNvSpPr/>
+          <p:nvPr/>
+        </p:nvSpPr>
+        <p:spPr>
+          <a:xfrm>
+            <a:off x="502920" y="4288536"/>
+            <a:ext cx="384048" cy="384048"/>
+          </a:xfrm>
+          <a:prstGeom prst="rect">
+            <a:avLst/>
+          </a:prstGeom>
+          <a:noFill/>
+          <a:ln/>
+        </p:spPr>
+        <p:txBody>
+          <a:bodyPr wrap="square" lIns="0" tIns="0" rIns="0" bIns="0" rtlCol="0" anchor="ctr"/>
+          <a:lstStyle/>
+          <a:p>
+            <a:pPr algn="ctr" indent="0" marL="0">
+              <a:buNone/>
+            </a:pPr>
+            <a:r>
+              <a:rPr lang="en-US" sz="1400" b="1" dirty="0">
+                <a:solidFill>
+                  <a:srgbClr val="FFFFFF"/>
+                </a:solidFill>
+                <a:latin typeface="Spoqa Han Sans Neo" pitchFamily="34" charset="0"/>
+                <a:ea typeface="Spoqa Han Sans Neo" pitchFamily="34" charset="-122"/>
+                <a:cs typeface="Spoqa Han Sans Neo" pitchFamily="34" charset="-120"/>
+              </a:rPr>
+              <a:t>4</a:t>
+            </a:r>
+            <a:endParaRPr lang="en-US" sz="1400" dirty="0"/>
+          </a:p>
+        </p:txBody>
+      </p:sp>
+      <p:sp>
+        <p:nvSpPr>
+          <p:cNvPr id="17" name="Text 15"/>
+          <p:cNvSpPr/>
+          <p:nvPr/>
+        </p:nvSpPr>
+        <p:spPr>
+          <a:xfrm>
+            <a:off x="1051560" y="4215384"/>
+            <a:ext cx="4892040" cy="603504"/>
+          </a:xfrm>
+          <a:prstGeom prst="rect">
+            <a:avLst/>
+          </a:prstGeom>
+          <a:noFill/>
+          <a:ln/>
+        </p:spPr>
+        <p:txBody>
+          <a:bodyPr wrap="square" lIns="0" tIns="0" rIns="0" bIns="0" rtlCol="0" anchor="ctr"/>
+          <a:lstStyle/>
+          <a:p>
+            <a:pPr indent="0" marL="0">
+              <a:lnSpc>
+                <a:spcPts val="1500"/>
+              </a:lnSpc>
+              <a:buNone/>
+            </a:pPr>
+            <a:r>
+              <a:rPr lang="en-US" sz="1200" dirty="0">
+                <a:solidFill>
+                  <a:srgbClr val="3D3D3D"/>
+                </a:solidFill>
+                <a:latin typeface="Spoqa Han Sans Neo" pitchFamily="34" charset="0"/>
+                <a:ea typeface="Spoqa Han Sans Neo" pitchFamily="34" charset="-122"/>
+                <a:cs typeface="Spoqa Han Sans Neo" pitchFamily="34" charset="-120"/>
+              </a:rPr>
+              <a:t>국내 투 톱: SK '독주'에서 삼성 HBM4 반격으로 '양강 경쟁' 전환.</a:t>
+            </a:r>
+            <a:endParaRPr lang="en-US" sz="1200" dirty="0"/>
+          </a:p>
+        </p:txBody>
+      </p:sp>
+      <p:sp>
+        <p:nvSpPr>
+          <p:cNvPr id="18" name="Shape 16"/>
+          <p:cNvSpPr/>
+          <p:nvPr/>
+        </p:nvSpPr>
+        <p:spPr>
+          <a:xfrm>
+            <a:off x="502920" y="4956048"/>
+            <a:ext cx="384048" cy="384048"/>
+          </a:xfrm>
+          <a:prstGeom prst="ellipse">
+            <a:avLst/>
+          </a:prstGeom>
+          <a:solidFill>
+            <a:srgbClr val="F58220"/>
+          </a:solidFill>
+          <a:ln/>
+        </p:spPr>
+      </p:sp>
+      <p:sp>
+        <p:nvSpPr>
+          <p:cNvPr id="19" name="Text 17"/>
+          <p:cNvSpPr/>
+          <p:nvPr/>
+        </p:nvSpPr>
+        <p:spPr>
+          <a:xfrm>
+            <a:off x="502920" y="4956048"/>
+            <a:ext cx="384048" cy="384048"/>
+          </a:xfrm>
+          <a:prstGeom prst="rect">
+            <a:avLst/>
+          </a:prstGeom>
+          <a:noFill/>
+          <a:ln/>
+        </p:spPr>
+        <p:txBody>
+          <a:bodyPr wrap="square" lIns="0" tIns="0" rIns="0" bIns="0" rtlCol="0" anchor="ctr"/>
+          <a:lstStyle/>
+          <a:p>
+            <a:pPr algn="ctr" indent="0" marL="0">
+              <a:buNone/>
+            </a:pPr>
+            <a:r>
+              <a:rPr lang="en-US" sz="1400" b="1" dirty="0">
+                <a:solidFill>
+                  <a:srgbClr val="FFFFFF"/>
+                </a:solidFill>
+                <a:latin typeface="Spoqa Han Sans Neo" pitchFamily="34" charset="0"/>
+                <a:ea typeface="Spoqa Han Sans Neo" pitchFamily="34" charset="-122"/>
+                <a:cs typeface="Spoqa Han Sans Neo" pitchFamily="34" charset="-120"/>
+              </a:rPr>
+              <a:t>5</a:t>
+            </a:r>
+            <a:endParaRPr lang="en-US" sz="1400" dirty="0"/>
+          </a:p>
+        </p:txBody>
+      </p:sp>
+      <p:sp>
+        <p:nvSpPr>
+          <p:cNvPr id="20" name="Text 18"/>
+          <p:cNvSpPr/>
+          <p:nvPr/>
+        </p:nvSpPr>
+        <p:spPr>
+          <a:xfrm>
+            <a:off x="1051560" y="4882896"/>
+            <a:ext cx="4892040" cy="603504"/>
+          </a:xfrm>
+          <a:prstGeom prst="rect">
+            <a:avLst/>
+          </a:prstGeom>
+          <a:noFill/>
+          <a:ln/>
+        </p:spPr>
+        <p:txBody>
+          <a:bodyPr wrap="square" lIns="0" tIns="0" rIns="0" bIns="0" rtlCol="0" anchor="ctr"/>
+          <a:lstStyle/>
+          <a:p>
+            <a:pPr indent="0" marL="0">
+              <a:lnSpc>
+                <a:spcPts val="1500"/>
+              </a:lnSpc>
+              <a:buNone/>
+            </a:pPr>
+            <a:r>
+              <a:rPr lang="en-US" sz="1200" dirty="0">
+                <a:solidFill>
+                  <a:srgbClr val="3D3D3D"/>
+                </a:solidFill>
+                <a:latin typeface="Spoqa Han Sans Neo" pitchFamily="34" charset="0"/>
+                <a:ea typeface="Spoqa Han Sans Neo" pitchFamily="34" charset="-122"/>
+                <a:cs typeface="Spoqa Han Sans Neo" pitchFamily="34" charset="-120"/>
+              </a:rPr>
+              <a:t>통제 가능한 '기술 로드맵'을 갖춘 기업에 집중하라.</a:t>
+            </a:r>
+            <a:endParaRPr lang="en-US" sz="1200" dirty="0"/>
+          </a:p>
+        </p:txBody>
+      </p:sp>
+      <p:sp>
+        <p:nvSpPr>
+          <p:cNvPr id="21" name="Shape 19"/>
+          <p:cNvSpPr/>
+          <p:nvPr/>
+        </p:nvSpPr>
+        <p:spPr>
+          <a:xfrm>
+            <a:off x="6199632" y="1783080"/>
+            <a:ext cx="5486400" cy="3794760"/>
+          </a:xfrm>
+          <a:prstGeom prst="roundRect">
+            <a:avLst>
+              <a:gd name="adj" fmla="val 964"/>
+            </a:avLst>
+          </a:prstGeom>
+          <a:solidFill>
+            <a:srgbClr val="ECEFF4"/>
+          </a:solidFill>
+          <a:ln/>
+        </p:spPr>
+      </p:sp>
+      <p:sp>
+        <p:nvSpPr>
+          <p:cNvPr id="22" name="Text 20"/>
+          <p:cNvSpPr/>
+          <p:nvPr/>
+        </p:nvSpPr>
+        <p:spPr>
+          <a:xfrm>
+            <a:off x="6446520" y="1965960"/>
+            <a:ext cx="5029200" cy="320040"/>
+          </a:xfrm>
+          <a:prstGeom prst="rect">
+            <a:avLst/>
+          </a:prstGeom>
+          <a:noFill/>
+          <a:ln/>
+        </p:spPr>
+        <p:txBody>
+          <a:bodyPr wrap="square" lIns="0" tIns="0" rIns="0" bIns="0" rtlCol="0" anchor="ctr"/>
+          <a:lstStyle/>
+          <a:p>
+            <a:pPr indent="0" marL="0">
+              <a:buNone/>
+            </a:pPr>
+            <a:r>
+              <a:rPr lang="en-US" sz="1400" b="1" dirty="0">
+                <a:solidFill>
+                  <a:srgbClr val="1A1A1A"/>
+                </a:solidFill>
+                <a:latin typeface="Spoqa Han Sans Neo" pitchFamily="34" charset="0"/>
+                <a:ea typeface="Spoqa Han Sans Neo" pitchFamily="34" charset="-122"/>
+                <a:cs typeface="Spoqa Han Sans Neo" pitchFamily="34" charset="-120"/>
+              </a:rPr>
+              <a:t>실적 시즌 체크리스트 (7/22~7/30)</a:t>
+            </a:r>
+            <a:endParaRPr lang="en-US" sz="1400" dirty="0"/>
+          </a:p>
+        </p:txBody>
+      </p:sp>
+      <p:sp>
+        <p:nvSpPr>
+          <p:cNvPr id="23" name="Shape 21"/>
+          <p:cNvSpPr/>
+          <p:nvPr/>
+        </p:nvSpPr>
+        <p:spPr>
+          <a:xfrm>
+            <a:off x="6446520" y="2423160"/>
             <a:ext cx="201168" cy="201168"/>
           </a:xfrm>
           <a:prstGeom prst="rect">
@@ -8515,13 +10930,13 @@
       </p:sp>
       <p:sp>
         <p:nvSpPr>
-          <p:cNvPr id="27" name="Text 25"/>
-          <p:cNvSpPr/>
-          <p:nvPr/>
-        </p:nvSpPr>
-        <p:spPr>
-          <a:xfrm>
-            <a:off x="6784848" y="2953512"/>
+          <p:cNvPr id="24" name="Text 22"/>
+          <p:cNvSpPr/>
+          <p:nvPr/>
+        </p:nvSpPr>
+        <p:spPr>
+          <a:xfrm>
+            <a:off x="6784848" y="2331720"/>
             <a:ext cx="4663440" cy="292608"/>
           </a:xfrm>
           <a:prstGeom prst="rect">
@@ -8546,7 +10961,7 @@
                 <a:ea typeface="Spoqa Han Sans Neo" pitchFamily="34" charset="-122"/>
                 <a:cs typeface="Spoqa Han Sans Neo" pitchFamily="34" charset="-120"/>
               </a:rPr>
-              <a:t>AI 수익화</a:t>
+              <a:t>Capex 가이던스</a:t>
             </a:r>
             <a:endParaRPr lang="en-US" sz="1250" dirty="0"/>
           </a:p>
@@ -8554,13 +10969,13 @@
       </p:sp>
       <p:sp>
         <p:nvSpPr>
-          <p:cNvPr id="28" name="Text 26"/>
-          <p:cNvSpPr/>
-          <p:nvPr/>
-        </p:nvSpPr>
-        <p:spPr>
-          <a:xfrm>
-            <a:off x="6784848" y="3218688"/>
+          <p:cNvPr id="25" name="Text 23"/>
+          <p:cNvSpPr/>
+          <p:nvPr/>
+        </p:nvSpPr>
+        <p:spPr>
+          <a:xfrm>
+            <a:off x="6784848" y="2596896"/>
             <a:ext cx="4663440" cy="320040"/>
           </a:xfrm>
           <a:prstGeom prst="rect">
@@ -8585,7 +11000,7 @@
                 <a:ea typeface="Spoqa Han Sans Neo" pitchFamily="34" charset="-122"/>
                 <a:cs typeface="Spoqa Han Sans Neo" pitchFamily="34" charset="-120"/>
               </a:rPr>
-              <a:t>$725B 투자 대비 매출 성장 속도</a:t>
+              <a:t>유지·상향 여부 = HBM 수요 지속 신호</a:t>
             </a:r>
             <a:endParaRPr lang="en-US" sz="1050" dirty="0"/>
           </a:p>
@@ -8593,13 +11008,13 @@
       </p:sp>
       <p:sp>
         <p:nvSpPr>
-          <p:cNvPr id="29" name="Shape 27"/>
-          <p:cNvSpPr/>
-          <p:nvPr/>
-        </p:nvSpPr>
-        <p:spPr>
-          <a:xfrm>
-            <a:off x="6446520" y="3666744"/>
+          <p:cNvPr id="26" name="Shape 24"/>
+          <p:cNvSpPr/>
+          <p:nvPr/>
+        </p:nvSpPr>
+        <p:spPr>
+          <a:xfrm>
+            <a:off x="6446520" y="3044952"/>
             <a:ext cx="201168" cy="201168"/>
           </a:xfrm>
           <a:prstGeom prst="rect">
@@ -8618,13 +11033,13 @@
       </p:sp>
       <p:sp>
         <p:nvSpPr>
-          <p:cNvPr id="30" name="Text 28"/>
-          <p:cNvSpPr/>
-          <p:nvPr/>
-        </p:nvSpPr>
-        <p:spPr>
-          <a:xfrm>
-            <a:off x="6784848" y="3575304"/>
+          <p:cNvPr id="27" name="Text 25"/>
+          <p:cNvSpPr/>
+          <p:nvPr/>
+        </p:nvSpPr>
+        <p:spPr>
+          <a:xfrm>
+            <a:off x="6784848" y="2953512"/>
             <a:ext cx="4663440" cy="292608"/>
           </a:xfrm>
           <a:prstGeom prst="rect">
@@ -8649,7 +11064,7 @@
                 <a:ea typeface="Spoqa Han Sans Neo" pitchFamily="34" charset="-122"/>
                 <a:cs typeface="Spoqa Han Sans Neo" pitchFamily="34" charset="-120"/>
               </a:rPr>
-              <a:t>클라우드 성장률</a:t>
+              <a:t>AI 수익화</a:t>
             </a:r>
             <a:endParaRPr lang="en-US" sz="1250" dirty="0"/>
           </a:p>
@@ -8657,13 +11072,13 @@
       </p:sp>
       <p:sp>
         <p:nvSpPr>
-          <p:cNvPr id="31" name="Text 29"/>
-          <p:cNvSpPr/>
-          <p:nvPr/>
-        </p:nvSpPr>
-        <p:spPr>
-          <a:xfrm>
-            <a:off x="6784848" y="3840480"/>
+          <p:cNvPr id="28" name="Text 26"/>
+          <p:cNvSpPr/>
+          <p:nvPr/>
+        </p:nvSpPr>
+        <p:spPr>
+          <a:xfrm>
+            <a:off x="6784848" y="3218688"/>
             <a:ext cx="4663440" cy="320040"/>
           </a:xfrm>
           <a:prstGeom prst="rect">
@@ -8688,7 +11103,7 @@
                 <a:ea typeface="Spoqa Han Sans Neo" pitchFamily="34" charset="-122"/>
                 <a:cs typeface="Spoqa Han Sans Neo" pitchFamily="34" charset="-120"/>
               </a:rPr>
-              <a:t>Azure·GCP·AWS 재가속 여부</a:t>
+              <a:t>$725B 투자 대비 매출 성장 속도</a:t>
             </a:r>
             <a:endParaRPr lang="en-US" sz="1050" dirty="0"/>
           </a:p>
@@ -8696,13 +11111,13 @@
       </p:sp>
       <p:sp>
         <p:nvSpPr>
-          <p:cNvPr id="32" name="Shape 30"/>
-          <p:cNvSpPr/>
-          <p:nvPr/>
-        </p:nvSpPr>
-        <p:spPr>
-          <a:xfrm>
-            <a:off x="6446520" y="4288536"/>
+          <p:cNvPr id="29" name="Shape 27"/>
+          <p:cNvSpPr/>
+          <p:nvPr/>
+        </p:nvSpPr>
+        <p:spPr>
+          <a:xfrm>
+            <a:off x="6446520" y="3666744"/>
             <a:ext cx="201168" cy="201168"/>
           </a:xfrm>
           <a:prstGeom prst="rect">
@@ -8721,13 +11136,13 @@
       </p:sp>
       <p:sp>
         <p:nvSpPr>
-          <p:cNvPr id="33" name="Text 31"/>
-          <p:cNvSpPr/>
-          <p:nvPr/>
-        </p:nvSpPr>
-        <p:spPr>
-          <a:xfrm>
-            <a:off x="6784848" y="4197096"/>
+          <p:cNvPr id="30" name="Text 28"/>
+          <p:cNvSpPr/>
+          <p:nvPr/>
+        </p:nvSpPr>
+        <p:spPr>
+          <a:xfrm>
+            <a:off x="6784848" y="3575304"/>
             <a:ext cx="4663440" cy="292608"/>
           </a:xfrm>
           <a:prstGeom prst="rect">
@@ -8752,7 +11167,7 @@
                 <a:ea typeface="Spoqa Han Sans Neo" pitchFamily="34" charset="-122"/>
                 <a:cs typeface="Spoqa Han Sans Neo" pitchFamily="34" charset="-120"/>
               </a:rPr>
-              <a:t>자체 칩(ASIC)</a:t>
+              <a:t>클라우드 성장률</a:t>
             </a:r>
             <a:endParaRPr lang="en-US" sz="1250" dirty="0"/>
           </a:p>
@@ -8760,13 +11175,13 @@
       </p:sp>
       <p:sp>
         <p:nvSpPr>
-          <p:cNvPr id="34" name="Text 32"/>
-          <p:cNvSpPr/>
-          <p:nvPr/>
-        </p:nvSpPr>
-        <p:spPr>
-          <a:xfrm>
-            <a:off x="6784848" y="4462272"/>
+          <p:cNvPr id="31" name="Text 29"/>
+          <p:cNvSpPr/>
+          <p:nvPr/>
+        </p:nvSpPr>
+        <p:spPr>
+          <a:xfrm>
+            <a:off x="6784848" y="3840480"/>
             <a:ext cx="4663440" cy="320040"/>
           </a:xfrm>
           <a:prstGeom prst="rect">
@@ -8791,7 +11206,7 @@
                 <a:ea typeface="Spoqa Han Sans Neo" pitchFamily="34" charset="-122"/>
                 <a:cs typeface="Spoqa Han Sans Neo" pitchFamily="34" charset="-120"/>
               </a:rPr>
-              <a:t>TPU·Trainium·MAIA 진척 → HBM 수요처 다변화</a:t>
+              <a:t>Azure·GCP·AWS 재가속 여부</a:t>
             </a:r>
             <a:endParaRPr lang="en-US" sz="1050" dirty="0"/>
           </a:p>
@@ -8799,13 +11214,13 @@
       </p:sp>
       <p:sp>
         <p:nvSpPr>
-          <p:cNvPr id="35" name="Shape 33"/>
-          <p:cNvSpPr/>
-          <p:nvPr/>
-        </p:nvSpPr>
-        <p:spPr>
-          <a:xfrm>
-            <a:off x="6446520" y="4910328"/>
+          <p:cNvPr id="32" name="Shape 30"/>
+          <p:cNvSpPr/>
+          <p:nvPr/>
+        </p:nvSpPr>
+        <p:spPr>
+          <a:xfrm>
+            <a:off x="6446520" y="4288536"/>
             <a:ext cx="201168" cy="201168"/>
           </a:xfrm>
           <a:prstGeom prst="rect">
@@ -8824,6 +11239,109 @@
       </p:sp>
       <p:sp>
         <p:nvSpPr>
+          <p:cNvPr id="33" name="Text 31"/>
+          <p:cNvSpPr/>
+          <p:nvPr/>
+        </p:nvSpPr>
+        <p:spPr>
+          <a:xfrm>
+            <a:off x="6784848" y="4197096"/>
+            <a:ext cx="4663440" cy="292608"/>
+          </a:xfrm>
+          <a:prstGeom prst="rect">
+            <a:avLst/>
+          </a:prstGeom>
+          <a:noFill/>
+          <a:ln/>
+        </p:spPr>
+        <p:txBody>
+          <a:bodyPr wrap="square" lIns="0" tIns="0" rIns="0" bIns="0" rtlCol="0" anchor="ctr"/>
+          <a:lstStyle/>
+          <a:p>
+            <a:pPr indent="0" marL="0">
+              <a:buNone/>
+            </a:pPr>
+            <a:r>
+              <a:rPr lang="en-US" sz="1250" b="1" dirty="0">
+                <a:solidFill>
+                  <a:srgbClr val="1A1A1A"/>
+                </a:solidFill>
+                <a:latin typeface="Spoqa Han Sans Neo" pitchFamily="34" charset="0"/>
+                <a:ea typeface="Spoqa Han Sans Neo" pitchFamily="34" charset="-122"/>
+                <a:cs typeface="Spoqa Han Sans Neo" pitchFamily="34" charset="-120"/>
+              </a:rPr>
+              <a:t>자체 칩(ASIC)</a:t>
+            </a:r>
+            <a:endParaRPr lang="en-US" sz="1250" dirty="0"/>
+          </a:p>
+        </p:txBody>
+      </p:sp>
+      <p:sp>
+        <p:nvSpPr>
+          <p:cNvPr id="34" name="Text 32"/>
+          <p:cNvSpPr/>
+          <p:nvPr/>
+        </p:nvSpPr>
+        <p:spPr>
+          <a:xfrm>
+            <a:off x="6784848" y="4462272"/>
+            <a:ext cx="4663440" cy="320040"/>
+          </a:xfrm>
+          <a:prstGeom prst="rect">
+            <a:avLst/>
+          </a:prstGeom>
+          <a:noFill/>
+          <a:ln/>
+        </p:spPr>
+        <p:txBody>
+          <a:bodyPr wrap="square" lIns="0" tIns="0" rIns="0" bIns="0" rtlCol="0" anchor="ctr"/>
+          <a:lstStyle/>
+          <a:p>
+            <a:pPr indent="0" marL="0">
+              <a:buNone/>
+            </a:pPr>
+            <a:r>
+              <a:rPr lang="en-US" sz="1050" dirty="0">
+                <a:solidFill>
+                  <a:srgbClr val="3D3D3D"/>
+                </a:solidFill>
+                <a:latin typeface="Spoqa Han Sans Neo" pitchFamily="34" charset="0"/>
+                <a:ea typeface="Spoqa Han Sans Neo" pitchFamily="34" charset="-122"/>
+                <a:cs typeface="Spoqa Han Sans Neo" pitchFamily="34" charset="-120"/>
+              </a:rPr>
+              <a:t>TPU·Trainium·MAIA 진척 → HBM 수요처 다변화</a:t>
+            </a:r>
+            <a:endParaRPr lang="en-US" sz="1050" dirty="0"/>
+          </a:p>
+        </p:txBody>
+      </p:sp>
+      <p:sp>
+        <p:nvSpPr>
+          <p:cNvPr id="35" name="Shape 33"/>
+          <p:cNvSpPr/>
+          <p:nvPr/>
+        </p:nvSpPr>
+        <p:spPr>
+          <a:xfrm>
+            <a:off x="6446520" y="4910328"/>
+            <a:ext cx="201168" cy="201168"/>
+          </a:xfrm>
+          <a:prstGeom prst="rect">
+            <a:avLst/>
+          </a:prstGeom>
+          <a:solidFill>
+            <a:srgbClr val="FFFFFF"/>
+          </a:solidFill>
+          <a:ln w="19050">
+            <a:solidFill>
+              <a:srgbClr val="F58220"/>
+            </a:solidFill>
+            <a:prstDash val="solid"/>
+          </a:ln>
+        </p:spPr>
+      </p:sp>
+      <p:sp>
+        <p:nvSpPr>
           <p:cNvPr id="36" name="Text 34"/>
           <p:cNvSpPr/>
           <p:nvPr/>
@@ -9002,7 +11520,7 @@
                 <a:ea typeface="Spoqa Han Sans Neo" pitchFamily="34" charset="-122"/>
                 <a:cs typeface="Spoqa Han Sans Neo" pitchFamily="34" charset="-120"/>
               </a:rPr>
-              <a:t>15</a:t>
+              <a:t>17</a:t>
             </a:r>
             <a:endParaRPr lang="en-US" sz="1100" dirty="0"/>
           </a:p>
@@ -9708,7 +12226,7 @@
                 <a:ea typeface="Spoqa Han Sans Neo" pitchFamily="34" charset="-122"/>
                 <a:cs typeface="Spoqa Han Sans Neo" pitchFamily="34" charset="-120"/>
               </a:rPr>
-              <a:t>모건스탠리·외국계 IB vs 국내 증권사, 그리고 중국 CXMT</a:t>
+              <a:t>IB·증권사 전망, 국내 투 톱(삼성·SK하이닉스), 중국 CXMT</a:t>
             </a:r>
             <a:endParaRPr lang="en-US" sz="1250" dirty="0"/>
           </a:p>
